--- a/student-work/Week 4/Labs/Day 4/Group_Activity_PoC_to_Production.pptx
+++ b/student-work/Week 4/Labs/Day 4/Group_Activity_PoC_to_Production.pptx
@@ -3152,24 +3152,156 @@
       <p:grpSpPr/>
       <p:sp>
         <p:nvSpPr>
-          <p:cNvPr id="2" name="Title 1"/>
-          <p:cNvSpPr>
-            <a:spLocks noGrp="1"/>
-          </p:cNvSpPr>
-          <p:nvPr>
-            <p:ph type="ctrTitle"/>
-          </p:nvPr>
-        </p:nvSpPr>
-        <p:spPr/>
-        <p:txBody>
-          <a:bodyPr/>
-          <a:lstStyle/>
-          <a:p>
-            <a:r>
-              <a:t>From PoC to Production:</a:t>
-            </a:r>
-          </a:p>
-          <a:p>
+          <p:cNvPr id="2" name="Rectangle 1"/>
+          <p:cNvSpPr/>
+          <p:nvPr/>
+        </p:nvSpPr>
+        <p:spPr>
+          <a:xfrm>
+            <a:off x="0" y="0"/>
+            <a:ext cx="12192000" cy="6858000"/>
+          </a:xfrm>
+          <a:prstGeom prst="rect">
+            <a:avLst/>
+          </a:prstGeom>
+          <a:solidFill>
+            <a:srgbClr val="1C2E5E"/>
+          </a:solidFill>
+          <a:ln>
+            <a:noFill/>
+          </a:ln>
+        </p:spPr>
+        <p:style>
+          <a:lnRef idx="1">
+            <a:schemeClr val="accent1"/>
+          </a:lnRef>
+          <a:fillRef idx="3">
+            <a:schemeClr val="accent1"/>
+          </a:fillRef>
+          <a:effectRef idx="2">
+            <a:schemeClr val="accent1"/>
+          </a:effectRef>
+          <a:fontRef idx="minor">
+            <a:schemeClr val="lt1"/>
+          </a:fontRef>
+        </p:style>
+        <p:txBody>
+          <a:bodyPr rtlCol="0" anchor="ctr"/>
+          <a:lstStyle/>
+          <a:p>
+            <a:pPr algn="ctr"/>
+          </a:p>
+        </p:txBody>
+      </p:sp>
+      <p:sp>
+        <p:nvSpPr>
+          <p:cNvPr id="3" name="Rectangle 2"/>
+          <p:cNvSpPr/>
+          <p:nvPr/>
+        </p:nvSpPr>
+        <p:spPr>
+          <a:xfrm>
+            <a:off x="0" y="0"/>
+            <a:ext cx="12192000" cy="73152"/>
+          </a:xfrm>
+          <a:prstGeom prst="rect">
+            <a:avLst/>
+          </a:prstGeom>
+          <a:solidFill>
+            <a:srgbClr val="FE3082"/>
+          </a:solidFill>
+          <a:ln>
+            <a:noFill/>
+          </a:ln>
+        </p:spPr>
+        <p:style>
+          <a:lnRef idx="1">
+            <a:schemeClr val="accent1"/>
+          </a:lnRef>
+          <a:fillRef idx="3">
+            <a:schemeClr val="accent1"/>
+          </a:fillRef>
+          <a:effectRef idx="2">
+            <a:schemeClr val="accent1"/>
+          </a:effectRef>
+          <a:fontRef idx="minor">
+            <a:schemeClr val="lt1"/>
+          </a:fontRef>
+        </p:style>
+        <p:txBody>
+          <a:bodyPr rtlCol="0" anchor="ctr"/>
+          <a:lstStyle/>
+          <a:p>
+            <a:pPr algn="ctr"/>
+          </a:p>
+        </p:txBody>
+      </p:sp>
+      <p:sp>
+        <p:nvSpPr>
+          <p:cNvPr id="4" name="TextBox 3"/>
+          <p:cNvSpPr txBox="1"/>
+          <p:nvPr/>
+        </p:nvSpPr>
+        <p:spPr>
+          <a:xfrm>
+            <a:off x="1371600" y="1828800"/>
+            <a:ext cx="9418320" cy="1371600"/>
+          </a:xfrm>
+          <a:prstGeom prst="rect">
+            <a:avLst/>
+          </a:prstGeom>
+          <a:noFill/>
+        </p:spPr>
+        <p:txBody>
+          <a:bodyPr wrap="square">
+            <a:spAutoFit/>
+          </a:bodyPr>
+          <a:lstStyle/>
+          <a:p>
+            <a:pPr algn="l">
+              <a:defRPr sz="4400" b="1">
+                <a:solidFill>
+                  <a:srgbClr val="FFFFFF"/>
+                </a:solidFill>
+                <a:latin typeface="Georgia"/>
+              </a:defRPr>
+            </a:pPr>
+            <a:r>
+              <a:t>From PoC to Production</a:t>
+            </a:r>
+          </a:p>
+        </p:txBody>
+      </p:sp>
+      <p:sp>
+        <p:nvSpPr>
+          <p:cNvPr id="5" name="TextBox 4"/>
+          <p:cNvSpPr txBox="1"/>
+          <p:nvPr/>
+        </p:nvSpPr>
+        <p:spPr>
+          <a:xfrm>
+            <a:off x="1371600" y="3017520"/>
+            <a:ext cx="9418320" cy="914400"/>
+          </a:xfrm>
+          <a:prstGeom prst="rect">
+            <a:avLst/>
+          </a:prstGeom>
+          <a:noFill/>
+        </p:spPr>
+        <p:txBody>
+          <a:bodyPr wrap="square">
+            <a:spAutoFit/>
+          </a:bodyPr>
+          <a:lstStyle/>
+          <a:p>
+            <a:pPr>
+              <a:defRPr sz="3000">
+                <a:solidFill>
+                  <a:srgbClr val="FFFFFF"/>
+                </a:solidFill>
+                <a:latin typeface="Georgia"/>
+              </a:defRPr>
+            </a:pPr>
             <a:r>
               <a:t>Claims Data Pipeline Architecture</a:t>
             </a:r>
@@ -3178,27 +3310,123 @@
       </p:sp>
       <p:sp>
         <p:nvSpPr>
-          <p:cNvPr id="3" name="Subtitle 2"/>
-          <p:cNvSpPr>
-            <a:spLocks noGrp="1"/>
-          </p:cNvSpPr>
-          <p:nvPr>
-            <p:ph type="subTitle" idx="1"/>
-          </p:nvPr>
-        </p:nvSpPr>
-        <p:spPr/>
-        <p:txBody>
-          <a:bodyPr/>
-          <a:lstStyle/>
-          <a:p>
-            <a:r>
-              <a:t>Team Presentation | Week 5 Day 1</a:t>
-            </a:r>
-          </a:p>
-          <a:p>
-            <a:r>
-              <a:t>TechCatalyst Data Engineering 2026</a:t>
-            </a:r>
+          <p:cNvPr id="6" name="Rectangle 5"/>
+          <p:cNvSpPr/>
+          <p:nvPr/>
+        </p:nvSpPr>
+        <p:spPr>
+          <a:xfrm>
+            <a:off x="4114800" y="4023360"/>
+            <a:ext cx="3931920" cy="25400"/>
+          </a:xfrm>
+          <a:prstGeom prst="rect">
+            <a:avLst/>
+          </a:prstGeom>
+          <a:solidFill>
+            <a:srgbClr val="FE3082"/>
+          </a:solidFill>
+          <a:ln>
+            <a:noFill/>
+          </a:ln>
+        </p:spPr>
+        <p:style>
+          <a:lnRef idx="1">
+            <a:schemeClr val="accent1"/>
+          </a:lnRef>
+          <a:fillRef idx="3">
+            <a:schemeClr val="accent1"/>
+          </a:fillRef>
+          <a:effectRef idx="2">
+            <a:schemeClr val="accent1"/>
+          </a:effectRef>
+          <a:fontRef idx="minor">
+            <a:schemeClr val="lt1"/>
+          </a:fontRef>
+        </p:style>
+        <p:txBody>
+          <a:bodyPr rtlCol="0" anchor="ctr"/>
+          <a:lstStyle/>
+          <a:p>
+            <a:pPr algn="ctr"/>
+          </a:p>
+        </p:txBody>
+      </p:sp>
+      <p:sp>
+        <p:nvSpPr>
+          <p:cNvPr id="7" name="TextBox 6"/>
+          <p:cNvSpPr txBox="1"/>
+          <p:nvPr/>
+        </p:nvSpPr>
+        <p:spPr>
+          <a:xfrm>
+            <a:off x="1371600" y="4389120"/>
+            <a:ext cx="9418320" cy="338554"/>
+          </a:xfrm>
+          <a:prstGeom prst="rect">
+            <a:avLst/>
+          </a:prstGeom>
+          <a:noFill/>
+        </p:spPr>
+        <p:txBody>
+          <a:bodyPr wrap="square">
+            <a:spAutoFit/>
+          </a:bodyPr>
+          <a:lstStyle/>
+          <a:p>
+            <a:pPr>
+              <a:defRPr sz="1600">
+                <a:solidFill>
+                  <a:srgbClr val="EAE5DF"/>
+                </a:solidFill>
+                <a:latin typeface="Arial"/>
+              </a:defRPr>
+            </a:pPr>
+            <a:r>
+              <a:t>Group Presentation  |  Week 5 Day 1  |  TechCatalyst Data Engineering 2026</a:t>
+            </a:r>
+          </a:p>
+        </p:txBody>
+      </p:sp>
+      <p:sp>
+        <p:nvSpPr>
+          <p:cNvPr id="8" name="Rectangle 7"/>
+          <p:cNvSpPr/>
+          <p:nvPr/>
+        </p:nvSpPr>
+        <p:spPr>
+          <a:xfrm>
+            <a:off x="0" y="6784848"/>
+            <a:ext cx="12192000" cy="73152"/>
+          </a:xfrm>
+          <a:prstGeom prst="rect">
+            <a:avLst/>
+          </a:prstGeom>
+          <a:solidFill>
+            <a:srgbClr val="FE3082"/>
+          </a:solidFill>
+          <a:ln>
+            <a:noFill/>
+          </a:ln>
+        </p:spPr>
+        <p:style>
+          <a:lnRef idx="1">
+            <a:schemeClr val="accent1"/>
+          </a:lnRef>
+          <a:fillRef idx="3">
+            <a:schemeClr val="accent1"/>
+          </a:fillRef>
+          <a:effectRef idx="2">
+            <a:schemeClr val="accent1"/>
+          </a:effectRef>
+          <a:fontRef idx="minor">
+            <a:schemeClr val="lt1"/>
+          </a:fontRef>
+        </p:style>
+        <p:txBody>
+          <a:bodyPr rtlCol="0" anchor="ctr"/>
+          <a:lstStyle/>
+          <a:p>
+            <a:pPr algn="ctr"/>
           </a:p>
         </p:txBody>
       </p:sp>
@@ -3222,77 +3450,1253 @@
       <p:grpSpPr/>
       <p:sp>
         <p:nvSpPr>
-          <p:cNvPr id="2" name="Title 1"/>
-          <p:cNvSpPr>
-            <a:spLocks noGrp="1"/>
-          </p:cNvSpPr>
-          <p:nvPr>
-            <p:ph type="title"/>
-          </p:nvPr>
-        </p:nvSpPr>
-        <p:spPr/>
-        <p:txBody>
-          <a:bodyPr/>
-          <a:lstStyle/>
-          <a:p>
-            <a:r>
-              <a:t>Decision Summary (5 Challenges)</a:t>
-            </a:r>
-          </a:p>
-        </p:txBody>
-      </p:sp>
-      <p:sp>
-        <p:nvSpPr>
-          <p:cNvPr id="3" name="Content Placeholder 2"/>
-          <p:cNvSpPr>
-            <a:spLocks noGrp="1"/>
-          </p:cNvSpPr>
-          <p:nvPr>
-            <p:ph idx="1"/>
-          </p:nvPr>
-        </p:nvSpPr>
-        <p:spPr/>
-        <p:txBody>
-          <a:bodyPr/>
-          <a:lstStyle/>
-          <a:p>
-            <a:pPr>
-              <a:defRPr sz="1800"/>
-            </a:pPr>
-            <a:r>
-              <a:t>1. Pandas ceiling: Replace with distributed Spark (Glue) for parallelism and fault tolerance</a:t>
-            </a:r>
-          </a:p>
-          <a:p>
-            <a:pPr>
-              <a:defRPr sz="1800"/>
-            </a:pPr>
-            <a:r>
-              <a:t>2. Processing location: AWS Glue (ingest/clean) + Snowflake (integrate/serve)</a:t>
-            </a:r>
-          </a:p>
-          <a:p>
-            <a:pPr>
-              <a:defRPr sz="1800"/>
-            </a:pPr>
-            <a:r>
-              <a:t>3. Failure recovery: Medallion layers + Snowflake COPY INTO idempotency</a:t>
-            </a:r>
-          </a:p>
-          <a:p>
-            <a:pPr>
-              <a:defRPr sz="1800"/>
-            </a:pPr>
-            <a:r>
-              <a:t>4. Layer placement: S3 for Bronze/Silver (cost), Snowflake for Gold (performance)</a:t>
-            </a:r>
-          </a:p>
-          <a:p>
-            <a:pPr>
-              <a:defRPr sz="1800"/>
-            </a:pPr>
-            <a:r>
-              <a:t>5. "Today" query: Daily-rebuilt transient Gold table + clustering for historical access</a:t>
+          <p:cNvPr id="2" name="Rectangle 1"/>
+          <p:cNvSpPr/>
+          <p:nvPr/>
+        </p:nvSpPr>
+        <p:spPr>
+          <a:xfrm>
+            <a:off x="0" y="0"/>
+            <a:ext cx="12192000" cy="1143000"/>
+          </a:xfrm>
+          <a:prstGeom prst="rect">
+            <a:avLst/>
+          </a:prstGeom>
+          <a:solidFill>
+            <a:srgbClr val="1C2E5E"/>
+          </a:solidFill>
+          <a:ln>
+            <a:noFill/>
+          </a:ln>
+        </p:spPr>
+        <p:style>
+          <a:lnRef idx="1">
+            <a:schemeClr val="accent1"/>
+          </a:lnRef>
+          <a:fillRef idx="3">
+            <a:schemeClr val="accent1"/>
+          </a:fillRef>
+          <a:effectRef idx="2">
+            <a:schemeClr val="accent1"/>
+          </a:effectRef>
+          <a:fontRef idx="minor">
+            <a:schemeClr val="lt1"/>
+          </a:fontRef>
+        </p:style>
+        <p:txBody>
+          <a:bodyPr rtlCol="0" anchor="ctr"/>
+          <a:lstStyle/>
+          <a:p>
+            <a:pPr algn="ctr"/>
+          </a:p>
+        </p:txBody>
+      </p:sp>
+      <p:sp>
+        <p:nvSpPr>
+          <p:cNvPr id="3" name="TextBox 2"/>
+          <p:cNvSpPr txBox="1"/>
+          <p:nvPr/>
+        </p:nvSpPr>
+        <p:spPr>
+          <a:xfrm>
+            <a:off x="457200" y="137160"/>
+            <a:ext cx="11247120" cy="548640"/>
+          </a:xfrm>
+          <a:prstGeom prst="rect">
+            <a:avLst/>
+          </a:prstGeom>
+          <a:noFill/>
+        </p:spPr>
+        <p:txBody>
+          <a:bodyPr wrap="square">
+            <a:spAutoFit/>
+          </a:bodyPr>
+          <a:lstStyle/>
+          <a:p>
+            <a:pPr>
+              <a:defRPr sz="3000" b="1">
+                <a:solidFill>
+                  <a:srgbClr val="FFFFFF"/>
+                </a:solidFill>
+                <a:latin typeface="Georgia"/>
+              </a:defRPr>
+            </a:pPr>
+            <a:r>
+              <a:t>Top Three Risks</a:t>
+            </a:r>
+          </a:p>
+        </p:txBody>
+      </p:sp>
+      <p:sp>
+        <p:nvSpPr>
+          <p:cNvPr id="4" name="TextBox 3"/>
+          <p:cNvSpPr txBox="1"/>
+          <p:nvPr/>
+        </p:nvSpPr>
+        <p:spPr>
+          <a:xfrm>
+            <a:off x="457200" y="640080"/>
+            <a:ext cx="11247120" cy="320040"/>
+          </a:xfrm>
+          <a:prstGeom prst="rect">
+            <a:avLst/>
+          </a:prstGeom>
+          <a:noFill/>
+        </p:spPr>
+        <p:txBody>
+          <a:bodyPr wrap="square">
+            <a:spAutoFit/>
+          </a:bodyPr>
+          <a:lstStyle/>
+          <a:p>
+            <a:pPr>
+              <a:defRPr sz="1400" b="0">
+                <a:solidFill>
+                  <a:srgbClr val="FE97C0"/>
+                </a:solidFill>
+                <a:latin typeface="Arial"/>
+              </a:defRPr>
+            </a:pPr>
+            <a:r>
+              <a:t>Risk + Mitigation  |  Required Deliverable #4</a:t>
+            </a:r>
+          </a:p>
+        </p:txBody>
+      </p:sp>
+      <p:sp>
+        <p:nvSpPr>
+          <p:cNvPr id="5" name="Rectangle 4"/>
+          <p:cNvSpPr/>
+          <p:nvPr/>
+        </p:nvSpPr>
+        <p:spPr>
+          <a:xfrm>
+            <a:off x="0" y="6784848"/>
+            <a:ext cx="12192000" cy="73152"/>
+          </a:xfrm>
+          <a:prstGeom prst="rect">
+            <a:avLst/>
+          </a:prstGeom>
+          <a:solidFill>
+            <a:srgbClr val="1C2E5E"/>
+          </a:solidFill>
+          <a:ln>
+            <a:noFill/>
+          </a:ln>
+        </p:spPr>
+        <p:style>
+          <a:lnRef idx="1">
+            <a:schemeClr val="accent1"/>
+          </a:lnRef>
+          <a:fillRef idx="3">
+            <a:schemeClr val="accent1"/>
+          </a:fillRef>
+          <a:effectRef idx="2">
+            <a:schemeClr val="accent1"/>
+          </a:effectRef>
+          <a:fontRef idx="minor">
+            <a:schemeClr val="lt1"/>
+          </a:fontRef>
+        </p:style>
+        <p:txBody>
+          <a:bodyPr rtlCol="0" anchor="ctr"/>
+          <a:lstStyle/>
+          <a:p>
+            <a:pPr algn="ctr"/>
+          </a:p>
+        </p:txBody>
+      </p:sp>
+      <p:sp>
+        <p:nvSpPr>
+          <p:cNvPr id="6" name="Rounded Rectangle 5"/>
+          <p:cNvSpPr/>
+          <p:nvPr/>
+        </p:nvSpPr>
+        <p:spPr>
+          <a:xfrm>
+            <a:off x="365760" y="1371600"/>
+            <a:ext cx="3700000" cy="5100000"/>
+          </a:xfrm>
+          <a:prstGeom prst="roundRect">
+            <a:avLst/>
+          </a:prstGeom>
+          <a:solidFill>
+            <a:srgbClr val="FAFAFA"/>
+          </a:solidFill>
+          <a:ln>
+            <a:solidFill>
+              <a:srgbClr val="DDDDDD"/>
+            </a:solidFill>
+          </a:ln>
+        </p:spPr>
+        <p:style>
+          <a:lnRef idx="1">
+            <a:schemeClr val="accent1"/>
+          </a:lnRef>
+          <a:fillRef idx="3">
+            <a:schemeClr val="accent1"/>
+          </a:fillRef>
+          <a:effectRef idx="2">
+            <a:schemeClr val="accent1"/>
+          </a:effectRef>
+          <a:fontRef idx="minor">
+            <a:schemeClr val="lt1"/>
+          </a:fontRef>
+        </p:style>
+        <p:txBody>
+          <a:bodyPr rtlCol="0" anchor="ctr"/>
+          <a:lstStyle/>
+          <a:p>
+            <a:pPr algn="ctr"/>
+          </a:p>
+        </p:txBody>
+      </p:sp>
+      <p:sp>
+        <p:nvSpPr>
+          <p:cNvPr id="7" name="Rectangle 6"/>
+          <p:cNvSpPr/>
+          <p:nvPr/>
+        </p:nvSpPr>
+        <p:spPr>
+          <a:xfrm>
+            <a:off x="502920" y="1508760"/>
+            <a:ext cx="600000" cy="320040"/>
+          </a:xfrm>
+          <a:prstGeom prst="rect">
+            <a:avLst/>
+          </a:prstGeom>
+          <a:solidFill>
+            <a:srgbClr val="1C2E5E"/>
+          </a:solidFill>
+          <a:ln>
+            <a:noFill/>
+          </a:ln>
+        </p:spPr>
+        <p:style>
+          <a:lnRef idx="1">
+            <a:schemeClr val="accent1"/>
+          </a:lnRef>
+          <a:fillRef idx="3">
+            <a:schemeClr val="accent1"/>
+          </a:fillRef>
+          <a:effectRef idx="2">
+            <a:schemeClr val="accent1"/>
+          </a:effectRef>
+          <a:fontRef idx="minor">
+            <a:schemeClr val="lt1"/>
+          </a:fontRef>
+        </p:style>
+        <p:txBody>
+          <a:bodyPr rtlCol="0" anchor="ctr"/>
+          <a:lstStyle/>
+          <a:p>
+            <a:pPr algn="ctr"/>
+          </a:p>
+        </p:txBody>
+      </p:sp>
+      <p:sp>
+        <p:nvSpPr>
+          <p:cNvPr id="8" name="TextBox 7"/>
+          <p:cNvSpPr txBox="1"/>
+          <p:nvPr/>
+        </p:nvSpPr>
+        <p:spPr>
+          <a:xfrm>
+            <a:off x="548640" y="1508760"/>
+            <a:ext cx="600000" cy="320040"/>
+          </a:xfrm>
+          <a:prstGeom prst="rect">
+            <a:avLst/>
+          </a:prstGeom>
+          <a:noFill/>
+        </p:spPr>
+        <p:txBody>
+          <a:bodyPr wrap="none" anchor="ctr">
+            <a:spAutoFit/>
+          </a:bodyPr>
+          <a:lstStyle/>
+          <a:p>
+            <a:pPr>
+              <a:defRPr sz="1100" b="1">
+                <a:solidFill>
+                  <a:srgbClr val="FFFFFF"/>
+                </a:solidFill>
+                <a:latin typeface="Arial"/>
+              </a:defRPr>
+            </a:pPr>
+            <a:r>
+              <a:t>RISK 1</a:t>
+            </a:r>
+          </a:p>
+        </p:txBody>
+      </p:sp>
+      <p:sp>
+        <p:nvSpPr>
+          <p:cNvPr id="9" name="TextBox 8"/>
+          <p:cNvSpPr txBox="1"/>
+          <p:nvPr/>
+        </p:nvSpPr>
+        <p:spPr>
+          <a:xfrm>
+            <a:off x="502920" y="1920240"/>
+            <a:ext cx="3400000" cy="4400000"/>
+          </a:xfrm>
+          <a:prstGeom prst="rect">
+            <a:avLst/>
+          </a:prstGeom>
+          <a:noFill/>
+        </p:spPr>
+        <p:txBody>
+          <a:bodyPr wrap="square">
+            <a:spAutoFit/>
+          </a:bodyPr>
+          <a:lstStyle/>
+          <a:p>
+            <a:pPr>
+              <a:spcAft>
+                <a:spcPts val="400"/>
+              </a:spcAft>
+              <a:defRPr sz="1000">
+                <a:solidFill>
+                  <a:srgbClr val="272727"/>
+                </a:solidFill>
+                <a:latin typeface="Arial"/>
+              </a:defRPr>
+            </a:pPr>
+            <a:r>
+              <a:t>Partner file quality</a:t>
+            </a:r>
+          </a:p>
+          <a:p>
+            <a:pPr>
+              <a:spcAft>
+                <a:spcPts val="400"/>
+              </a:spcAft>
+              <a:defRPr sz="1000">
+                <a:solidFill>
+                  <a:srgbClr val="272727"/>
+                </a:solidFill>
+                <a:latin typeface="Arial"/>
+              </a:defRPr>
+            </a:pPr>
+            <a:r>
+              <a:t>degrades silently</a:t>
+            </a:r>
+          </a:p>
+          <a:p>
+            <a:pPr>
+              <a:spcAft>
+                <a:spcPts val="400"/>
+              </a:spcAft>
+              <a:defRPr sz="1000">
+                <a:solidFill>
+                  <a:srgbClr val="272727"/>
+                </a:solidFill>
+                <a:latin typeface="Arial"/>
+              </a:defRPr>
+            </a:pPr>
+          </a:p>
+          <a:p>
+            <a:pPr>
+              <a:spcAft>
+                <a:spcPts val="400"/>
+              </a:spcAft>
+              <a:defRPr sz="1000">
+                <a:solidFill>
+                  <a:srgbClr val="272727"/>
+                </a:solidFill>
+                <a:latin typeface="Arial"/>
+              </a:defRPr>
+            </a:pPr>
+            <a:r>
+              <a:t>Impact:</a:t>
+            </a:r>
+          </a:p>
+          <a:p>
+            <a:pPr>
+              <a:spcAft>
+                <a:spcPts val="400"/>
+              </a:spcAft>
+              <a:defRPr sz="1000">
+                <a:solidFill>
+                  <a:srgbClr val="272727"/>
+                </a:solidFill>
+                <a:latin typeface="Arial"/>
+              </a:defRPr>
+            </a:pPr>
+            <a:r>
+              <a:t>  Bad data reaches Gold tables</a:t>
+            </a:r>
+          </a:p>
+          <a:p>
+            <a:pPr>
+              <a:spcAft>
+                <a:spcPts val="400"/>
+              </a:spcAft>
+              <a:defRPr sz="1000">
+                <a:solidFill>
+                  <a:srgbClr val="272727"/>
+                </a:solidFill>
+                <a:latin typeface="Arial"/>
+              </a:defRPr>
+            </a:pPr>
+            <a:r>
+              <a:t>  Dashboard shows wrong numbers</a:t>
+            </a:r>
+          </a:p>
+          <a:p>
+            <a:pPr>
+              <a:spcAft>
+                <a:spcPts val="400"/>
+              </a:spcAft>
+              <a:defRPr sz="1000">
+                <a:solidFill>
+                  <a:srgbClr val="272727"/>
+                </a:solidFill>
+                <a:latin typeface="Arial"/>
+              </a:defRPr>
+            </a:pPr>
+            <a:r>
+              <a:t>  Trust erodes with leadership</a:t>
+            </a:r>
+          </a:p>
+          <a:p>
+            <a:pPr>
+              <a:spcAft>
+                <a:spcPts val="400"/>
+              </a:spcAft>
+              <a:defRPr sz="1000">
+                <a:solidFill>
+                  <a:srgbClr val="272727"/>
+                </a:solidFill>
+                <a:latin typeface="Arial"/>
+              </a:defRPr>
+            </a:pPr>
+          </a:p>
+          <a:p>
+            <a:pPr>
+              <a:spcAft>
+                <a:spcPts val="400"/>
+              </a:spcAft>
+              <a:defRPr sz="1000">
+                <a:solidFill>
+                  <a:srgbClr val="272727"/>
+                </a:solidFill>
+                <a:latin typeface="Arial"/>
+              </a:defRPr>
+            </a:pPr>
+            <a:r>
+              <a:t>Mitigation:</a:t>
+            </a:r>
+          </a:p>
+          <a:p>
+            <a:pPr>
+              <a:spcAft>
+                <a:spcPts val="400"/>
+              </a:spcAft>
+              <a:defRPr sz="1000">
+                <a:solidFill>
+                  <a:srgbClr val="272727"/>
+                </a:solidFill>
+                <a:latin typeface="Arial"/>
+              </a:defRPr>
+            </a:pPr>
+            <a:r>
+              <a:t>  Data contract gate (Bronze-&gt;Silver)</a:t>
+            </a:r>
+          </a:p>
+          <a:p>
+            <a:pPr>
+              <a:spcAft>
+                <a:spcPts val="400"/>
+              </a:spcAft>
+              <a:defRPr sz="1000">
+                <a:solidFill>
+                  <a:srgbClr val="272727"/>
+                </a:solidFill>
+                <a:latin typeface="Arial"/>
+              </a:defRPr>
+            </a:pPr>
+            <a:r>
+              <a:t>  Schema checks per source</a:t>
+            </a:r>
+          </a:p>
+          <a:p>
+            <a:pPr>
+              <a:spcAft>
+                <a:spcPts val="400"/>
+              </a:spcAft>
+              <a:defRPr sz="1000">
+                <a:solidFill>
+                  <a:srgbClr val="272727"/>
+                </a:solidFill>
+                <a:latin typeface="Arial"/>
+              </a:defRPr>
+            </a:pPr>
+            <a:r>
+              <a:t>  Row-count thresholds</a:t>
+            </a:r>
+          </a:p>
+          <a:p>
+            <a:pPr>
+              <a:spcAft>
+                <a:spcPts val="400"/>
+              </a:spcAft>
+              <a:defRPr sz="1000">
+                <a:solidFill>
+                  <a:srgbClr val="272727"/>
+                </a:solidFill>
+                <a:latin typeface="Arial"/>
+              </a:defRPr>
+            </a:pPr>
+            <a:r>
+              <a:t>  Freshness alerts</a:t>
+            </a:r>
+          </a:p>
+          <a:p>
+            <a:pPr>
+              <a:spcAft>
+                <a:spcPts val="400"/>
+              </a:spcAft>
+              <a:defRPr sz="1000">
+                <a:solidFill>
+                  <a:srgbClr val="272727"/>
+                </a:solidFill>
+                <a:latin typeface="Arial"/>
+              </a:defRPr>
+            </a:pPr>
+            <a:r>
+              <a:t>  Auto-quarantine on failure</a:t>
+            </a:r>
+          </a:p>
+        </p:txBody>
+      </p:sp>
+      <p:sp>
+        <p:nvSpPr>
+          <p:cNvPr id="10" name="Rounded Rectangle 9"/>
+          <p:cNvSpPr/>
+          <p:nvPr/>
+        </p:nvSpPr>
+        <p:spPr>
+          <a:xfrm>
+            <a:off x="4200000" y="1371600"/>
+            <a:ext cx="3700000" cy="5100000"/>
+          </a:xfrm>
+          <a:prstGeom prst="roundRect">
+            <a:avLst/>
+          </a:prstGeom>
+          <a:solidFill>
+            <a:srgbClr val="FAFAFA"/>
+          </a:solidFill>
+          <a:ln>
+            <a:solidFill>
+              <a:srgbClr val="DDDDDD"/>
+            </a:solidFill>
+          </a:ln>
+        </p:spPr>
+        <p:style>
+          <a:lnRef idx="1">
+            <a:schemeClr val="accent1"/>
+          </a:lnRef>
+          <a:fillRef idx="3">
+            <a:schemeClr val="accent1"/>
+          </a:fillRef>
+          <a:effectRef idx="2">
+            <a:schemeClr val="accent1"/>
+          </a:effectRef>
+          <a:fontRef idx="minor">
+            <a:schemeClr val="lt1"/>
+          </a:fontRef>
+        </p:style>
+        <p:txBody>
+          <a:bodyPr rtlCol="0" anchor="ctr"/>
+          <a:lstStyle/>
+          <a:p>
+            <a:pPr algn="ctr"/>
+          </a:p>
+        </p:txBody>
+      </p:sp>
+      <p:sp>
+        <p:nvSpPr>
+          <p:cNvPr id="11" name="Rectangle 10"/>
+          <p:cNvSpPr/>
+          <p:nvPr/>
+        </p:nvSpPr>
+        <p:spPr>
+          <a:xfrm>
+            <a:off x="4337160" y="1508760"/>
+            <a:ext cx="600000" cy="320040"/>
+          </a:xfrm>
+          <a:prstGeom prst="rect">
+            <a:avLst/>
+          </a:prstGeom>
+          <a:solidFill>
+            <a:srgbClr val="1C2E5E"/>
+          </a:solidFill>
+          <a:ln>
+            <a:noFill/>
+          </a:ln>
+        </p:spPr>
+        <p:style>
+          <a:lnRef idx="1">
+            <a:schemeClr val="accent1"/>
+          </a:lnRef>
+          <a:fillRef idx="3">
+            <a:schemeClr val="accent1"/>
+          </a:fillRef>
+          <a:effectRef idx="2">
+            <a:schemeClr val="accent1"/>
+          </a:effectRef>
+          <a:fontRef idx="minor">
+            <a:schemeClr val="lt1"/>
+          </a:fontRef>
+        </p:style>
+        <p:txBody>
+          <a:bodyPr rtlCol="0" anchor="ctr"/>
+          <a:lstStyle/>
+          <a:p>
+            <a:pPr algn="ctr"/>
+          </a:p>
+        </p:txBody>
+      </p:sp>
+      <p:sp>
+        <p:nvSpPr>
+          <p:cNvPr id="12" name="TextBox 11"/>
+          <p:cNvSpPr txBox="1"/>
+          <p:nvPr/>
+        </p:nvSpPr>
+        <p:spPr>
+          <a:xfrm>
+            <a:off x="4382880" y="1508760"/>
+            <a:ext cx="600000" cy="320040"/>
+          </a:xfrm>
+          <a:prstGeom prst="rect">
+            <a:avLst/>
+          </a:prstGeom>
+          <a:noFill/>
+        </p:spPr>
+        <p:txBody>
+          <a:bodyPr wrap="none" anchor="ctr">
+            <a:spAutoFit/>
+          </a:bodyPr>
+          <a:lstStyle/>
+          <a:p>
+            <a:pPr>
+              <a:defRPr sz="1100" b="1">
+                <a:solidFill>
+                  <a:srgbClr val="FFFFFF"/>
+                </a:solidFill>
+                <a:latin typeface="Arial"/>
+              </a:defRPr>
+            </a:pPr>
+            <a:r>
+              <a:t>RISK 2</a:t>
+            </a:r>
+          </a:p>
+        </p:txBody>
+      </p:sp>
+      <p:sp>
+        <p:nvSpPr>
+          <p:cNvPr id="13" name="TextBox 12"/>
+          <p:cNvSpPr txBox="1"/>
+          <p:nvPr/>
+        </p:nvSpPr>
+        <p:spPr>
+          <a:xfrm>
+            <a:off x="4337160" y="1920240"/>
+            <a:ext cx="3400000" cy="4400000"/>
+          </a:xfrm>
+          <a:prstGeom prst="rect">
+            <a:avLst/>
+          </a:prstGeom>
+          <a:noFill/>
+        </p:spPr>
+        <p:txBody>
+          <a:bodyPr wrap="square">
+            <a:spAutoFit/>
+          </a:bodyPr>
+          <a:lstStyle/>
+          <a:p>
+            <a:pPr>
+              <a:spcAft>
+                <a:spcPts val="400"/>
+              </a:spcAft>
+              <a:defRPr sz="1000">
+                <a:solidFill>
+                  <a:srgbClr val="272727"/>
+                </a:solidFill>
+                <a:latin typeface="Arial"/>
+              </a:defRPr>
+            </a:pPr>
+            <a:r>
+              <a:t>Backfill takes longer</a:t>
+            </a:r>
+          </a:p>
+          <a:p>
+            <a:pPr>
+              <a:spcAft>
+                <a:spcPts val="400"/>
+              </a:spcAft>
+              <a:defRPr sz="1000">
+                <a:solidFill>
+                  <a:srgbClr val="272727"/>
+                </a:solidFill>
+                <a:latin typeface="Arial"/>
+              </a:defRPr>
+            </a:pPr>
+            <a:r>
+              <a:t>than estimated</a:t>
+            </a:r>
+          </a:p>
+          <a:p>
+            <a:pPr>
+              <a:spcAft>
+                <a:spcPts val="400"/>
+              </a:spcAft>
+              <a:defRPr sz="1000">
+                <a:solidFill>
+                  <a:srgbClr val="272727"/>
+                </a:solidFill>
+                <a:latin typeface="Arial"/>
+              </a:defRPr>
+            </a:pPr>
+          </a:p>
+          <a:p>
+            <a:pPr>
+              <a:spcAft>
+                <a:spcPts val="400"/>
+              </a:spcAft>
+              <a:defRPr sz="1000">
+                <a:solidFill>
+                  <a:srgbClr val="272727"/>
+                </a:solidFill>
+                <a:latin typeface="Arial"/>
+              </a:defRPr>
+            </a:pPr>
+            <a:r>
+              <a:t>Impact:</a:t>
+            </a:r>
+          </a:p>
+          <a:p>
+            <a:pPr>
+              <a:spcAft>
+                <a:spcPts val="400"/>
+              </a:spcAft>
+              <a:defRPr sz="1000">
+                <a:solidFill>
+                  <a:srgbClr val="272727"/>
+                </a:solidFill>
+                <a:latin typeface="Arial"/>
+              </a:defRPr>
+            </a:pPr>
+            <a:r>
+              <a:t>  Blocks go-live date</a:t>
+            </a:r>
+          </a:p>
+          <a:p>
+            <a:pPr>
+              <a:spcAft>
+                <a:spcPts val="400"/>
+              </a:spcAft>
+              <a:defRPr sz="1000">
+                <a:solidFill>
+                  <a:srgbClr val="272727"/>
+                </a:solidFill>
+                <a:latin typeface="Arial"/>
+              </a:defRPr>
+            </a:pPr>
+            <a:r>
+              <a:t>  Historical data unavailable</a:t>
+            </a:r>
+          </a:p>
+          <a:p>
+            <a:pPr>
+              <a:spcAft>
+                <a:spcPts val="400"/>
+              </a:spcAft>
+              <a:defRPr sz="1000">
+                <a:solidFill>
+                  <a:srgbClr val="272727"/>
+                </a:solidFill>
+                <a:latin typeface="Arial"/>
+              </a:defRPr>
+            </a:pPr>
+            <a:r>
+              <a:t>  Analysts cannot run reports</a:t>
+            </a:r>
+          </a:p>
+          <a:p>
+            <a:pPr>
+              <a:spcAft>
+                <a:spcPts val="400"/>
+              </a:spcAft>
+              <a:defRPr sz="1000">
+                <a:solidFill>
+                  <a:srgbClr val="272727"/>
+                </a:solidFill>
+                <a:latin typeface="Arial"/>
+              </a:defRPr>
+            </a:pPr>
+          </a:p>
+          <a:p>
+            <a:pPr>
+              <a:spcAft>
+                <a:spcPts val="400"/>
+              </a:spcAft>
+              <a:defRPr sz="1000">
+                <a:solidFill>
+                  <a:srgbClr val="272727"/>
+                </a:solidFill>
+                <a:latin typeface="Arial"/>
+              </a:defRPr>
+            </a:pPr>
+            <a:r>
+              <a:t>Mitigation:</a:t>
+            </a:r>
+          </a:p>
+          <a:p>
+            <a:pPr>
+              <a:spcAft>
+                <a:spcPts val="400"/>
+              </a:spcAft>
+              <a:defRPr sz="1000">
+                <a:solidFill>
+                  <a:srgbClr val="272727"/>
+                </a:solidFill>
+                <a:latin typeface="Arial"/>
+              </a:defRPr>
+            </a:pPr>
+            <a:r>
+              <a:t>  Separate high-parallelism job</a:t>
+            </a:r>
+          </a:p>
+          <a:p>
+            <a:pPr>
+              <a:spcAft>
+                <a:spcPts val="400"/>
+              </a:spcAft>
+              <a:defRPr sz="1000">
+                <a:solidFill>
+                  <a:srgbClr val="272727"/>
+                </a:solidFill>
+                <a:latin typeface="Arial"/>
+              </a:defRPr>
+            </a:pPr>
+            <a:r>
+              <a:t>  Process in date-range chunks</a:t>
+            </a:r>
+          </a:p>
+          <a:p>
+            <a:pPr>
+              <a:spcAft>
+                <a:spcPts val="400"/>
+              </a:spcAft>
+              <a:defRPr sz="1000">
+                <a:solidFill>
+                  <a:srgbClr val="272727"/>
+                </a:solidFill>
+                <a:latin typeface="Arial"/>
+              </a:defRPr>
+            </a:pPr>
+            <a:r>
+              <a:t>  Validate incrementally</a:t>
+            </a:r>
+          </a:p>
+          <a:p>
+            <a:pPr>
+              <a:spcAft>
+                <a:spcPts val="400"/>
+              </a:spcAft>
+              <a:defRPr sz="1000">
+                <a:solidFill>
+                  <a:srgbClr val="272727"/>
+                </a:solidFill>
+                <a:latin typeface="Arial"/>
+              </a:defRPr>
+            </a:pPr>
+            <a:r>
+              <a:t>  Daily pipeline runs in parallel</a:t>
+            </a:r>
+          </a:p>
+          <a:p>
+            <a:pPr>
+              <a:spcAft>
+                <a:spcPts val="400"/>
+              </a:spcAft>
+              <a:defRPr sz="1000">
+                <a:solidFill>
+                  <a:srgbClr val="272727"/>
+                </a:solidFill>
+                <a:latin typeface="Arial"/>
+              </a:defRPr>
+            </a:pPr>
+            <a:r>
+              <a:t>  (not blocked by backfill)</a:t>
+            </a:r>
+          </a:p>
+        </p:txBody>
+      </p:sp>
+      <p:sp>
+        <p:nvSpPr>
+          <p:cNvPr id="14" name="Rounded Rectangle 13"/>
+          <p:cNvSpPr/>
+          <p:nvPr/>
+        </p:nvSpPr>
+        <p:spPr>
+          <a:xfrm>
+            <a:off x="8034240" y="1371600"/>
+            <a:ext cx="3700000" cy="5100000"/>
+          </a:xfrm>
+          <a:prstGeom prst="roundRect">
+            <a:avLst/>
+          </a:prstGeom>
+          <a:solidFill>
+            <a:srgbClr val="FAFAFA"/>
+          </a:solidFill>
+          <a:ln>
+            <a:solidFill>
+              <a:srgbClr val="DDDDDD"/>
+            </a:solidFill>
+          </a:ln>
+        </p:spPr>
+        <p:style>
+          <a:lnRef idx="1">
+            <a:schemeClr val="accent1"/>
+          </a:lnRef>
+          <a:fillRef idx="3">
+            <a:schemeClr val="accent1"/>
+          </a:fillRef>
+          <a:effectRef idx="2">
+            <a:schemeClr val="accent1"/>
+          </a:effectRef>
+          <a:fontRef idx="minor">
+            <a:schemeClr val="lt1"/>
+          </a:fontRef>
+        </p:style>
+        <p:txBody>
+          <a:bodyPr rtlCol="0" anchor="ctr"/>
+          <a:lstStyle/>
+          <a:p>
+            <a:pPr algn="ctr"/>
+          </a:p>
+        </p:txBody>
+      </p:sp>
+      <p:sp>
+        <p:nvSpPr>
+          <p:cNvPr id="15" name="Rectangle 14"/>
+          <p:cNvSpPr/>
+          <p:nvPr/>
+        </p:nvSpPr>
+        <p:spPr>
+          <a:xfrm>
+            <a:off x="8171400" y="1508760"/>
+            <a:ext cx="600000" cy="320040"/>
+          </a:xfrm>
+          <a:prstGeom prst="rect">
+            <a:avLst/>
+          </a:prstGeom>
+          <a:solidFill>
+            <a:srgbClr val="1C2E5E"/>
+          </a:solidFill>
+          <a:ln>
+            <a:noFill/>
+          </a:ln>
+        </p:spPr>
+        <p:style>
+          <a:lnRef idx="1">
+            <a:schemeClr val="accent1"/>
+          </a:lnRef>
+          <a:fillRef idx="3">
+            <a:schemeClr val="accent1"/>
+          </a:fillRef>
+          <a:effectRef idx="2">
+            <a:schemeClr val="accent1"/>
+          </a:effectRef>
+          <a:fontRef idx="minor">
+            <a:schemeClr val="lt1"/>
+          </a:fontRef>
+        </p:style>
+        <p:txBody>
+          <a:bodyPr rtlCol="0" anchor="ctr"/>
+          <a:lstStyle/>
+          <a:p>
+            <a:pPr algn="ctr"/>
+          </a:p>
+        </p:txBody>
+      </p:sp>
+      <p:sp>
+        <p:nvSpPr>
+          <p:cNvPr id="16" name="TextBox 15"/>
+          <p:cNvSpPr txBox="1"/>
+          <p:nvPr/>
+        </p:nvSpPr>
+        <p:spPr>
+          <a:xfrm>
+            <a:off x="8217120" y="1508760"/>
+            <a:ext cx="600000" cy="320040"/>
+          </a:xfrm>
+          <a:prstGeom prst="rect">
+            <a:avLst/>
+          </a:prstGeom>
+          <a:noFill/>
+        </p:spPr>
+        <p:txBody>
+          <a:bodyPr wrap="none" anchor="ctr">
+            <a:spAutoFit/>
+          </a:bodyPr>
+          <a:lstStyle/>
+          <a:p>
+            <a:pPr>
+              <a:defRPr sz="1100" b="1">
+                <a:solidFill>
+                  <a:srgbClr val="FFFFFF"/>
+                </a:solidFill>
+                <a:latin typeface="Arial"/>
+              </a:defRPr>
+            </a:pPr>
+            <a:r>
+              <a:t>RISK 3</a:t>
+            </a:r>
+          </a:p>
+        </p:txBody>
+      </p:sp>
+      <p:sp>
+        <p:nvSpPr>
+          <p:cNvPr id="17" name="TextBox 16"/>
+          <p:cNvSpPr txBox="1"/>
+          <p:nvPr/>
+        </p:nvSpPr>
+        <p:spPr>
+          <a:xfrm>
+            <a:off x="8171400" y="1920240"/>
+            <a:ext cx="3400000" cy="4400000"/>
+          </a:xfrm>
+          <a:prstGeom prst="rect">
+            <a:avLst/>
+          </a:prstGeom>
+          <a:noFill/>
+        </p:spPr>
+        <p:txBody>
+          <a:bodyPr wrap="square">
+            <a:spAutoFit/>
+          </a:bodyPr>
+          <a:lstStyle/>
+          <a:p>
+            <a:pPr>
+              <a:spcAft>
+                <a:spcPts val="400"/>
+              </a:spcAft>
+              <a:defRPr sz="1000">
+                <a:solidFill>
+                  <a:srgbClr val="272727"/>
+                </a:solidFill>
+                <a:latin typeface="Arial"/>
+              </a:defRPr>
+            </a:pPr>
+            <a:r>
+              <a:t>Snowflake costs spike</a:t>
+            </a:r>
+          </a:p>
+          <a:p>
+            <a:pPr>
+              <a:spcAft>
+                <a:spcPts val="400"/>
+              </a:spcAft>
+              <a:defRPr sz="1000">
+                <a:solidFill>
+                  <a:srgbClr val="272727"/>
+                </a:solidFill>
+                <a:latin typeface="Arial"/>
+              </a:defRPr>
+            </a:pPr>
+            <a:r>
+              <a:t>unexpectedly</a:t>
+            </a:r>
+          </a:p>
+          <a:p>
+            <a:pPr>
+              <a:spcAft>
+                <a:spcPts val="400"/>
+              </a:spcAft>
+              <a:defRPr sz="1000">
+                <a:solidFill>
+                  <a:srgbClr val="272727"/>
+                </a:solidFill>
+                <a:latin typeface="Arial"/>
+              </a:defRPr>
+            </a:pPr>
+          </a:p>
+          <a:p>
+            <a:pPr>
+              <a:spcAft>
+                <a:spcPts val="400"/>
+              </a:spcAft>
+              <a:defRPr sz="1000">
+                <a:solidFill>
+                  <a:srgbClr val="272727"/>
+                </a:solidFill>
+                <a:latin typeface="Arial"/>
+              </a:defRPr>
+            </a:pPr>
+            <a:r>
+              <a:t>Impact:</a:t>
+            </a:r>
+          </a:p>
+          <a:p>
+            <a:pPr>
+              <a:spcAft>
+                <a:spcPts val="400"/>
+              </a:spcAft>
+              <a:defRPr sz="1000">
+                <a:solidFill>
+                  <a:srgbClr val="272727"/>
+                </a:solidFill>
+                <a:latin typeface="Arial"/>
+              </a:defRPr>
+            </a:pPr>
+            <a:r>
+              <a:t>  Monthly bill exceeds budget</a:t>
+            </a:r>
+          </a:p>
+          <a:p>
+            <a:pPr>
+              <a:spcAft>
+                <a:spcPts val="400"/>
+              </a:spcAft>
+              <a:defRPr sz="1000">
+                <a:solidFill>
+                  <a:srgbClr val="272727"/>
+                </a:solidFill>
+                <a:latin typeface="Arial"/>
+              </a:defRPr>
+            </a:pPr>
+            <a:r>
+              <a:t>  Finance questions the project</a:t>
+            </a:r>
+          </a:p>
+          <a:p>
+            <a:pPr>
+              <a:spcAft>
+                <a:spcPts val="400"/>
+              </a:spcAft>
+              <a:defRPr sz="1000">
+                <a:solidFill>
+                  <a:srgbClr val="272727"/>
+                </a:solidFill>
+                <a:latin typeface="Arial"/>
+              </a:defRPr>
+            </a:pPr>
+          </a:p>
+          <a:p>
+            <a:pPr>
+              <a:spcAft>
+                <a:spcPts val="400"/>
+              </a:spcAft>
+              <a:defRPr sz="1000">
+                <a:solidFill>
+                  <a:srgbClr val="272727"/>
+                </a:solidFill>
+                <a:latin typeface="Arial"/>
+              </a:defRPr>
+            </a:pPr>
+            <a:r>
+              <a:t>Mitigation:</a:t>
+            </a:r>
+          </a:p>
+          <a:p>
+            <a:pPr>
+              <a:spcAft>
+                <a:spcPts val="400"/>
+              </a:spcAft>
+              <a:defRPr sz="1000">
+                <a:solidFill>
+                  <a:srgbClr val="272727"/>
+                </a:solidFill>
+                <a:latin typeface="Arial"/>
+              </a:defRPr>
+            </a:pPr>
+            <a:r>
+              <a:t>  Auto-suspend WH after 60s idle</a:t>
+            </a:r>
+          </a:p>
+          <a:p>
+            <a:pPr>
+              <a:spcAft>
+                <a:spcPts val="400"/>
+              </a:spcAft>
+              <a:defRPr sz="1000">
+                <a:solidFill>
+                  <a:srgbClr val="272727"/>
+                </a:solidFill>
+                <a:latin typeface="Arial"/>
+              </a:defRPr>
+            </a:pPr>
+            <a:r>
+              <a:t>  Resource monitors with $ alerts</a:t>
+            </a:r>
+          </a:p>
+          <a:p>
+            <a:pPr>
+              <a:spcAft>
+                <a:spcPts val="400"/>
+              </a:spcAft>
+              <a:defRPr sz="1000">
+                <a:solidFill>
+                  <a:srgbClr val="272727"/>
+                </a:solidFill>
+                <a:latin typeface="Arial"/>
+              </a:defRPr>
+            </a:pPr>
+            <a:r>
+              <a:t>  Separate warehouses:</a:t>
+            </a:r>
+          </a:p>
+          <a:p>
+            <a:pPr>
+              <a:spcAft>
+                <a:spcPts val="400"/>
+              </a:spcAft>
+              <a:defRPr sz="1000">
+                <a:solidFill>
+                  <a:srgbClr val="272727"/>
+                </a:solidFill>
+                <a:latin typeface="Arial"/>
+              </a:defRPr>
+            </a:pPr>
+            <a:r>
+              <a:t>    ETL_WH for pipeline loads</a:t>
+            </a:r>
+          </a:p>
+          <a:p>
+            <a:pPr>
+              <a:spcAft>
+                <a:spcPts val="400"/>
+              </a:spcAft>
+              <a:defRPr sz="1000">
+                <a:solidFill>
+                  <a:srgbClr val="272727"/>
+                </a:solidFill>
+                <a:latin typeface="Arial"/>
+              </a:defRPr>
+            </a:pPr>
+            <a:r>
+              <a:t>    DASHBOARD_WH for reads</a:t>
+            </a:r>
+          </a:p>
+          <a:p>
+            <a:pPr>
+              <a:spcAft>
+                <a:spcPts val="400"/>
+              </a:spcAft>
+              <a:defRPr sz="1000">
+                <a:solidFill>
+                  <a:srgbClr val="272727"/>
+                </a:solidFill>
+                <a:latin typeface="Arial"/>
+              </a:defRPr>
+            </a:pPr>
+            <a:r>
+              <a:t>  Right-size each independently</a:t>
             </a:r>
           </a:p>
         </p:txBody>
@@ -3317,19 +4721,77 @@
       <p:grpSpPr/>
       <p:sp>
         <p:nvSpPr>
-          <p:cNvPr id="2" name="Title 1"/>
-          <p:cNvSpPr>
-            <a:spLocks noGrp="1"/>
-          </p:cNvSpPr>
-          <p:nvPr>
-            <p:ph type="title"/>
-          </p:nvPr>
-        </p:nvSpPr>
-        <p:spPr/>
-        <p:txBody>
-          <a:bodyPr/>
-          <a:lstStyle/>
-          <a:p>
+          <p:cNvPr id="2" name="Rectangle 1"/>
+          <p:cNvSpPr/>
+          <p:nvPr/>
+        </p:nvSpPr>
+        <p:spPr>
+          <a:xfrm>
+            <a:off x="0" y="0"/>
+            <a:ext cx="12192000" cy="1143000"/>
+          </a:xfrm>
+          <a:prstGeom prst="rect">
+            <a:avLst/>
+          </a:prstGeom>
+          <a:solidFill>
+            <a:srgbClr val="1C2E5E"/>
+          </a:solidFill>
+          <a:ln>
+            <a:noFill/>
+          </a:ln>
+        </p:spPr>
+        <p:style>
+          <a:lnRef idx="1">
+            <a:schemeClr val="accent1"/>
+          </a:lnRef>
+          <a:fillRef idx="3">
+            <a:schemeClr val="accent1"/>
+          </a:fillRef>
+          <a:effectRef idx="2">
+            <a:schemeClr val="accent1"/>
+          </a:effectRef>
+          <a:fontRef idx="minor">
+            <a:schemeClr val="lt1"/>
+          </a:fontRef>
+        </p:style>
+        <p:txBody>
+          <a:bodyPr rtlCol="0" anchor="ctr"/>
+          <a:lstStyle/>
+          <a:p>
+            <a:pPr algn="ctr"/>
+          </a:p>
+        </p:txBody>
+      </p:sp>
+      <p:sp>
+        <p:nvSpPr>
+          <p:cNvPr id="3" name="TextBox 2"/>
+          <p:cNvSpPr txBox="1"/>
+          <p:nvPr/>
+        </p:nvSpPr>
+        <p:spPr>
+          <a:xfrm>
+            <a:off x="457200" y="137160"/>
+            <a:ext cx="11247120" cy="548640"/>
+          </a:xfrm>
+          <a:prstGeom prst="rect">
+            <a:avLst/>
+          </a:prstGeom>
+          <a:noFill/>
+        </p:spPr>
+        <p:txBody>
+          <a:bodyPr wrap="square">
+            <a:spAutoFit/>
+          </a:bodyPr>
+          <a:lstStyle/>
+          <a:p>
+            <a:pPr>
+              <a:defRPr sz="3000" b="1">
+                <a:solidFill>
+                  <a:srgbClr val="FFFFFF"/>
+                </a:solidFill>
+                <a:latin typeface="Georgia"/>
+              </a:defRPr>
+            </a:pPr>
             <a:r>
               <a:t>Architecture Overview</a:t>
             </a:r>
@@ -3338,79 +4800,559 @@
       </p:sp>
       <p:sp>
         <p:nvSpPr>
-          <p:cNvPr id="3" name="Content Placeholder 2"/>
-          <p:cNvSpPr>
-            <a:spLocks noGrp="1"/>
-          </p:cNvSpPr>
-          <p:nvPr>
-            <p:ph idx="1"/>
-          </p:nvPr>
-        </p:nvSpPr>
-        <p:spPr/>
-        <p:txBody>
-          <a:bodyPr/>
-          <a:lstStyle/>
-          <a:p>
-            <a:pPr>
-              <a:defRPr sz="1800"/>
-            </a:pPr>
-            <a:r>
-              <a:t>(See accompanying draw.io diagram)</a:t>
-            </a:r>
-          </a:p>
-          <a:p>
-            <a:pPr>
-              <a:defRPr sz="1800"/>
-            </a:pPr>
-          </a:p>
-          <a:p>
-            <a:pPr>
-              <a:defRPr sz="1800"/>
-            </a:pPr>
-            <a:r>
-              <a:t>Flow: Sources (3 feeds) -&gt; S3 Bronze -&gt; Glue Spark (clean/standardize) -&gt; S3 Silver</a:t>
-            </a:r>
-          </a:p>
-          <a:p>
-            <a:pPr>
-              <a:defRPr sz="1800"/>
-            </a:pPr>
-            <a:r>
-              <a:t>     -&gt; Snowflake COPY INTO (integrate/dedup) -&gt; Gold tables -&gt; Claims Dashboard</a:t>
-            </a:r>
-          </a:p>
-          <a:p>
-            <a:pPr>
-              <a:defRPr sz="1800"/>
-            </a:pPr>
-          </a:p>
-          <a:p>
-            <a:pPr>
-              <a:defRPr sz="1800"/>
-            </a:pPr>
-            <a:r>
-              <a:t>Cross-cutting: Orchestration (Glue Workflows / future Airflow)</a:t>
-            </a:r>
-          </a:p>
-          <a:p>
-            <a:pPr>
-              <a:defRPr sz="1800"/>
-            </a:pPr>
-            <a:r>
-              <a:t>Cross-cutting: Governance (IAM, Snowflake RBAC, data contracts)</a:t>
-            </a:r>
-          </a:p>
-          <a:p>
-            <a:pPr>
-              <a:defRPr sz="1800"/>
-            </a:pPr>
-          </a:p>
-          <a:p>
-            <a:pPr>
-              <a:defRPr sz="1800"/>
-            </a:pPr>
-            <a:r>
-              <a:t>Every arrow labeled with: what moves, format, and cadence</a:t>
+          <p:cNvPr id="4" name="TextBox 3"/>
+          <p:cNvSpPr txBox="1"/>
+          <p:nvPr/>
+        </p:nvSpPr>
+        <p:spPr>
+          <a:xfrm>
+            <a:off x="457200" y="640080"/>
+            <a:ext cx="11247120" cy="320040"/>
+          </a:xfrm>
+          <a:prstGeom prst="rect">
+            <a:avLst/>
+          </a:prstGeom>
+          <a:noFill/>
+        </p:spPr>
+        <p:txBody>
+          <a:bodyPr wrap="square">
+            <a:spAutoFit/>
+          </a:bodyPr>
+          <a:lstStyle/>
+          <a:p>
+            <a:pPr>
+              <a:defRPr sz="1400" b="0">
+                <a:solidFill>
+                  <a:srgbClr val="FE97C0"/>
+                </a:solidFill>
+                <a:latin typeface="Arial"/>
+              </a:defRPr>
+            </a:pPr>
+            <a:r>
+              <a:t>See: claims_pipeline_architecture.drawio  |  Required Deliverable #1</a:t>
+            </a:r>
+          </a:p>
+        </p:txBody>
+      </p:sp>
+      <p:sp>
+        <p:nvSpPr>
+          <p:cNvPr id="5" name="Rectangle 4"/>
+          <p:cNvSpPr/>
+          <p:nvPr/>
+        </p:nvSpPr>
+        <p:spPr>
+          <a:xfrm>
+            <a:off x="0" y="6784848"/>
+            <a:ext cx="12192000" cy="73152"/>
+          </a:xfrm>
+          <a:prstGeom prst="rect">
+            <a:avLst/>
+          </a:prstGeom>
+          <a:solidFill>
+            <a:srgbClr val="1C2E5E"/>
+          </a:solidFill>
+          <a:ln>
+            <a:noFill/>
+          </a:ln>
+        </p:spPr>
+        <p:style>
+          <a:lnRef idx="1">
+            <a:schemeClr val="accent1"/>
+          </a:lnRef>
+          <a:fillRef idx="3">
+            <a:schemeClr val="accent1"/>
+          </a:fillRef>
+          <a:effectRef idx="2">
+            <a:schemeClr val="accent1"/>
+          </a:effectRef>
+          <a:fontRef idx="minor">
+            <a:schemeClr val="lt1"/>
+          </a:fontRef>
+        </p:style>
+        <p:txBody>
+          <a:bodyPr rtlCol="0" anchor="ctr"/>
+          <a:lstStyle/>
+          <a:p>
+            <a:pPr algn="ctr"/>
+          </a:p>
+        </p:txBody>
+      </p:sp>
+      <p:sp>
+        <p:nvSpPr>
+          <p:cNvPr id="6" name="Rounded Rectangle 5"/>
+          <p:cNvSpPr/>
+          <p:nvPr/>
+        </p:nvSpPr>
+        <p:spPr>
+          <a:xfrm>
+            <a:off x="365760" y="1371600"/>
+            <a:ext cx="11460174" cy="5100000"/>
+          </a:xfrm>
+          <a:prstGeom prst="roundRect">
+            <a:avLst/>
+          </a:prstGeom>
+          <a:solidFill>
+            <a:srgbClr val="FAFAFA"/>
+          </a:solidFill>
+          <a:ln>
+            <a:solidFill>
+              <a:srgbClr val="DDDDDD"/>
+            </a:solidFill>
+          </a:ln>
+        </p:spPr>
+        <p:style>
+          <a:lnRef idx="1">
+            <a:schemeClr val="accent1"/>
+          </a:lnRef>
+          <a:fillRef idx="3">
+            <a:schemeClr val="accent1"/>
+          </a:fillRef>
+          <a:effectRef idx="2">
+            <a:schemeClr val="accent1"/>
+          </a:effectRef>
+          <a:fontRef idx="minor">
+            <a:schemeClr val="lt1"/>
+          </a:fontRef>
+        </p:style>
+        <p:txBody>
+          <a:bodyPr rtlCol="0" anchor="ctr"/>
+          <a:lstStyle/>
+          <a:p>
+            <a:pPr algn="ctr"/>
+          </a:p>
+        </p:txBody>
+      </p:sp>
+      <p:sp>
+        <p:nvSpPr>
+          <p:cNvPr id="7" name="Rectangle 6"/>
+          <p:cNvSpPr/>
+          <p:nvPr/>
+        </p:nvSpPr>
+        <p:spPr>
+          <a:xfrm>
+            <a:off x="502920" y="1508760"/>
+            <a:ext cx="2800000" cy="320040"/>
+          </a:xfrm>
+          <a:prstGeom prst="rect">
+            <a:avLst/>
+          </a:prstGeom>
+          <a:solidFill>
+            <a:srgbClr val="1C2E5E"/>
+          </a:solidFill>
+          <a:ln>
+            <a:noFill/>
+          </a:ln>
+        </p:spPr>
+        <p:style>
+          <a:lnRef idx="1">
+            <a:schemeClr val="accent1"/>
+          </a:lnRef>
+          <a:fillRef idx="3">
+            <a:schemeClr val="accent1"/>
+          </a:fillRef>
+          <a:effectRef idx="2">
+            <a:schemeClr val="accent1"/>
+          </a:effectRef>
+          <a:fontRef idx="minor">
+            <a:schemeClr val="lt1"/>
+          </a:fontRef>
+        </p:style>
+        <p:txBody>
+          <a:bodyPr rtlCol="0" anchor="ctr"/>
+          <a:lstStyle/>
+          <a:p>
+            <a:pPr algn="ctr"/>
+          </a:p>
+        </p:txBody>
+      </p:sp>
+      <p:sp>
+        <p:nvSpPr>
+          <p:cNvPr id="8" name="TextBox 7"/>
+          <p:cNvSpPr txBox="1"/>
+          <p:nvPr/>
+        </p:nvSpPr>
+        <p:spPr>
+          <a:xfrm>
+            <a:off x="548640" y="1508760"/>
+            <a:ext cx="2800000" cy="320040"/>
+          </a:xfrm>
+          <a:prstGeom prst="rect">
+            <a:avLst/>
+          </a:prstGeom>
+          <a:noFill/>
+        </p:spPr>
+        <p:txBody>
+          <a:bodyPr wrap="none" anchor="ctr">
+            <a:spAutoFit/>
+          </a:bodyPr>
+          <a:lstStyle/>
+          <a:p>
+            <a:pPr>
+              <a:defRPr sz="1100" b="1">
+                <a:solidFill>
+                  <a:srgbClr val="FFFFFF"/>
+                </a:solidFill>
+                <a:latin typeface="Arial"/>
+              </a:defRPr>
+            </a:pPr>
+            <a:r>
+              <a:t>END-TO-END DATA FLOW</a:t>
+            </a:r>
+          </a:p>
+        </p:txBody>
+      </p:sp>
+      <p:sp>
+        <p:nvSpPr>
+          <p:cNvPr id="9" name="TextBox 8"/>
+          <p:cNvSpPr txBox="1"/>
+          <p:nvPr/>
+        </p:nvSpPr>
+        <p:spPr>
+          <a:xfrm>
+            <a:off x="594360" y="1920240"/>
+            <a:ext cx="11000000" cy="4400000"/>
+          </a:xfrm>
+          <a:prstGeom prst="rect">
+            <a:avLst/>
+          </a:prstGeom>
+          <a:noFill/>
+        </p:spPr>
+        <p:txBody>
+          <a:bodyPr wrap="square">
+            <a:spAutoFit/>
+          </a:bodyPr>
+          <a:lstStyle/>
+          <a:p>
+            <a:pPr>
+              <a:spcAft>
+                <a:spcPts val="400"/>
+              </a:spcAft>
+              <a:defRPr sz="1000">
+                <a:solidFill>
+                  <a:srgbClr val="272727"/>
+                </a:solidFill>
+                <a:latin typeface="Arial"/>
+              </a:defRPr>
+            </a:pPr>
+            <a:r>
+              <a:t>Sources (3 feeds: telematics, claims intake, partner insurers)</a:t>
+            </a:r>
+          </a:p>
+          <a:p>
+            <a:pPr>
+              <a:spcAft>
+                <a:spcPts val="400"/>
+              </a:spcAft>
+              <a:defRPr sz="1000">
+                <a:solidFill>
+                  <a:srgbClr val="272727"/>
+                </a:solidFill>
+                <a:latin typeface="Arial"/>
+              </a:defRPr>
+            </a:pPr>
+            <a:r>
+              <a:t>    |  CSV daily, ~800 files each</a:t>
+            </a:r>
+          </a:p>
+          <a:p>
+            <a:pPr>
+              <a:spcAft>
+                <a:spcPts val="400"/>
+              </a:spcAft>
+              <a:defRPr sz="1000">
+                <a:solidFill>
+                  <a:srgbClr val="272727"/>
+                </a:solidFill>
+                <a:latin typeface="Arial"/>
+              </a:defRPr>
+            </a:pPr>
+            <a:r>
+              <a:t>    v</a:t>
+            </a:r>
+          </a:p>
+          <a:p>
+            <a:pPr>
+              <a:spcAft>
+                <a:spcPts val="400"/>
+              </a:spcAft>
+              <a:defRPr sz="1000">
+                <a:solidFill>
+                  <a:srgbClr val="272727"/>
+                </a:solidFill>
+                <a:latin typeface="Arial"/>
+              </a:defRPr>
+            </a:pPr>
+            <a:r>
+              <a:t>S3 Bronze (raw landing zone, immutable, partitioned by source + date)</a:t>
+            </a:r>
+          </a:p>
+          <a:p>
+            <a:pPr>
+              <a:spcAft>
+                <a:spcPts val="400"/>
+              </a:spcAft>
+              <a:defRPr sz="1000">
+                <a:solidFill>
+                  <a:srgbClr val="272727"/>
+                </a:solidFill>
+                <a:latin typeface="Arial"/>
+              </a:defRPr>
+            </a:pPr>
+            <a:r>
+              <a:t>    |  Raw CSV as landed</a:t>
+            </a:r>
+          </a:p>
+          <a:p>
+            <a:pPr>
+              <a:spcAft>
+                <a:spcPts val="400"/>
+              </a:spcAft>
+              <a:defRPr sz="1000">
+                <a:solidFill>
+                  <a:srgbClr val="272727"/>
+                </a:solidFill>
+                <a:latin typeface="Arial"/>
+              </a:defRPr>
+            </a:pPr>
+            <a:r>
+              <a:t>    v</a:t>
+            </a:r>
+          </a:p>
+          <a:p>
+            <a:pPr>
+              <a:spcAft>
+                <a:spcPts val="400"/>
+              </a:spcAft>
+              <a:defRPr sz="1000">
+                <a:solidFill>
+                  <a:srgbClr val="272727"/>
+                </a:solidFill>
+                <a:latin typeface="Arial"/>
+              </a:defRPr>
+            </a:pPr>
+            <a:r>
+              <a:t>AWS Glue Spark Jobs (schema validation, NULL handling, type casting, standardize columns)</a:t>
+            </a:r>
+          </a:p>
+          <a:p>
+            <a:pPr>
+              <a:spcAft>
+                <a:spcPts val="400"/>
+              </a:spcAft>
+              <a:defRPr sz="1000">
+                <a:solidFill>
+                  <a:srgbClr val="272727"/>
+                </a:solidFill>
+                <a:latin typeface="Arial"/>
+              </a:defRPr>
+            </a:pPr>
+            <a:r>
+              <a:t>    |  Data contract gate: pass/fail</a:t>
+            </a:r>
+          </a:p>
+          <a:p>
+            <a:pPr>
+              <a:spcAft>
+                <a:spcPts val="400"/>
+              </a:spcAft>
+              <a:defRPr sz="1000">
+                <a:solidFill>
+                  <a:srgbClr val="272727"/>
+                </a:solidFill>
+                <a:latin typeface="Arial"/>
+              </a:defRPr>
+            </a:pPr>
+            <a:r>
+              <a:t>    v</a:t>
+            </a:r>
+          </a:p>
+          <a:p>
+            <a:pPr>
+              <a:spcAft>
+                <a:spcPts val="400"/>
+              </a:spcAft>
+              <a:defRPr sz="1000">
+                <a:solidFill>
+                  <a:srgbClr val="272727"/>
+                </a:solidFill>
+                <a:latin typeface="Arial"/>
+              </a:defRPr>
+            </a:pPr>
+            <a:r>
+              <a:t>S3 Silver (Snappy Parquet, cleaned/typed/deduped, partitioned by date)</a:t>
+            </a:r>
+          </a:p>
+          <a:p>
+            <a:pPr>
+              <a:spcAft>
+                <a:spcPts val="400"/>
+              </a:spcAft>
+              <a:defRPr sz="1000">
+                <a:solidFill>
+                  <a:srgbClr val="272727"/>
+                </a:solidFill>
+                <a:latin typeface="Arial"/>
+              </a:defRPr>
+            </a:pPr>
+            <a:r>
+              <a:t>    |  Bulk load from S3 stage</a:t>
+            </a:r>
+          </a:p>
+          <a:p>
+            <a:pPr>
+              <a:spcAft>
+                <a:spcPts val="400"/>
+              </a:spcAft>
+              <a:defRPr sz="1000">
+                <a:solidFill>
+                  <a:srgbClr val="272727"/>
+                </a:solidFill>
+                <a:latin typeface="Arial"/>
+              </a:defRPr>
+            </a:pPr>
+            <a:r>
+              <a:t>    v</a:t>
+            </a:r>
+          </a:p>
+          <a:p>
+            <a:pPr>
+              <a:spcAft>
+                <a:spcPts val="400"/>
+              </a:spcAft>
+              <a:defRPr sz="1000">
+                <a:solidFill>
+                  <a:srgbClr val="272727"/>
+                </a:solidFill>
+                <a:latin typeface="Arial"/>
+              </a:defRPr>
+            </a:pPr>
+            <a:r>
+              <a:t>Snowflake External Stage + COPY INTO (idempotent file tracking)</a:t>
+            </a:r>
+          </a:p>
+          <a:p>
+            <a:pPr>
+              <a:spcAft>
+                <a:spcPts val="400"/>
+              </a:spcAft>
+              <a:defRPr sz="1000">
+                <a:solidFill>
+                  <a:srgbClr val="272727"/>
+                </a:solidFill>
+                <a:latin typeface="Arial"/>
+              </a:defRPr>
+            </a:pPr>
+            <a:r>
+              <a:t>    |  Integration SQL: JOIN on policy+incident keys, DEDUPLICATE, STANDARDIZE</a:t>
+            </a:r>
+          </a:p>
+          <a:p>
+            <a:pPr>
+              <a:spcAft>
+                <a:spcPts val="400"/>
+              </a:spcAft>
+              <a:defRPr sz="1000">
+                <a:solidFill>
+                  <a:srgbClr val="272727"/>
+                </a:solidFill>
+                <a:latin typeface="Arial"/>
+              </a:defRPr>
+            </a:pPr>
+            <a:r>
+              <a:t>    v</a:t>
+            </a:r>
+          </a:p>
+          <a:p>
+            <a:pPr>
+              <a:spcAft>
+                <a:spcPts val="400"/>
+              </a:spcAft>
+              <a:defRPr sz="1000">
+                <a:solidFill>
+                  <a:srgbClr val="272727"/>
+                </a:solidFill>
+                <a:latin typeface="Arial"/>
+              </a:defRPr>
+            </a:pPr>
+            <a:r>
+              <a:t>Snowflake Gold (CLAIMS_HISTORY permanent + CLAIMS_TODAY transient)</a:t>
+            </a:r>
+          </a:p>
+          <a:p>
+            <a:pPr>
+              <a:spcAft>
+                <a:spcPts val="400"/>
+              </a:spcAft>
+              <a:defRPr sz="1000">
+                <a:solidFill>
+                  <a:srgbClr val="272727"/>
+                </a:solidFill>
+                <a:latin typeface="Arial"/>
+              </a:defRPr>
+            </a:pPr>
+            <a:r>
+              <a:t>    |  SQL queries (result cached)</a:t>
+            </a:r>
+          </a:p>
+          <a:p>
+            <a:pPr>
+              <a:spcAft>
+                <a:spcPts val="400"/>
+              </a:spcAft>
+              <a:defRPr sz="1000">
+                <a:solidFill>
+                  <a:srgbClr val="272727"/>
+                </a:solidFill>
+                <a:latin typeface="Arial"/>
+              </a:defRPr>
+            </a:pPr>
+            <a:r>
+              <a:t>    v</a:t>
+            </a:r>
+          </a:p>
+          <a:p>
+            <a:pPr>
+              <a:spcAft>
+                <a:spcPts val="400"/>
+              </a:spcAft>
+              <a:defRPr sz="1000">
+                <a:solidFill>
+                  <a:srgbClr val="272727"/>
+                </a:solidFill>
+                <a:latin typeface="Arial"/>
+              </a:defRPr>
+            </a:pPr>
+            <a:r>
+              <a:t>Claims Leadership Dashboard (Tableau/Streamlit, 200 opens/day, 40 users)</a:t>
+            </a:r>
+          </a:p>
+          <a:p>
+            <a:pPr>
+              <a:spcAft>
+                <a:spcPts val="400"/>
+              </a:spcAft>
+              <a:defRPr sz="1000">
+                <a:solidFill>
+                  <a:srgbClr val="272727"/>
+                </a:solidFill>
+                <a:latin typeface="Arial"/>
+              </a:defRPr>
+            </a:pPr>
+          </a:p>
+          <a:p>
+            <a:pPr>
+              <a:spcAft>
+                <a:spcPts val="400"/>
+              </a:spcAft>
+              <a:defRPr sz="1000">
+                <a:solidFill>
+                  <a:srgbClr val="272727"/>
+                </a:solidFill>
+                <a:latin typeface="Arial"/>
+              </a:defRPr>
+            </a:pPr>
+            <a:r>
+              <a:t>Cross-cutting: Glue Workflows (schedule, retry, alert)  |  IAM + Snowflake RBAC (governance)</a:t>
             </a:r>
           </a:p>
         </p:txBody>
@@ -3435,19 +5377,120 @@
       <p:grpSpPr/>
       <p:sp>
         <p:nvSpPr>
-          <p:cNvPr id="2" name="Title 1"/>
-          <p:cNvSpPr>
-            <a:spLocks noGrp="1"/>
-          </p:cNvSpPr>
-          <p:nvPr>
-            <p:ph type="ctrTitle"/>
-          </p:nvPr>
-        </p:nvSpPr>
-        <p:spPr/>
-        <p:txBody>
-          <a:bodyPr/>
-          <a:lstStyle/>
-          <a:p>
+          <p:cNvPr id="2" name="Rectangle 1"/>
+          <p:cNvSpPr/>
+          <p:nvPr/>
+        </p:nvSpPr>
+        <p:spPr>
+          <a:xfrm>
+            <a:off x="0" y="0"/>
+            <a:ext cx="12192000" cy="6858000"/>
+          </a:xfrm>
+          <a:prstGeom prst="rect">
+            <a:avLst/>
+          </a:prstGeom>
+          <a:solidFill>
+            <a:srgbClr val="1C2E5E"/>
+          </a:solidFill>
+          <a:ln>
+            <a:noFill/>
+          </a:ln>
+        </p:spPr>
+        <p:style>
+          <a:lnRef idx="1">
+            <a:schemeClr val="accent1"/>
+          </a:lnRef>
+          <a:fillRef idx="3">
+            <a:schemeClr val="accent1"/>
+          </a:fillRef>
+          <a:effectRef idx="2">
+            <a:schemeClr val="accent1"/>
+          </a:effectRef>
+          <a:fontRef idx="minor">
+            <a:schemeClr val="lt1"/>
+          </a:fontRef>
+        </p:style>
+        <p:txBody>
+          <a:bodyPr rtlCol="0" anchor="ctr"/>
+          <a:lstStyle/>
+          <a:p>
+            <a:pPr algn="ctr"/>
+          </a:p>
+        </p:txBody>
+      </p:sp>
+      <p:sp>
+        <p:nvSpPr>
+          <p:cNvPr id="3" name="Rectangle 2"/>
+          <p:cNvSpPr/>
+          <p:nvPr/>
+        </p:nvSpPr>
+        <p:spPr>
+          <a:xfrm>
+            <a:off x="0" y="0"/>
+            <a:ext cx="12192000" cy="73152"/>
+          </a:xfrm>
+          <a:prstGeom prst="rect">
+            <a:avLst/>
+          </a:prstGeom>
+          <a:solidFill>
+            <a:srgbClr val="FE3082"/>
+          </a:solidFill>
+          <a:ln>
+            <a:noFill/>
+          </a:ln>
+        </p:spPr>
+        <p:style>
+          <a:lnRef idx="1">
+            <a:schemeClr val="accent1"/>
+          </a:lnRef>
+          <a:fillRef idx="3">
+            <a:schemeClr val="accent1"/>
+          </a:fillRef>
+          <a:effectRef idx="2">
+            <a:schemeClr val="accent1"/>
+          </a:effectRef>
+          <a:fontRef idx="minor">
+            <a:schemeClr val="lt1"/>
+          </a:fontRef>
+        </p:style>
+        <p:txBody>
+          <a:bodyPr rtlCol="0" anchor="ctr"/>
+          <a:lstStyle/>
+          <a:p>
+            <a:pPr algn="ctr"/>
+          </a:p>
+        </p:txBody>
+      </p:sp>
+      <p:sp>
+        <p:nvSpPr>
+          <p:cNvPr id="4" name="TextBox 3"/>
+          <p:cNvSpPr txBox="1"/>
+          <p:nvPr/>
+        </p:nvSpPr>
+        <p:spPr>
+          <a:xfrm>
+            <a:off x="1371600" y="2200000"/>
+            <a:ext cx="9418320" cy="914400"/>
+          </a:xfrm>
+          <a:prstGeom prst="rect">
+            <a:avLst/>
+          </a:prstGeom>
+          <a:noFill/>
+        </p:spPr>
+        <p:txBody>
+          <a:bodyPr wrap="square">
+            <a:spAutoFit/>
+          </a:bodyPr>
+          <a:lstStyle/>
+          <a:p>
+            <a:pPr algn="ctr">
+              <a:defRPr sz="4400" b="1">
+                <a:solidFill>
+                  <a:srgbClr val="FFFFFF"/>
+                </a:solidFill>
+                <a:latin typeface="Georgia"/>
+              </a:defRPr>
+            </a:pPr>
             <a:r>
               <a:t>Questions?</a:t>
             </a:r>
@@ -3456,27 +5499,93 @@
       </p:sp>
       <p:sp>
         <p:nvSpPr>
-          <p:cNvPr id="3" name="Subtitle 2"/>
-          <p:cNvSpPr>
-            <a:spLocks noGrp="1"/>
-          </p:cNvSpPr>
-          <p:nvPr>
-            <p:ph type="subTitle" idx="1"/>
-          </p:nvPr>
-        </p:nvSpPr>
-        <p:spPr/>
-        <p:txBody>
-          <a:bodyPr/>
-          <a:lstStyle/>
-          <a:p>
-            <a:r>
-              <a:t>We chose AWS Glue + Snowflake over a pure-Snowflake or pure-Spark approach</a:t>
-            </a:r>
-          </a:p>
-          <a:p>
+          <p:cNvPr id="5" name="TextBox 4"/>
+          <p:cNvSpPr txBox="1"/>
+          <p:nvPr/>
+        </p:nvSpPr>
+        <p:spPr>
+          <a:xfrm>
+            <a:off x="1371600" y="3400000"/>
+            <a:ext cx="9418320" cy="1200000"/>
+          </a:xfrm>
+          <a:prstGeom prst="rect">
+            <a:avLst/>
+          </a:prstGeom>
+          <a:noFill/>
+        </p:spPr>
+        <p:txBody>
+          <a:bodyPr wrap="square">
+            <a:spAutoFit/>
+          </a:bodyPr>
+          <a:lstStyle/>
+          <a:p>
+            <a:pPr algn="ctr">
+              <a:defRPr sz="1600">
+                <a:solidFill>
+                  <a:srgbClr val="EAE5DF"/>
+                </a:solidFill>
+                <a:latin typeface="Arial"/>
+              </a:defRPr>
+            </a:pPr>
+            <a:r>
+              <a:t>We chose AWS Glue + Snowflake over pure-Snowflake or pure-Spark</a:t>
+            </a:r>
+          </a:p>
+          <a:p>
+            <a:pPr algn="ctr">
+              <a:defRPr sz="1600">
+                <a:solidFill>
+                  <a:srgbClr val="EAE5DF"/>
+                </a:solidFill>
+                <a:latin typeface="Arial"/>
+              </a:defRPr>
+            </a:pPr>
             <a:r>
               <a:t>because it leverages existing investments while keeping each layer's cost optimal.</a:t>
             </a:r>
+          </a:p>
+        </p:txBody>
+      </p:sp>
+      <p:sp>
+        <p:nvSpPr>
+          <p:cNvPr id="6" name="Rectangle 5"/>
+          <p:cNvSpPr/>
+          <p:nvPr/>
+        </p:nvSpPr>
+        <p:spPr>
+          <a:xfrm>
+            <a:off x="0" y="6784848"/>
+            <a:ext cx="12192000" cy="73152"/>
+          </a:xfrm>
+          <a:prstGeom prst="rect">
+            <a:avLst/>
+          </a:prstGeom>
+          <a:solidFill>
+            <a:srgbClr val="FE3082"/>
+          </a:solidFill>
+          <a:ln>
+            <a:noFill/>
+          </a:ln>
+        </p:spPr>
+        <p:style>
+          <a:lnRef idx="1">
+            <a:schemeClr val="accent1"/>
+          </a:lnRef>
+          <a:fillRef idx="3">
+            <a:schemeClr val="accent1"/>
+          </a:fillRef>
+          <a:effectRef idx="2">
+            <a:schemeClr val="accent1"/>
+          </a:effectRef>
+          <a:fontRef idx="minor">
+            <a:schemeClr val="lt1"/>
+          </a:fontRef>
+        </p:style>
+        <p:txBody>
+          <a:bodyPr rtlCol="0" anchor="ctr"/>
+          <a:lstStyle/>
+          <a:p>
+            <a:pPr algn="ctr"/>
           </a:p>
         </p:txBody>
       </p:sp>
@@ -3500,19 +5609,77 @@
       <p:grpSpPr/>
       <p:sp>
         <p:nvSpPr>
-          <p:cNvPr id="2" name="Title 1"/>
-          <p:cNvSpPr>
-            <a:spLocks noGrp="1"/>
-          </p:cNvSpPr>
-          <p:nvPr>
-            <p:ph type="title"/>
-          </p:nvPr>
-        </p:nvSpPr>
-        <p:spPr/>
-        <p:txBody>
-          <a:bodyPr/>
-          <a:lstStyle/>
-          <a:p>
+          <p:cNvPr id="2" name="Rectangle 1"/>
+          <p:cNvSpPr/>
+          <p:nvPr/>
+        </p:nvSpPr>
+        <p:spPr>
+          <a:xfrm>
+            <a:off x="0" y="0"/>
+            <a:ext cx="12192000" cy="1143000"/>
+          </a:xfrm>
+          <a:prstGeom prst="rect">
+            <a:avLst/>
+          </a:prstGeom>
+          <a:solidFill>
+            <a:srgbClr val="1C2E5E"/>
+          </a:solidFill>
+          <a:ln>
+            <a:noFill/>
+          </a:ln>
+        </p:spPr>
+        <p:style>
+          <a:lnRef idx="1">
+            <a:schemeClr val="accent1"/>
+          </a:lnRef>
+          <a:fillRef idx="3">
+            <a:schemeClr val="accent1"/>
+          </a:fillRef>
+          <a:effectRef idx="2">
+            <a:schemeClr val="accent1"/>
+          </a:effectRef>
+          <a:fontRef idx="minor">
+            <a:schemeClr val="lt1"/>
+          </a:fontRef>
+        </p:style>
+        <p:txBody>
+          <a:bodyPr rtlCol="0" anchor="ctr"/>
+          <a:lstStyle/>
+          <a:p>
+            <a:pPr algn="ctr"/>
+          </a:p>
+        </p:txBody>
+      </p:sp>
+      <p:sp>
+        <p:nvSpPr>
+          <p:cNvPr id="3" name="TextBox 2"/>
+          <p:cNvSpPr txBox="1"/>
+          <p:nvPr/>
+        </p:nvSpPr>
+        <p:spPr>
+          <a:xfrm>
+            <a:off x="457200" y="137160"/>
+            <a:ext cx="11247120" cy="548640"/>
+          </a:xfrm>
+          <a:prstGeom prst="rect">
+            <a:avLst/>
+          </a:prstGeom>
+          <a:noFill/>
+        </p:spPr>
+        <p:txBody>
+          <a:bodyPr wrap="square">
+            <a:spAutoFit/>
+          </a:bodyPr>
+          <a:lstStyle/>
+          <a:p>
+            <a:pPr>
+              <a:defRPr sz="3000" b="1">
+                <a:solidFill>
+                  <a:srgbClr val="FFFFFF"/>
+                </a:solidFill>
+                <a:latin typeface="Georgia"/>
+              </a:defRPr>
+            </a:pPr>
             <a:r>
               <a:t>The Business Problem</a:t>
             </a:r>
@@ -3521,72 +5688,696 @@
       </p:sp>
       <p:sp>
         <p:nvSpPr>
-          <p:cNvPr id="3" name="Content Placeholder 2"/>
-          <p:cNvSpPr>
-            <a:spLocks noGrp="1"/>
-          </p:cNvSpPr>
-          <p:nvPr>
-            <p:ph idx="1"/>
-          </p:nvPr>
-        </p:nvSpPr>
-        <p:spPr/>
-        <p:txBody>
-          <a:bodyPr/>
-          <a:lstStyle/>
-          <a:p>
-            <a:pPr>
-              <a:defRPr sz="1800"/>
-            </a:pPr>
-            <a:r>
-              <a:t>Current state: pandas PoC processes one CSV from S3 to Snowflake</a:t>
-            </a:r>
-          </a:p>
-          <a:p>
-            <a:pPr>
-              <a:defRPr sz="1800"/>
-            </a:pPr>
-            <a:r>
-              <a:t>Production reality:</a:t>
-            </a:r>
-          </a:p>
-          <a:p>
-            <a:pPr lvl="1">
-              <a:defRPr sz="1600"/>
-            </a:pPr>
-            <a:r>
-              <a:t>2,400 CSV files landing daily from telematics, claims intake, and partner insurers</a:t>
-            </a:r>
-          </a:p>
-          <a:p>
-            <a:pPr lvl="1">
-              <a:defRPr sz="1600"/>
-            </a:pPr>
-            <a:r>
-              <a:t>Hundreds of terabytes of historical data</a:t>
-            </a:r>
-          </a:p>
-          <a:p>
-            <a:pPr lvl="1">
-              <a:defRPr sz="1600"/>
-            </a:pPr>
-            <a:r>
-              <a:t>Three sources must be integrated: joined, deduplicated, standardized</a:t>
-            </a:r>
-          </a:p>
-          <a:p>
-            <a:pPr lvl="1">
-              <a:defRPr sz="1600"/>
-            </a:pPr>
-            <a:r>
-              <a:t>Claims dashboard must show today's data instantly</a:t>
-            </a:r>
-          </a:p>
-          <a:p>
-            <a:pPr>
-              <a:defRPr sz="1800"/>
-            </a:pPr>
-            <a:r>
-              <a:t>The ask: a solution architecture that scales, recovers, and stays within budget</a:t>
+          <p:cNvPr id="4" name="TextBox 3"/>
+          <p:cNvSpPr txBox="1"/>
+          <p:nvPr/>
+        </p:nvSpPr>
+        <p:spPr>
+          <a:xfrm>
+            <a:off x="457200" y="640080"/>
+            <a:ext cx="11247120" cy="320040"/>
+          </a:xfrm>
+          <a:prstGeom prst="rect">
+            <a:avLst/>
+          </a:prstGeom>
+          <a:noFill/>
+        </p:spPr>
+        <p:txBody>
+          <a:bodyPr wrap="square">
+            <a:spAutoFit/>
+          </a:bodyPr>
+          <a:lstStyle/>
+          <a:p>
+            <a:pPr>
+              <a:defRPr sz="1400" b="0">
+                <a:solidFill>
+                  <a:srgbClr val="FE97C0"/>
+                </a:solidFill>
+                <a:latin typeface="Arial"/>
+              </a:defRPr>
+            </a:pPr>
+            <a:r>
+              <a:t>VP of Claims Analytics Memo  |  Production Scale Challenge</a:t>
+            </a:r>
+          </a:p>
+        </p:txBody>
+      </p:sp>
+      <p:sp>
+        <p:nvSpPr>
+          <p:cNvPr id="5" name="Rectangle 4"/>
+          <p:cNvSpPr/>
+          <p:nvPr/>
+        </p:nvSpPr>
+        <p:spPr>
+          <a:xfrm>
+            <a:off x="0" y="6784848"/>
+            <a:ext cx="12192000" cy="73152"/>
+          </a:xfrm>
+          <a:prstGeom prst="rect">
+            <a:avLst/>
+          </a:prstGeom>
+          <a:solidFill>
+            <a:srgbClr val="1C2E5E"/>
+          </a:solidFill>
+          <a:ln>
+            <a:noFill/>
+          </a:ln>
+        </p:spPr>
+        <p:style>
+          <a:lnRef idx="1">
+            <a:schemeClr val="accent1"/>
+          </a:lnRef>
+          <a:fillRef idx="3">
+            <a:schemeClr val="accent1"/>
+          </a:fillRef>
+          <a:effectRef idx="2">
+            <a:schemeClr val="accent1"/>
+          </a:effectRef>
+          <a:fontRef idx="minor">
+            <a:schemeClr val="lt1"/>
+          </a:fontRef>
+        </p:style>
+        <p:txBody>
+          <a:bodyPr rtlCol="0" anchor="ctr"/>
+          <a:lstStyle/>
+          <a:p>
+            <a:pPr algn="ctr"/>
+          </a:p>
+        </p:txBody>
+      </p:sp>
+      <p:sp>
+        <p:nvSpPr>
+          <p:cNvPr id="6" name="Rounded Rectangle 5"/>
+          <p:cNvSpPr/>
+          <p:nvPr/>
+        </p:nvSpPr>
+        <p:spPr>
+          <a:xfrm>
+            <a:off x="365760" y="1371600"/>
+            <a:ext cx="5615787" cy="2300000"/>
+          </a:xfrm>
+          <a:prstGeom prst="roundRect">
+            <a:avLst/>
+          </a:prstGeom>
+          <a:solidFill>
+            <a:srgbClr val="FAFAFA"/>
+          </a:solidFill>
+          <a:ln>
+            <a:solidFill>
+              <a:srgbClr val="DDDDDD"/>
+            </a:solidFill>
+          </a:ln>
+        </p:spPr>
+        <p:style>
+          <a:lnRef idx="1">
+            <a:schemeClr val="accent1"/>
+          </a:lnRef>
+          <a:fillRef idx="3">
+            <a:schemeClr val="accent1"/>
+          </a:fillRef>
+          <a:effectRef idx="2">
+            <a:schemeClr val="accent1"/>
+          </a:effectRef>
+          <a:fontRef idx="minor">
+            <a:schemeClr val="lt1"/>
+          </a:fontRef>
+        </p:style>
+        <p:txBody>
+          <a:bodyPr rtlCol="0" anchor="ctr"/>
+          <a:lstStyle/>
+          <a:p>
+            <a:pPr algn="ctr"/>
+          </a:p>
+        </p:txBody>
+      </p:sp>
+      <p:sp>
+        <p:nvSpPr>
+          <p:cNvPr id="7" name="Rectangle 6"/>
+          <p:cNvSpPr/>
+          <p:nvPr/>
+        </p:nvSpPr>
+        <p:spPr>
+          <a:xfrm>
+            <a:off x="502920" y="1508760"/>
+            <a:ext cx="1828800" cy="320040"/>
+          </a:xfrm>
+          <a:prstGeom prst="rect">
+            <a:avLst/>
+          </a:prstGeom>
+          <a:solidFill>
+            <a:srgbClr val="1C2E5E"/>
+          </a:solidFill>
+          <a:ln>
+            <a:noFill/>
+          </a:ln>
+        </p:spPr>
+        <p:style>
+          <a:lnRef idx="1">
+            <a:schemeClr val="accent1"/>
+          </a:lnRef>
+          <a:fillRef idx="3">
+            <a:schemeClr val="accent1"/>
+          </a:fillRef>
+          <a:effectRef idx="2">
+            <a:schemeClr val="accent1"/>
+          </a:effectRef>
+          <a:fontRef idx="minor">
+            <a:schemeClr val="lt1"/>
+          </a:fontRef>
+        </p:style>
+        <p:txBody>
+          <a:bodyPr rtlCol="0" anchor="ctr"/>
+          <a:lstStyle/>
+          <a:p>
+            <a:pPr algn="ctr"/>
+          </a:p>
+        </p:txBody>
+      </p:sp>
+      <p:sp>
+        <p:nvSpPr>
+          <p:cNvPr id="8" name="TextBox 7"/>
+          <p:cNvSpPr txBox="1"/>
+          <p:nvPr/>
+        </p:nvSpPr>
+        <p:spPr>
+          <a:xfrm>
+            <a:off x="548640" y="1508760"/>
+            <a:ext cx="1828800" cy="320040"/>
+          </a:xfrm>
+          <a:prstGeom prst="rect">
+            <a:avLst/>
+          </a:prstGeom>
+          <a:noFill/>
+        </p:spPr>
+        <p:txBody>
+          <a:bodyPr wrap="none" anchor="ctr">
+            <a:spAutoFit/>
+          </a:bodyPr>
+          <a:lstStyle/>
+          <a:p>
+            <a:pPr>
+              <a:defRPr sz="1100" b="1">
+                <a:solidFill>
+                  <a:srgbClr val="FFFFFF"/>
+                </a:solidFill>
+                <a:latin typeface="Arial"/>
+              </a:defRPr>
+            </a:pPr>
+            <a:r>
+              <a:t>CURRENT STATE (PoC)</a:t>
+            </a:r>
+          </a:p>
+        </p:txBody>
+      </p:sp>
+      <p:sp>
+        <p:nvSpPr>
+          <p:cNvPr id="9" name="TextBox 8"/>
+          <p:cNvSpPr txBox="1"/>
+          <p:nvPr/>
+        </p:nvSpPr>
+        <p:spPr>
+          <a:xfrm>
+            <a:off x="594360" y="1920240"/>
+            <a:ext cx="5158587" cy="1600000"/>
+          </a:xfrm>
+          <a:prstGeom prst="rect">
+            <a:avLst/>
+          </a:prstGeom>
+          <a:noFill/>
+        </p:spPr>
+        <p:txBody>
+          <a:bodyPr wrap="square">
+            <a:spAutoFit/>
+          </a:bodyPr>
+          <a:lstStyle/>
+          <a:p>
+            <a:pPr>
+              <a:spcAft>
+                <a:spcPts val="400"/>
+              </a:spcAft>
+              <a:defRPr sz="1100">
+                <a:solidFill>
+                  <a:srgbClr val="272727"/>
+                </a:solidFill>
+                <a:latin typeface="Arial"/>
+              </a:defRPr>
+            </a:pPr>
+            <a:r>
+              <a:t>One CSV file processed with pandas</a:t>
+            </a:r>
+          </a:p>
+          <a:p>
+            <a:pPr>
+              <a:spcAft>
+                <a:spcPts val="400"/>
+              </a:spcAft>
+              <a:defRPr sz="1100">
+                <a:solidFill>
+                  <a:srgbClr val="272727"/>
+                </a:solidFill>
+                <a:latin typeface="Arial"/>
+              </a:defRPr>
+            </a:pPr>
+            <a:r>
+              <a:t>Read from S3, clean with Python, push to Snowflake via write_pandas</a:t>
+            </a:r>
+          </a:p>
+          <a:p>
+            <a:pPr>
+              <a:spcAft>
+                <a:spcPts val="400"/>
+              </a:spcAft>
+              <a:defRPr sz="1100">
+                <a:solidFill>
+                  <a:srgbClr val="272727"/>
+                </a:solidFill>
+                <a:latin typeface="Arial"/>
+              </a:defRPr>
+            </a:pPr>
+            <a:r>
+              <a:t>Works for 463K rows in ~2 minutes</a:t>
+            </a:r>
+          </a:p>
+          <a:p>
+            <a:pPr>
+              <a:spcAft>
+                <a:spcPts val="400"/>
+              </a:spcAft>
+              <a:defRPr sz="1100">
+                <a:solidFill>
+                  <a:srgbClr val="272727"/>
+                </a:solidFill>
+                <a:latin typeface="Arial"/>
+              </a:defRPr>
+            </a:pPr>
+            <a:r>
+              <a:t>Single machine, single script, no error handling</a:t>
+            </a:r>
+          </a:p>
+        </p:txBody>
+      </p:sp>
+      <p:sp>
+        <p:nvSpPr>
+          <p:cNvPr id="10" name="Rounded Rectangle 9"/>
+          <p:cNvSpPr/>
+          <p:nvPr/>
+        </p:nvSpPr>
+        <p:spPr>
+          <a:xfrm>
+            <a:off x="6210147" y="1371600"/>
+            <a:ext cx="5615787" cy="2300000"/>
+          </a:xfrm>
+          <a:prstGeom prst="roundRect">
+            <a:avLst/>
+          </a:prstGeom>
+          <a:solidFill>
+            <a:srgbClr val="FAFAFA"/>
+          </a:solidFill>
+          <a:ln>
+            <a:solidFill>
+              <a:srgbClr val="DDDDDD"/>
+            </a:solidFill>
+          </a:ln>
+        </p:spPr>
+        <p:style>
+          <a:lnRef idx="1">
+            <a:schemeClr val="accent1"/>
+          </a:lnRef>
+          <a:fillRef idx="3">
+            <a:schemeClr val="accent1"/>
+          </a:fillRef>
+          <a:effectRef idx="2">
+            <a:schemeClr val="accent1"/>
+          </a:effectRef>
+          <a:fontRef idx="minor">
+            <a:schemeClr val="lt1"/>
+          </a:fontRef>
+        </p:style>
+        <p:txBody>
+          <a:bodyPr rtlCol="0" anchor="ctr"/>
+          <a:lstStyle/>
+          <a:p>
+            <a:pPr algn="ctr"/>
+          </a:p>
+        </p:txBody>
+      </p:sp>
+      <p:sp>
+        <p:nvSpPr>
+          <p:cNvPr id="11" name="Rectangle 10"/>
+          <p:cNvSpPr/>
+          <p:nvPr/>
+        </p:nvSpPr>
+        <p:spPr>
+          <a:xfrm>
+            <a:off x="6347307" y="1508760"/>
+            <a:ext cx="2200000" cy="320040"/>
+          </a:xfrm>
+          <a:prstGeom prst="rect">
+            <a:avLst/>
+          </a:prstGeom>
+          <a:solidFill>
+            <a:srgbClr val="1C2E5E"/>
+          </a:solidFill>
+          <a:ln>
+            <a:noFill/>
+          </a:ln>
+        </p:spPr>
+        <p:style>
+          <a:lnRef idx="1">
+            <a:schemeClr val="accent1"/>
+          </a:lnRef>
+          <a:fillRef idx="3">
+            <a:schemeClr val="accent1"/>
+          </a:fillRef>
+          <a:effectRef idx="2">
+            <a:schemeClr val="accent1"/>
+          </a:effectRef>
+          <a:fontRef idx="minor">
+            <a:schemeClr val="lt1"/>
+          </a:fontRef>
+        </p:style>
+        <p:txBody>
+          <a:bodyPr rtlCol="0" anchor="ctr"/>
+          <a:lstStyle/>
+          <a:p>
+            <a:pPr algn="ctr"/>
+          </a:p>
+        </p:txBody>
+      </p:sp>
+      <p:sp>
+        <p:nvSpPr>
+          <p:cNvPr id="12" name="TextBox 11"/>
+          <p:cNvSpPr txBox="1"/>
+          <p:nvPr/>
+        </p:nvSpPr>
+        <p:spPr>
+          <a:xfrm>
+            <a:off x="6393027" y="1508760"/>
+            <a:ext cx="2200000" cy="320040"/>
+          </a:xfrm>
+          <a:prstGeom prst="rect">
+            <a:avLst/>
+          </a:prstGeom>
+          <a:noFill/>
+        </p:spPr>
+        <p:txBody>
+          <a:bodyPr wrap="none" anchor="ctr">
+            <a:spAutoFit/>
+          </a:bodyPr>
+          <a:lstStyle/>
+          <a:p>
+            <a:pPr>
+              <a:defRPr sz="1100" b="1">
+                <a:solidFill>
+                  <a:srgbClr val="FFFFFF"/>
+                </a:solidFill>
+                <a:latin typeface="Arial"/>
+              </a:defRPr>
+            </a:pPr>
+            <a:r>
+              <a:t>PRODUCTION REALITY</a:t>
+            </a:r>
+          </a:p>
+        </p:txBody>
+      </p:sp>
+      <p:sp>
+        <p:nvSpPr>
+          <p:cNvPr id="13" name="TextBox 12"/>
+          <p:cNvSpPr txBox="1"/>
+          <p:nvPr/>
+        </p:nvSpPr>
+        <p:spPr>
+          <a:xfrm>
+            <a:off x="6438747" y="1920240"/>
+            <a:ext cx="5158587" cy="1600000"/>
+          </a:xfrm>
+          <a:prstGeom prst="rect">
+            <a:avLst/>
+          </a:prstGeom>
+          <a:noFill/>
+        </p:spPr>
+        <p:txBody>
+          <a:bodyPr wrap="square">
+            <a:spAutoFit/>
+          </a:bodyPr>
+          <a:lstStyle/>
+          <a:p>
+            <a:pPr>
+              <a:spcAft>
+                <a:spcPts val="400"/>
+              </a:spcAft>
+              <a:defRPr sz="1100">
+                <a:solidFill>
+                  <a:srgbClr val="272727"/>
+                </a:solidFill>
+                <a:latin typeface="Arial"/>
+              </a:defRPr>
+            </a:pPr>
+            <a:r>
+              <a:t>2,400 CSV files landing daily</a:t>
+            </a:r>
+          </a:p>
+          <a:p>
+            <a:pPr>
+              <a:spcAft>
+                <a:spcPts val="400"/>
+              </a:spcAft>
+              <a:defRPr sz="1100">
+                <a:solidFill>
+                  <a:srgbClr val="272727"/>
+                </a:solidFill>
+                <a:latin typeface="Arial"/>
+              </a:defRPr>
+            </a:pPr>
+            <a:r>
+              <a:t>Three sources: telematics, claims intake, partner insurers</a:t>
+            </a:r>
+          </a:p>
+          <a:p>
+            <a:pPr>
+              <a:spcAft>
+                <a:spcPts val="400"/>
+              </a:spcAft>
+              <a:defRPr sz="1100">
+                <a:solidFill>
+                  <a:srgbClr val="272727"/>
+                </a:solidFill>
+                <a:latin typeface="Arial"/>
+              </a:defRPr>
+            </a:pPr>
+            <a:r>
+              <a:t>Hundreds of TB of historical data</a:t>
+            </a:r>
+          </a:p>
+          <a:p>
+            <a:pPr>
+              <a:spcAft>
+                <a:spcPts val="400"/>
+              </a:spcAft>
+              <a:defRPr sz="1100">
+                <a:solidFill>
+                  <a:srgbClr val="272727"/>
+                </a:solidFill>
+                <a:latin typeface="Arial"/>
+              </a:defRPr>
+            </a:pPr>
+            <a:r>
+              <a:t>Must integrate: join, deduplicate, standardize to one schema</a:t>
+            </a:r>
+          </a:p>
+          <a:p>
+            <a:pPr>
+              <a:spcAft>
+                <a:spcPts val="400"/>
+              </a:spcAft>
+              <a:defRPr sz="1100">
+                <a:solidFill>
+                  <a:srgbClr val="272727"/>
+                </a:solidFill>
+                <a:latin typeface="Arial"/>
+              </a:defRPr>
+            </a:pPr>
+            <a:r>
+              <a:t>Dashboard must show today's data instantly</a:t>
+            </a:r>
+          </a:p>
+        </p:txBody>
+      </p:sp>
+      <p:sp>
+        <p:nvSpPr>
+          <p:cNvPr id="14" name="Rounded Rectangle 13"/>
+          <p:cNvSpPr/>
+          <p:nvPr/>
+        </p:nvSpPr>
+        <p:spPr>
+          <a:xfrm>
+            <a:off x="365760" y="3900000"/>
+            <a:ext cx="11460174" cy="1200000"/>
+          </a:xfrm>
+          <a:prstGeom prst="roundRect">
+            <a:avLst/>
+          </a:prstGeom>
+          <a:solidFill>
+            <a:srgbClr val="FAFAFA"/>
+          </a:solidFill>
+          <a:ln>
+            <a:solidFill>
+              <a:srgbClr val="DDDDDD"/>
+            </a:solidFill>
+          </a:ln>
+        </p:spPr>
+        <p:style>
+          <a:lnRef idx="1">
+            <a:schemeClr val="accent1"/>
+          </a:lnRef>
+          <a:fillRef idx="3">
+            <a:schemeClr val="accent1"/>
+          </a:fillRef>
+          <a:effectRef idx="2">
+            <a:schemeClr val="accent1"/>
+          </a:effectRef>
+          <a:fontRef idx="minor">
+            <a:schemeClr val="lt1"/>
+          </a:fontRef>
+        </p:style>
+        <p:txBody>
+          <a:bodyPr rtlCol="0" anchor="ctr"/>
+          <a:lstStyle/>
+          <a:p>
+            <a:pPr algn="ctr"/>
+          </a:p>
+        </p:txBody>
+      </p:sp>
+      <p:sp>
+        <p:nvSpPr>
+          <p:cNvPr id="15" name="Rectangle 14"/>
+          <p:cNvSpPr/>
+          <p:nvPr/>
+        </p:nvSpPr>
+        <p:spPr>
+          <a:xfrm>
+            <a:off x="502920" y="4037160"/>
+            <a:ext cx="1371600" cy="320040"/>
+          </a:xfrm>
+          <a:prstGeom prst="rect">
+            <a:avLst/>
+          </a:prstGeom>
+          <a:solidFill>
+            <a:srgbClr val="1C2E5E"/>
+          </a:solidFill>
+          <a:ln>
+            <a:noFill/>
+          </a:ln>
+        </p:spPr>
+        <p:style>
+          <a:lnRef idx="1">
+            <a:schemeClr val="accent1"/>
+          </a:lnRef>
+          <a:fillRef idx="3">
+            <a:schemeClr val="accent1"/>
+          </a:fillRef>
+          <a:effectRef idx="2">
+            <a:schemeClr val="accent1"/>
+          </a:effectRef>
+          <a:fontRef idx="minor">
+            <a:schemeClr val="lt1"/>
+          </a:fontRef>
+        </p:style>
+        <p:txBody>
+          <a:bodyPr rtlCol="0" anchor="ctr"/>
+          <a:lstStyle/>
+          <a:p>
+            <a:pPr algn="ctr"/>
+          </a:p>
+        </p:txBody>
+      </p:sp>
+      <p:sp>
+        <p:nvSpPr>
+          <p:cNvPr id="16" name="TextBox 15"/>
+          <p:cNvSpPr txBox="1"/>
+          <p:nvPr/>
+        </p:nvSpPr>
+        <p:spPr>
+          <a:xfrm>
+            <a:off x="548640" y="4037160"/>
+            <a:ext cx="1371600" cy="320040"/>
+          </a:xfrm>
+          <a:prstGeom prst="rect">
+            <a:avLst/>
+          </a:prstGeom>
+          <a:noFill/>
+        </p:spPr>
+        <p:txBody>
+          <a:bodyPr wrap="none" anchor="ctr">
+            <a:spAutoFit/>
+          </a:bodyPr>
+          <a:lstStyle/>
+          <a:p>
+            <a:pPr>
+              <a:defRPr sz="1100" b="1">
+                <a:solidFill>
+                  <a:srgbClr val="FFFFFF"/>
+                </a:solidFill>
+                <a:latin typeface="Arial"/>
+              </a:defRPr>
+            </a:pPr>
+            <a:r>
+              <a:t>THE ASK</a:t>
+            </a:r>
+          </a:p>
+        </p:txBody>
+      </p:sp>
+      <p:sp>
+        <p:nvSpPr>
+          <p:cNvPr id="17" name="TextBox 16"/>
+          <p:cNvSpPr txBox="1"/>
+          <p:nvPr/>
+        </p:nvSpPr>
+        <p:spPr>
+          <a:xfrm>
+            <a:off x="594360" y="4450000"/>
+            <a:ext cx="11000000" cy="600000"/>
+          </a:xfrm>
+          <a:prstGeom prst="rect">
+            <a:avLst/>
+          </a:prstGeom>
+          <a:noFill/>
+        </p:spPr>
+        <p:txBody>
+          <a:bodyPr wrap="square">
+            <a:spAutoFit/>
+          </a:bodyPr>
+          <a:lstStyle/>
+          <a:p>
+            <a:pPr>
+              <a:spcAft>
+                <a:spcPts val="400"/>
+              </a:spcAft>
+              <a:defRPr sz="1100">
+                <a:solidFill>
+                  <a:srgbClr val="272727"/>
+                </a:solidFill>
+                <a:latin typeface="Arial"/>
+              </a:defRPr>
+            </a:pPr>
+            <a:r>
+              <a:t>Solution architecture: what to build, on what services, why, what it costs, and what happens when it breaks</a:t>
+            </a:r>
+          </a:p>
+          <a:p>
+            <a:pPr>
+              <a:spcAft>
+                <a:spcPts val="400"/>
+              </a:spcAft>
+              <a:defRPr sz="1100">
+                <a:solidFill>
+                  <a:srgbClr val="272727"/>
+                </a:solidFill>
+                <a:latin typeface="Arial"/>
+              </a:defRPr>
+            </a:pPr>
+            <a:r>
+              <a:t>No code. Design decisions, trade-offs, diagram, sizing, and a defense.</a:t>
             </a:r>
           </a:p>
         </p:txBody>
@@ -3611,19 +6402,77 @@
       <p:grpSpPr/>
       <p:sp>
         <p:nvSpPr>
-          <p:cNvPr id="2" name="Title 1"/>
-          <p:cNvSpPr>
-            <a:spLocks noGrp="1"/>
-          </p:cNvSpPr>
-          <p:nvPr>
-            <p:ph type="title"/>
-          </p:nvPr>
-        </p:nvSpPr>
-        <p:spPr/>
-        <p:txBody>
-          <a:bodyPr/>
-          <a:lstStyle/>
-          <a:p>
+          <p:cNvPr id="2" name="Rectangle 1"/>
+          <p:cNvSpPr/>
+          <p:nvPr/>
+        </p:nvSpPr>
+        <p:spPr>
+          <a:xfrm>
+            <a:off x="0" y="0"/>
+            <a:ext cx="12192000" cy="1143000"/>
+          </a:xfrm>
+          <a:prstGeom prst="rect">
+            <a:avLst/>
+          </a:prstGeom>
+          <a:solidFill>
+            <a:srgbClr val="1C2E5E"/>
+          </a:solidFill>
+          <a:ln>
+            <a:noFill/>
+          </a:ln>
+        </p:spPr>
+        <p:style>
+          <a:lnRef idx="1">
+            <a:schemeClr val="accent1"/>
+          </a:lnRef>
+          <a:fillRef idx="3">
+            <a:schemeClr val="accent1"/>
+          </a:fillRef>
+          <a:effectRef idx="2">
+            <a:schemeClr val="accent1"/>
+          </a:effectRef>
+          <a:fontRef idx="minor">
+            <a:schemeClr val="lt1"/>
+          </a:fontRef>
+        </p:style>
+        <p:txBody>
+          <a:bodyPr rtlCol="0" anchor="ctr"/>
+          <a:lstStyle/>
+          <a:p>
+            <a:pPr algn="ctr"/>
+          </a:p>
+        </p:txBody>
+      </p:sp>
+      <p:sp>
+        <p:nvSpPr>
+          <p:cNvPr id="3" name="TextBox 2"/>
+          <p:cNvSpPr txBox="1"/>
+          <p:nvPr/>
+        </p:nvSpPr>
+        <p:spPr>
+          <a:xfrm>
+            <a:off x="457200" y="137160"/>
+            <a:ext cx="11247120" cy="548640"/>
+          </a:xfrm>
+          <a:prstGeom prst="rect">
+            <a:avLst/>
+          </a:prstGeom>
+          <a:noFill/>
+        </p:spPr>
+        <p:txBody>
+          <a:bodyPr wrap="square">
+            <a:spAutoFit/>
+          </a:bodyPr>
+          <a:lstStyle/>
+          <a:p>
+            <a:pPr>
+              <a:defRPr sz="3000" b="1">
+                <a:solidFill>
+                  <a:srgbClr val="FFFFFF"/>
+                </a:solidFill>
+                <a:latin typeface="Georgia"/>
+              </a:defRPr>
+            </a:pPr>
             <a:r>
               <a:t>Challenge 1: The Pandas Ceiling</a:t>
             </a:r>
@@ -3632,80 +6481,729 @@
       </p:sp>
       <p:sp>
         <p:nvSpPr>
-          <p:cNvPr id="3" name="Content Placeholder 2"/>
-          <p:cNvSpPr>
-            <a:spLocks noGrp="1"/>
-          </p:cNvSpPr>
-          <p:nvPr>
-            <p:ph idx="1"/>
-          </p:nvPr>
-        </p:nvSpPr>
-        <p:spPr/>
-        <p:txBody>
-          <a:bodyPr/>
-          <a:lstStyle/>
-          <a:p>
-            <a:pPr>
-              <a:defRPr sz="1800"/>
-            </a:pPr>
-            <a:r>
-              <a:t>PoC timing: ~2 min per file (463K rows). At 2,400 files/day = 80 hours on one machine</a:t>
-            </a:r>
-          </a:p>
-          <a:p>
-            <a:pPr>
-              <a:defRPr sz="1800"/>
-            </a:pPr>
-            <a:r>
-              <a:t>RAM fails first: pandas loads entire file into memory (2x to 5x file size)</a:t>
-            </a:r>
-          </a:p>
-          <a:p>
-            <a:pPr lvl="1">
-              <a:defRPr sz="1600"/>
-            </a:pPr>
-            <a:r>
-              <a:t>A single 2 GB CSV needs 4 to 10 GB RAM to transform</a:t>
-            </a:r>
-          </a:p>
-          <a:p>
-            <a:pPr>
-              <a:defRPr sz="1800"/>
-            </a:pPr>
-            <a:r>
-              <a:t>Even if files are small enough individually, orchestrating 2,400 jobs daily requires:</a:t>
-            </a:r>
-          </a:p>
-          <a:p>
-            <a:pPr lvl="1">
-              <a:defRPr sz="1600"/>
-            </a:pPr>
-            <a:r>
-              <a:t>Tracking successes and failures per file</a:t>
-            </a:r>
-          </a:p>
-          <a:p>
-            <a:pPr lvl="1">
-              <a:defRPr sz="1600"/>
-            </a:pPr>
-            <a:r>
-              <a:t>Parallelism, retries, and dead-letter handling</a:t>
-            </a:r>
-          </a:p>
-          <a:p>
-            <a:pPr>
-              <a:defRPr sz="1800"/>
-            </a:pPr>
-            <a:r>
-              <a:t>Solution: distributed processing (Spark via AWS Glue or Snowflake-native loading)</a:t>
-            </a:r>
-          </a:p>
-          <a:p>
-            <a:pPr lvl="1">
-              <a:defRPr sz="1600"/>
-            </a:pPr>
-            <a:r>
-              <a:t>Spark partitions data across a cluster, processing files in parallel</a:t>
+          <p:cNvPr id="4" name="TextBox 3"/>
+          <p:cNvSpPr txBox="1"/>
+          <p:nvPr/>
+        </p:nvSpPr>
+        <p:spPr>
+          <a:xfrm>
+            <a:off x="457200" y="640080"/>
+            <a:ext cx="11247120" cy="320040"/>
+          </a:xfrm>
+          <a:prstGeom prst="rect">
+            <a:avLst/>
+          </a:prstGeom>
+          <a:noFill/>
+        </p:spPr>
+        <p:txBody>
+          <a:bodyPr wrap="square">
+            <a:spAutoFit/>
+          </a:bodyPr>
+          <a:lstStyle/>
+          <a:p>
+            <a:pPr>
+              <a:defRPr sz="1400" b="0">
+                <a:solidFill>
+                  <a:srgbClr val="FE97C0"/>
+                </a:solidFill>
+                <a:latin typeface="Arial"/>
+              </a:defRPr>
+            </a:pPr>
+            <a:r>
+              <a:t>Why the PoC Cannot Scale</a:t>
+            </a:r>
+          </a:p>
+        </p:txBody>
+      </p:sp>
+      <p:sp>
+        <p:nvSpPr>
+          <p:cNvPr id="5" name="Rectangle 4"/>
+          <p:cNvSpPr/>
+          <p:nvPr/>
+        </p:nvSpPr>
+        <p:spPr>
+          <a:xfrm>
+            <a:off x="0" y="6784848"/>
+            <a:ext cx="12192000" cy="73152"/>
+          </a:xfrm>
+          <a:prstGeom prst="rect">
+            <a:avLst/>
+          </a:prstGeom>
+          <a:solidFill>
+            <a:srgbClr val="1C2E5E"/>
+          </a:solidFill>
+          <a:ln>
+            <a:noFill/>
+          </a:ln>
+        </p:spPr>
+        <p:style>
+          <a:lnRef idx="1">
+            <a:schemeClr val="accent1"/>
+          </a:lnRef>
+          <a:fillRef idx="3">
+            <a:schemeClr val="accent1"/>
+          </a:fillRef>
+          <a:effectRef idx="2">
+            <a:schemeClr val="accent1"/>
+          </a:effectRef>
+          <a:fontRef idx="minor">
+            <a:schemeClr val="lt1"/>
+          </a:fontRef>
+        </p:style>
+        <p:txBody>
+          <a:bodyPr rtlCol="0" anchor="ctr"/>
+          <a:lstStyle/>
+          <a:p>
+            <a:pPr algn="ctr"/>
+          </a:p>
+        </p:txBody>
+      </p:sp>
+      <p:sp>
+        <p:nvSpPr>
+          <p:cNvPr id="6" name="Rounded Rectangle 5"/>
+          <p:cNvSpPr/>
+          <p:nvPr/>
+        </p:nvSpPr>
+        <p:spPr>
+          <a:xfrm>
+            <a:off x="365760" y="1371600"/>
+            <a:ext cx="5615787" cy="5100000"/>
+          </a:xfrm>
+          <a:prstGeom prst="roundRect">
+            <a:avLst/>
+          </a:prstGeom>
+          <a:solidFill>
+            <a:srgbClr val="FAFAFA"/>
+          </a:solidFill>
+          <a:ln>
+            <a:solidFill>
+              <a:srgbClr val="DDDDDD"/>
+            </a:solidFill>
+          </a:ln>
+        </p:spPr>
+        <p:style>
+          <a:lnRef idx="1">
+            <a:schemeClr val="accent1"/>
+          </a:lnRef>
+          <a:fillRef idx="3">
+            <a:schemeClr val="accent1"/>
+          </a:fillRef>
+          <a:effectRef idx="2">
+            <a:schemeClr val="accent1"/>
+          </a:effectRef>
+          <a:fontRef idx="minor">
+            <a:schemeClr val="lt1"/>
+          </a:fontRef>
+        </p:style>
+        <p:txBody>
+          <a:bodyPr rtlCol="0" anchor="ctr"/>
+          <a:lstStyle/>
+          <a:p>
+            <a:pPr algn="ctr"/>
+          </a:p>
+        </p:txBody>
+      </p:sp>
+      <p:sp>
+        <p:nvSpPr>
+          <p:cNvPr id="7" name="Rectangle 6"/>
+          <p:cNvSpPr/>
+          <p:nvPr/>
+        </p:nvSpPr>
+        <p:spPr>
+          <a:xfrm>
+            <a:off x="502920" y="1508760"/>
+            <a:ext cx="1828800" cy="320040"/>
+          </a:xfrm>
+          <a:prstGeom prst="rect">
+            <a:avLst/>
+          </a:prstGeom>
+          <a:solidFill>
+            <a:srgbClr val="1C2E5E"/>
+          </a:solidFill>
+          <a:ln>
+            <a:noFill/>
+          </a:ln>
+        </p:spPr>
+        <p:style>
+          <a:lnRef idx="1">
+            <a:schemeClr val="accent1"/>
+          </a:lnRef>
+          <a:fillRef idx="3">
+            <a:schemeClr val="accent1"/>
+          </a:fillRef>
+          <a:effectRef idx="2">
+            <a:schemeClr val="accent1"/>
+          </a:effectRef>
+          <a:fontRef idx="minor">
+            <a:schemeClr val="lt1"/>
+          </a:fontRef>
+        </p:style>
+        <p:txBody>
+          <a:bodyPr rtlCol="0" anchor="ctr"/>
+          <a:lstStyle/>
+          <a:p>
+            <a:pPr algn="ctr"/>
+          </a:p>
+        </p:txBody>
+      </p:sp>
+      <p:sp>
+        <p:nvSpPr>
+          <p:cNvPr id="8" name="TextBox 7"/>
+          <p:cNvSpPr txBox="1"/>
+          <p:nvPr/>
+        </p:nvSpPr>
+        <p:spPr>
+          <a:xfrm>
+            <a:off x="548640" y="1508760"/>
+            <a:ext cx="1828800" cy="320040"/>
+          </a:xfrm>
+          <a:prstGeom prst="rect">
+            <a:avLst/>
+          </a:prstGeom>
+          <a:noFill/>
+        </p:spPr>
+        <p:txBody>
+          <a:bodyPr wrap="none" anchor="ctr">
+            <a:spAutoFit/>
+          </a:bodyPr>
+          <a:lstStyle/>
+          <a:p>
+            <a:pPr>
+              <a:defRPr sz="1100" b="1">
+                <a:solidFill>
+                  <a:srgbClr val="FFFFFF"/>
+                </a:solidFill>
+                <a:latin typeface="Arial"/>
+              </a:defRPr>
+            </a:pPr>
+            <a:r>
+              <a:t>THE MATH</a:t>
+            </a:r>
+          </a:p>
+        </p:txBody>
+      </p:sp>
+      <p:sp>
+        <p:nvSpPr>
+          <p:cNvPr id="9" name="TextBox 8"/>
+          <p:cNvSpPr txBox="1"/>
+          <p:nvPr/>
+        </p:nvSpPr>
+        <p:spPr>
+          <a:xfrm>
+            <a:off x="594360" y="1920240"/>
+            <a:ext cx="5158587" cy="4400000"/>
+          </a:xfrm>
+          <a:prstGeom prst="rect">
+            <a:avLst/>
+          </a:prstGeom>
+          <a:noFill/>
+        </p:spPr>
+        <p:txBody>
+          <a:bodyPr wrap="square">
+            <a:spAutoFit/>
+          </a:bodyPr>
+          <a:lstStyle/>
+          <a:p>
+            <a:pPr>
+              <a:spcAft>
+                <a:spcPts val="400"/>
+              </a:spcAft>
+              <a:defRPr sz="1100">
+                <a:solidFill>
+                  <a:srgbClr val="272727"/>
+                </a:solidFill>
+                <a:latin typeface="Arial"/>
+              </a:defRPr>
+            </a:pPr>
+            <a:r>
+              <a:t>PoC: ~2 min per file (463K rows)</a:t>
+            </a:r>
+          </a:p>
+          <a:p>
+            <a:pPr>
+              <a:spcAft>
+                <a:spcPts val="400"/>
+              </a:spcAft>
+              <a:defRPr sz="1100">
+                <a:solidFill>
+                  <a:srgbClr val="272727"/>
+                </a:solidFill>
+                <a:latin typeface="Arial"/>
+              </a:defRPr>
+            </a:pPr>
+            <a:r>
+              <a:t>Production: 2,400 files/day x 2 min = 80 hours</a:t>
+            </a:r>
+          </a:p>
+          <a:p>
+            <a:pPr>
+              <a:spcAft>
+                <a:spcPts val="400"/>
+              </a:spcAft>
+              <a:defRPr sz="1100">
+                <a:solidFill>
+                  <a:srgbClr val="272727"/>
+                </a:solidFill>
+                <a:latin typeface="Arial"/>
+              </a:defRPr>
+            </a:pPr>
+            <a:r>
+              <a:t>That is 3.3 days to process 1 day's data (never catches up)</a:t>
+            </a:r>
+          </a:p>
+          <a:p>
+            <a:pPr>
+              <a:spcAft>
+                <a:spcPts val="400"/>
+              </a:spcAft>
+              <a:defRPr sz="1100">
+                <a:solidFill>
+                  <a:srgbClr val="272727"/>
+                </a:solidFill>
+                <a:latin typeface="Arial"/>
+              </a:defRPr>
+            </a:pPr>
+          </a:p>
+          <a:p>
+            <a:pPr>
+              <a:spcAft>
+                <a:spcPts val="400"/>
+              </a:spcAft>
+              <a:defRPr sz="1100">
+                <a:solidFill>
+                  <a:srgbClr val="272727"/>
+                </a:solidFill>
+                <a:latin typeface="Arial"/>
+              </a:defRPr>
+            </a:pPr>
+            <a:r>
+              <a:t>RAM fails first:</a:t>
+            </a:r>
+          </a:p>
+          <a:p>
+            <a:pPr>
+              <a:spcAft>
+                <a:spcPts val="400"/>
+              </a:spcAft>
+              <a:defRPr sz="1100">
+                <a:solidFill>
+                  <a:srgbClr val="272727"/>
+                </a:solidFill>
+                <a:latin typeface="Arial"/>
+              </a:defRPr>
+            </a:pPr>
+            <a:r>
+              <a:t>  Pandas loads entire file into memory (2x-5x file size)</a:t>
+            </a:r>
+          </a:p>
+          <a:p>
+            <a:pPr>
+              <a:spcAft>
+                <a:spcPts val="400"/>
+              </a:spcAft>
+              <a:defRPr sz="1100">
+                <a:solidFill>
+                  <a:srgbClr val="272727"/>
+                </a:solidFill>
+                <a:latin typeface="Arial"/>
+              </a:defRPr>
+            </a:pPr>
+            <a:r>
+              <a:t>  A 2 GB CSV needs 4-10 GB RAM to transform</a:t>
+            </a:r>
+          </a:p>
+          <a:p>
+            <a:pPr>
+              <a:spcAft>
+                <a:spcPts val="400"/>
+              </a:spcAft>
+              <a:defRPr sz="1100">
+                <a:solidFill>
+                  <a:srgbClr val="272727"/>
+                </a:solidFill>
+                <a:latin typeface="Arial"/>
+              </a:defRPr>
+            </a:pPr>
+          </a:p>
+          <a:p>
+            <a:pPr>
+              <a:spcAft>
+                <a:spcPts val="400"/>
+              </a:spcAft>
+              <a:defRPr sz="1100">
+                <a:solidFill>
+                  <a:srgbClr val="272727"/>
+                </a:solidFill>
+                <a:latin typeface="Arial"/>
+              </a:defRPr>
+            </a:pPr>
+            <a:r>
+              <a:t>Even with small files, orchestration fails:</a:t>
+            </a:r>
+          </a:p>
+          <a:p>
+            <a:pPr>
+              <a:spcAft>
+                <a:spcPts val="400"/>
+              </a:spcAft>
+              <a:defRPr sz="1100">
+                <a:solidFill>
+                  <a:srgbClr val="272727"/>
+                </a:solidFill>
+                <a:latin typeface="Arial"/>
+              </a:defRPr>
+            </a:pPr>
+            <a:r>
+              <a:t>  Tracking 2,400 successes/failures daily</a:t>
+            </a:r>
+          </a:p>
+          <a:p>
+            <a:pPr>
+              <a:spcAft>
+                <a:spcPts val="400"/>
+              </a:spcAft>
+              <a:defRPr sz="1100">
+                <a:solidFill>
+                  <a:srgbClr val="272727"/>
+                </a:solidFill>
+                <a:latin typeface="Arial"/>
+              </a:defRPr>
+            </a:pPr>
+            <a:r>
+              <a:t>  Retry logic, dead-letter handling, parallelism</a:t>
+            </a:r>
+          </a:p>
+          <a:p>
+            <a:pPr>
+              <a:spcAft>
+                <a:spcPts val="400"/>
+              </a:spcAft>
+              <a:defRPr sz="1100">
+                <a:solidFill>
+                  <a:srgbClr val="272727"/>
+                </a:solidFill>
+                <a:latin typeface="Arial"/>
+              </a:defRPr>
+            </a:pPr>
+            <a:r>
+              <a:t>  No built-in checkpointing or recovery</a:t>
+            </a:r>
+          </a:p>
+        </p:txBody>
+      </p:sp>
+      <p:sp>
+        <p:nvSpPr>
+          <p:cNvPr id="10" name="Rounded Rectangle 9"/>
+          <p:cNvSpPr/>
+          <p:nvPr/>
+        </p:nvSpPr>
+        <p:spPr>
+          <a:xfrm>
+            <a:off x="6210147" y="1371600"/>
+            <a:ext cx="5615787" cy="2800000"/>
+          </a:xfrm>
+          <a:prstGeom prst="roundRect">
+            <a:avLst/>
+          </a:prstGeom>
+          <a:solidFill>
+            <a:srgbClr val="FAFAFA"/>
+          </a:solidFill>
+          <a:ln>
+            <a:solidFill>
+              <a:srgbClr val="DDDDDD"/>
+            </a:solidFill>
+          </a:ln>
+        </p:spPr>
+        <p:style>
+          <a:lnRef idx="1">
+            <a:schemeClr val="accent1"/>
+          </a:lnRef>
+          <a:fillRef idx="3">
+            <a:schemeClr val="accent1"/>
+          </a:fillRef>
+          <a:effectRef idx="2">
+            <a:schemeClr val="accent1"/>
+          </a:effectRef>
+          <a:fontRef idx="minor">
+            <a:schemeClr val="lt1"/>
+          </a:fontRef>
+        </p:style>
+        <p:txBody>
+          <a:bodyPr rtlCol="0" anchor="ctr"/>
+          <a:lstStyle/>
+          <a:p>
+            <a:pPr algn="ctr"/>
+          </a:p>
+        </p:txBody>
+      </p:sp>
+      <p:sp>
+        <p:nvSpPr>
+          <p:cNvPr id="11" name="Rectangle 10"/>
+          <p:cNvSpPr/>
+          <p:nvPr/>
+        </p:nvSpPr>
+        <p:spPr>
+          <a:xfrm>
+            <a:off x="6347307" y="1508760"/>
+            <a:ext cx="1371600" cy="320040"/>
+          </a:xfrm>
+          <a:prstGeom prst="rect">
+            <a:avLst/>
+          </a:prstGeom>
+          <a:solidFill>
+            <a:srgbClr val="1C2E5E"/>
+          </a:solidFill>
+          <a:ln>
+            <a:noFill/>
+          </a:ln>
+        </p:spPr>
+        <p:style>
+          <a:lnRef idx="1">
+            <a:schemeClr val="accent1"/>
+          </a:lnRef>
+          <a:fillRef idx="3">
+            <a:schemeClr val="accent1"/>
+          </a:fillRef>
+          <a:effectRef idx="2">
+            <a:schemeClr val="accent1"/>
+          </a:effectRef>
+          <a:fontRef idx="minor">
+            <a:schemeClr val="lt1"/>
+          </a:fontRef>
+        </p:style>
+        <p:txBody>
+          <a:bodyPr rtlCol="0" anchor="ctr"/>
+          <a:lstStyle/>
+          <a:p>
+            <a:pPr algn="ctr"/>
+          </a:p>
+        </p:txBody>
+      </p:sp>
+      <p:sp>
+        <p:nvSpPr>
+          <p:cNvPr id="12" name="TextBox 11"/>
+          <p:cNvSpPr txBox="1"/>
+          <p:nvPr/>
+        </p:nvSpPr>
+        <p:spPr>
+          <a:xfrm>
+            <a:off x="6393027" y="1508760"/>
+            <a:ext cx="1371600" cy="320040"/>
+          </a:xfrm>
+          <a:prstGeom prst="rect">
+            <a:avLst/>
+          </a:prstGeom>
+          <a:noFill/>
+        </p:spPr>
+        <p:txBody>
+          <a:bodyPr wrap="none" anchor="ctr">
+            <a:spAutoFit/>
+          </a:bodyPr>
+          <a:lstStyle/>
+          <a:p>
+            <a:pPr>
+              <a:defRPr sz="1100" b="1">
+                <a:solidFill>
+                  <a:srgbClr val="FFFFFF"/>
+                </a:solidFill>
+                <a:latin typeface="Arial"/>
+              </a:defRPr>
+            </a:pPr>
+            <a:r>
+              <a:t>DECISION</a:t>
+            </a:r>
+          </a:p>
+        </p:txBody>
+      </p:sp>
+      <p:sp>
+        <p:nvSpPr>
+          <p:cNvPr id="13" name="TextBox 12"/>
+          <p:cNvSpPr txBox="1"/>
+          <p:nvPr/>
+        </p:nvSpPr>
+        <p:spPr>
+          <a:xfrm>
+            <a:off x="6438747" y="1920240"/>
+            <a:ext cx="5158587" cy="2200000"/>
+          </a:xfrm>
+          <a:prstGeom prst="rect">
+            <a:avLst/>
+          </a:prstGeom>
+          <a:noFill/>
+        </p:spPr>
+        <p:txBody>
+          <a:bodyPr wrap="square">
+            <a:spAutoFit/>
+          </a:bodyPr>
+          <a:lstStyle/>
+          <a:p>
+            <a:pPr>
+              <a:spcAft>
+                <a:spcPts val="400"/>
+              </a:spcAft>
+              <a:defRPr sz="1100">
+                <a:solidFill>
+                  <a:srgbClr val="272727"/>
+                </a:solidFill>
+                <a:latin typeface="Arial"/>
+              </a:defRPr>
+            </a:pPr>
+            <a:r>
+              <a:t>Replace pandas with distributed Spark processing</a:t>
+            </a:r>
+          </a:p>
+          <a:p>
+            <a:pPr>
+              <a:spcAft>
+                <a:spcPts val="400"/>
+              </a:spcAft>
+              <a:defRPr sz="1100">
+                <a:solidFill>
+                  <a:srgbClr val="272727"/>
+                </a:solidFill>
+                <a:latin typeface="Arial"/>
+              </a:defRPr>
+            </a:pPr>
+          </a:p>
+          <a:p>
+            <a:pPr>
+              <a:spcAft>
+                <a:spcPts val="400"/>
+              </a:spcAft>
+              <a:defRPr sz="1100">
+                <a:solidFill>
+                  <a:srgbClr val="272727"/>
+                </a:solidFill>
+                <a:latin typeface="Arial"/>
+              </a:defRPr>
+            </a:pPr>
+            <a:r>
+              <a:t>Spark partitions data across a cluster:</a:t>
+            </a:r>
+          </a:p>
+          <a:p>
+            <a:pPr>
+              <a:spcAft>
+                <a:spcPts val="400"/>
+              </a:spcAft>
+              <a:defRPr sz="1100">
+                <a:solidFill>
+                  <a:srgbClr val="272727"/>
+                </a:solidFill>
+                <a:latin typeface="Arial"/>
+              </a:defRPr>
+            </a:pPr>
+            <a:r>
+              <a:t>  - Processes files in parallel (not serial)</a:t>
+            </a:r>
+          </a:p>
+          <a:p>
+            <a:pPr>
+              <a:spcAft>
+                <a:spcPts val="400"/>
+              </a:spcAft>
+              <a:defRPr sz="1100">
+                <a:solidFill>
+                  <a:srgbClr val="272727"/>
+                </a:solidFill>
+                <a:latin typeface="Arial"/>
+              </a:defRPr>
+            </a:pPr>
+            <a:r>
+              <a:t>  - Built-in fault tolerance (task retry)</a:t>
+            </a:r>
+          </a:p>
+          <a:p>
+            <a:pPr>
+              <a:spcAft>
+                <a:spcPts val="400"/>
+              </a:spcAft>
+              <a:defRPr sz="1100">
+                <a:solidFill>
+                  <a:srgbClr val="272727"/>
+                </a:solidFill>
+                <a:latin typeface="Arial"/>
+              </a:defRPr>
+            </a:pPr>
+            <a:r>
+              <a:t>  - Scales horizontally by adding workers</a:t>
+            </a:r>
+          </a:p>
+          <a:p>
+            <a:pPr>
+              <a:spcAft>
+                <a:spcPts val="400"/>
+              </a:spcAft>
+              <a:defRPr sz="1100">
+                <a:solidFill>
+                  <a:srgbClr val="272727"/>
+                </a:solidFill>
+                <a:latin typeface="Arial"/>
+              </a:defRPr>
+            </a:pPr>
+          </a:p>
+          <a:p>
+            <a:pPr>
+              <a:spcAft>
+                <a:spcPts val="400"/>
+              </a:spcAft>
+              <a:defRPr sz="1100">
+                <a:solidFill>
+                  <a:srgbClr val="272727"/>
+                </a:solidFill>
+                <a:latin typeface="Arial"/>
+              </a:defRPr>
+            </a:pPr>
+            <a:r>
+              <a:t>We chose X over Y because:</a:t>
+            </a:r>
+          </a:p>
+          <a:p>
+            <a:pPr>
+              <a:spcAft>
+                <a:spcPts val="400"/>
+              </a:spcAft>
+              <a:defRPr sz="1100">
+                <a:solidFill>
+                  <a:srgbClr val="272727"/>
+                </a:solidFill>
+                <a:latin typeface="Arial"/>
+              </a:defRPr>
+            </a:pPr>
+            <a:r>
+              <a:t>  Chose Spark (via Glue) over pandas-per-file</a:t>
+            </a:r>
+          </a:p>
+          <a:p>
+            <a:pPr>
+              <a:spcAft>
+                <a:spcPts val="400"/>
+              </a:spcAft>
+              <a:defRPr sz="1100">
+                <a:solidFill>
+                  <a:srgbClr val="272727"/>
+                </a:solidFill>
+                <a:latin typeface="Arial"/>
+              </a:defRPr>
+            </a:pPr>
+            <a:r>
+              <a:t>  because orchestrating 2,400 serial pandas jobs</a:t>
+            </a:r>
+          </a:p>
+          <a:p>
+            <a:pPr>
+              <a:spcAft>
+                <a:spcPts val="400"/>
+              </a:spcAft>
+              <a:defRPr sz="1100">
+                <a:solidFill>
+                  <a:srgbClr val="272727"/>
+                </a:solidFill>
+                <a:latin typeface="Arial"/>
+              </a:defRPr>
+            </a:pPr>
+            <a:r>
+              <a:t>  still leaves no fault tolerance or parallelism</a:t>
             </a:r>
           </a:p>
         </p:txBody>
@@ -3730,19 +7228,77 @@
       <p:grpSpPr/>
       <p:sp>
         <p:nvSpPr>
-          <p:cNvPr id="2" name="Title 1"/>
-          <p:cNvSpPr>
-            <a:spLocks noGrp="1"/>
-          </p:cNvSpPr>
-          <p:nvPr>
-            <p:ph type="title"/>
-          </p:nvPr>
-        </p:nvSpPr>
-        <p:spPr/>
-        <p:txBody>
-          <a:bodyPr/>
-          <a:lstStyle/>
-          <a:p>
+          <p:cNvPr id="2" name="Rectangle 1"/>
+          <p:cNvSpPr/>
+          <p:nvPr/>
+        </p:nvSpPr>
+        <p:spPr>
+          <a:xfrm>
+            <a:off x="0" y="0"/>
+            <a:ext cx="12192000" cy="1143000"/>
+          </a:xfrm>
+          <a:prstGeom prst="rect">
+            <a:avLst/>
+          </a:prstGeom>
+          <a:solidFill>
+            <a:srgbClr val="1C2E5E"/>
+          </a:solidFill>
+          <a:ln>
+            <a:noFill/>
+          </a:ln>
+        </p:spPr>
+        <p:style>
+          <a:lnRef idx="1">
+            <a:schemeClr val="accent1"/>
+          </a:lnRef>
+          <a:fillRef idx="3">
+            <a:schemeClr val="accent1"/>
+          </a:fillRef>
+          <a:effectRef idx="2">
+            <a:schemeClr val="accent1"/>
+          </a:effectRef>
+          <a:fontRef idx="minor">
+            <a:schemeClr val="lt1"/>
+          </a:fontRef>
+        </p:style>
+        <p:txBody>
+          <a:bodyPr rtlCol="0" anchor="ctr"/>
+          <a:lstStyle/>
+          <a:p>
+            <a:pPr algn="ctr"/>
+          </a:p>
+        </p:txBody>
+      </p:sp>
+      <p:sp>
+        <p:nvSpPr>
+          <p:cNvPr id="3" name="TextBox 2"/>
+          <p:cNvSpPr txBox="1"/>
+          <p:nvPr/>
+        </p:nvSpPr>
+        <p:spPr>
+          <a:xfrm>
+            <a:off x="457200" y="137160"/>
+            <a:ext cx="11247120" cy="548640"/>
+          </a:xfrm>
+          <a:prstGeom prst="rect">
+            <a:avLst/>
+          </a:prstGeom>
+          <a:noFill/>
+        </p:spPr>
+        <p:txBody>
+          <a:bodyPr wrap="square">
+            <a:spAutoFit/>
+          </a:bodyPr>
+          <a:lstStyle/>
+          <a:p>
+            <a:pPr>
+              <a:defRPr sz="3000" b="1">
+                <a:solidFill>
+                  <a:srgbClr val="FFFFFF"/>
+                </a:solidFill>
+                <a:latin typeface="Georgia"/>
+              </a:defRPr>
+            </a:pPr>
             <a:r>
               <a:t>Challenge 2: Where Does Processing Run?</a:t>
             </a:r>
@@ -3751,96 +7307,825 @@
       </p:sp>
       <p:sp>
         <p:nvSpPr>
-          <p:cNvPr id="3" name="Content Placeholder 2"/>
-          <p:cNvSpPr>
-            <a:spLocks noGrp="1"/>
-          </p:cNvSpPr>
-          <p:nvPr>
-            <p:ph idx="1"/>
-          </p:nvPr>
-        </p:nvSpPr>
-        <p:spPr/>
-        <p:txBody>
-          <a:bodyPr/>
-          <a:lstStyle/>
-          <a:p>
-            <a:pPr>
-              <a:defRPr sz="1800"/>
-            </a:pPr>
-            <a:r>
-              <a:t>Decision: AWS Glue (managed Spark) + Snowflake for in-warehouse transforms</a:t>
-            </a:r>
-          </a:p>
-          <a:p>
-            <a:pPr>
-              <a:defRPr sz="1800"/>
-            </a:pPr>
-            <a:r>
-              <a:t>Why AWS Glue:</a:t>
-            </a:r>
-          </a:p>
-          <a:p>
-            <a:pPr lvl="1">
-              <a:defRPr sz="1600"/>
-            </a:pPr>
-            <a:r>
-              <a:t>Serverless: no clusters to provision, scales to the daily peak automatically</a:t>
-            </a:r>
-          </a:p>
-          <a:p>
-            <a:pPr lvl="1">
-              <a:defRPr sz="1600"/>
-            </a:pPr>
-            <a:r>
-              <a:t>Native S3 integration (our source data already lives there)</a:t>
-            </a:r>
-          </a:p>
-          <a:p>
-            <a:pPr lvl="1">
-              <a:defRPr sz="1600"/>
-            </a:pPr>
-            <a:r>
-              <a:t>We already used Glue Visual ETL for our NYC Taxi Bronze/Silver pipeline (Week 3)</a:t>
-            </a:r>
-          </a:p>
-          <a:p>
-            <a:pPr>
-              <a:defRPr sz="1800"/>
-            </a:pPr>
-            <a:r>
-              <a:t>Why not on-premise:</a:t>
-            </a:r>
-          </a:p>
-          <a:p>
-            <a:pPr lvl="1">
-              <a:defRPr sz="1600"/>
-            </a:pPr>
-            <a:r>
-              <a:t>Procurement lead time, patching burden, 24/7 on-call for hardware failures</a:t>
-            </a:r>
-          </a:p>
-          <a:p>
-            <a:pPr lvl="1">
-              <a:defRPr sz="1600"/>
-            </a:pPr>
-            <a:r>
-              <a:t>Cannot elastically scale for daily peak then release capacity</a:t>
-            </a:r>
-          </a:p>
-          <a:p>
-            <a:pPr>
-              <a:defRPr sz="1800"/>
-            </a:pPr>
-            <a:r>
-              <a:t>Snowflake's role: final transformations (joins, dedup) run inside Snowflake using COPY INTO + SQL</a:t>
-            </a:r>
-          </a:p>
-          <a:p>
-            <a:pPr lvl="1">
-              <a:defRPr sz="1600"/>
-            </a:pPr>
-            <a:r>
-              <a:t>Company already pays for Snowflake compute; avoids double-paying for transformation</a:t>
+          <p:cNvPr id="4" name="TextBox 3"/>
+          <p:cNvSpPr txBox="1"/>
+          <p:nvPr/>
+        </p:nvSpPr>
+        <p:spPr>
+          <a:xfrm>
+            <a:off x="457200" y="640080"/>
+            <a:ext cx="11247120" cy="320040"/>
+          </a:xfrm>
+          <a:prstGeom prst="rect">
+            <a:avLst/>
+          </a:prstGeom>
+          <a:noFill/>
+        </p:spPr>
+        <p:txBody>
+          <a:bodyPr wrap="square">
+            <a:spAutoFit/>
+          </a:bodyPr>
+          <a:lstStyle/>
+          <a:p>
+            <a:pPr>
+              <a:defRPr sz="1400" b="0">
+                <a:solidFill>
+                  <a:srgbClr val="FE97C0"/>
+                </a:solidFill>
+                <a:latin typeface="Arial"/>
+              </a:defRPr>
+            </a:pPr>
+            <a:r>
+              <a:t>Cloud Service Selection</a:t>
+            </a:r>
+          </a:p>
+        </p:txBody>
+      </p:sp>
+      <p:sp>
+        <p:nvSpPr>
+          <p:cNvPr id="5" name="Rectangle 4"/>
+          <p:cNvSpPr/>
+          <p:nvPr/>
+        </p:nvSpPr>
+        <p:spPr>
+          <a:xfrm>
+            <a:off x="0" y="6784848"/>
+            <a:ext cx="12192000" cy="73152"/>
+          </a:xfrm>
+          <a:prstGeom prst="rect">
+            <a:avLst/>
+          </a:prstGeom>
+          <a:solidFill>
+            <a:srgbClr val="1C2E5E"/>
+          </a:solidFill>
+          <a:ln>
+            <a:noFill/>
+          </a:ln>
+        </p:spPr>
+        <p:style>
+          <a:lnRef idx="1">
+            <a:schemeClr val="accent1"/>
+          </a:lnRef>
+          <a:fillRef idx="3">
+            <a:schemeClr val="accent1"/>
+          </a:fillRef>
+          <a:effectRef idx="2">
+            <a:schemeClr val="accent1"/>
+          </a:effectRef>
+          <a:fontRef idx="minor">
+            <a:schemeClr val="lt1"/>
+          </a:fontRef>
+        </p:style>
+        <p:txBody>
+          <a:bodyPr rtlCol="0" anchor="ctr"/>
+          <a:lstStyle/>
+          <a:p>
+            <a:pPr algn="ctr"/>
+          </a:p>
+        </p:txBody>
+      </p:sp>
+      <p:sp>
+        <p:nvSpPr>
+          <p:cNvPr id="6" name="Rounded Rectangle 5"/>
+          <p:cNvSpPr/>
+          <p:nvPr/>
+        </p:nvSpPr>
+        <p:spPr>
+          <a:xfrm>
+            <a:off x="365760" y="1371600"/>
+            <a:ext cx="5615787" cy="5100000"/>
+          </a:xfrm>
+          <a:prstGeom prst="roundRect">
+            <a:avLst/>
+          </a:prstGeom>
+          <a:solidFill>
+            <a:srgbClr val="FAFAFA"/>
+          </a:solidFill>
+          <a:ln>
+            <a:solidFill>
+              <a:srgbClr val="DDDDDD"/>
+            </a:solidFill>
+          </a:ln>
+        </p:spPr>
+        <p:style>
+          <a:lnRef idx="1">
+            <a:schemeClr val="accent1"/>
+          </a:lnRef>
+          <a:fillRef idx="3">
+            <a:schemeClr val="accent1"/>
+          </a:fillRef>
+          <a:effectRef idx="2">
+            <a:schemeClr val="accent1"/>
+          </a:effectRef>
+          <a:fontRef idx="minor">
+            <a:schemeClr val="lt1"/>
+          </a:fontRef>
+        </p:style>
+        <p:txBody>
+          <a:bodyPr rtlCol="0" anchor="ctr"/>
+          <a:lstStyle/>
+          <a:p>
+            <a:pPr algn="ctr"/>
+          </a:p>
+        </p:txBody>
+      </p:sp>
+      <p:sp>
+        <p:nvSpPr>
+          <p:cNvPr id="7" name="Rectangle 6"/>
+          <p:cNvSpPr/>
+          <p:nvPr/>
+        </p:nvSpPr>
+        <p:spPr>
+          <a:xfrm>
+            <a:off x="502920" y="1508760"/>
+            <a:ext cx="2400000" cy="320040"/>
+          </a:xfrm>
+          <a:prstGeom prst="rect">
+            <a:avLst/>
+          </a:prstGeom>
+          <a:solidFill>
+            <a:srgbClr val="1C2E5E"/>
+          </a:solidFill>
+          <a:ln>
+            <a:noFill/>
+          </a:ln>
+        </p:spPr>
+        <p:style>
+          <a:lnRef idx="1">
+            <a:schemeClr val="accent1"/>
+          </a:lnRef>
+          <a:fillRef idx="3">
+            <a:schemeClr val="accent1"/>
+          </a:fillRef>
+          <a:effectRef idx="2">
+            <a:schemeClr val="accent1"/>
+          </a:effectRef>
+          <a:fontRef idx="minor">
+            <a:schemeClr val="lt1"/>
+          </a:fontRef>
+        </p:style>
+        <p:txBody>
+          <a:bodyPr rtlCol="0" anchor="ctr"/>
+          <a:lstStyle/>
+          <a:p>
+            <a:pPr algn="ctr"/>
+          </a:p>
+        </p:txBody>
+      </p:sp>
+      <p:sp>
+        <p:nvSpPr>
+          <p:cNvPr id="8" name="TextBox 7"/>
+          <p:cNvSpPr txBox="1"/>
+          <p:nvPr/>
+        </p:nvSpPr>
+        <p:spPr>
+          <a:xfrm>
+            <a:off x="548640" y="1508760"/>
+            <a:ext cx="2400000" cy="320040"/>
+          </a:xfrm>
+          <a:prstGeom prst="rect">
+            <a:avLst/>
+          </a:prstGeom>
+          <a:noFill/>
+        </p:spPr>
+        <p:txBody>
+          <a:bodyPr wrap="none" anchor="ctr">
+            <a:spAutoFit/>
+          </a:bodyPr>
+          <a:lstStyle/>
+          <a:p>
+            <a:pPr>
+              <a:defRPr sz="1100" b="1">
+                <a:solidFill>
+                  <a:srgbClr val="FFFFFF"/>
+                </a:solidFill>
+                <a:latin typeface="Arial"/>
+              </a:defRPr>
+            </a:pPr>
+            <a:r>
+              <a:t>DECISION: AWS GLUE + SNOWFLAKE</a:t>
+            </a:r>
+          </a:p>
+        </p:txBody>
+      </p:sp>
+      <p:sp>
+        <p:nvSpPr>
+          <p:cNvPr id="9" name="TextBox 8"/>
+          <p:cNvSpPr txBox="1"/>
+          <p:nvPr/>
+        </p:nvSpPr>
+        <p:spPr>
+          <a:xfrm>
+            <a:off x="594360" y="1920240"/>
+            <a:ext cx="5158587" cy="4400000"/>
+          </a:xfrm>
+          <a:prstGeom prst="rect">
+            <a:avLst/>
+          </a:prstGeom>
+          <a:noFill/>
+        </p:spPr>
+        <p:txBody>
+          <a:bodyPr wrap="square">
+            <a:spAutoFit/>
+          </a:bodyPr>
+          <a:lstStyle/>
+          <a:p>
+            <a:pPr>
+              <a:spcAft>
+                <a:spcPts val="400"/>
+              </a:spcAft>
+              <a:defRPr sz="1100">
+                <a:solidFill>
+                  <a:srgbClr val="272727"/>
+                </a:solidFill>
+                <a:latin typeface="Arial"/>
+              </a:defRPr>
+            </a:pPr>
+            <a:r>
+              <a:t>AWS Glue (Managed Spark):</a:t>
+            </a:r>
+          </a:p>
+          <a:p>
+            <a:pPr>
+              <a:spcAft>
+                <a:spcPts val="400"/>
+              </a:spcAft>
+              <a:defRPr sz="1100">
+                <a:solidFill>
+                  <a:srgbClr val="272727"/>
+                </a:solidFill>
+                <a:latin typeface="Arial"/>
+              </a:defRPr>
+            </a:pPr>
+            <a:r>
+              <a:t>  - Serverless: no clusters to provision</a:t>
+            </a:r>
+          </a:p>
+          <a:p>
+            <a:pPr>
+              <a:spcAft>
+                <a:spcPts val="400"/>
+              </a:spcAft>
+              <a:defRPr sz="1100">
+                <a:solidFill>
+                  <a:srgbClr val="272727"/>
+                </a:solidFill>
+                <a:latin typeface="Arial"/>
+              </a:defRPr>
+            </a:pPr>
+            <a:r>
+              <a:t>  - Scales to daily peak automatically</a:t>
+            </a:r>
+          </a:p>
+          <a:p>
+            <a:pPr>
+              <a:spcAft>
+                <a:spcPts val="400"/>
+              </a:spcAft>
+              <a:defRPr sz="1100">
+                <a:solidFill>
+                  <a:srgbClr val="272727"/>
+                </a:solidFill>
+                <a:latin typeface="Arial"/>
+              </a:defRPr>
+            </a:pPr>
+            <a:r>
+              <a:t>  - Native S3 integration (data already there)</a:t>
+            </a:r>
+          </a:p>
+          <a:p>
+            <a:pPr>
+              <a:spcAft>
+                <a:spcPts val="400"/>
+              </a:spcAft>
+              <a:defRPr sz="1100">
+                <a:solidFill>
+                  <a:srgbClr val="272727"/>
+                </a:solidFill>
+                <a:latin typeface="Arial"/>
+              </a:defRPr>
+            </a:pPr>
+            <a:r>
+              <a:t>  - We used Glue Visual ETL in Week 3 (NYC Taxi)</a:t>
+            </a:r>
+          </a:p>
+          <a:p>
+            <a:pPr>
+              <a:spcAft>
+                <a:spcPts val="400"/>
+              </a:spcAft>
+              <a:defRPr sz="1100">
+                <a:solidFill>
+                  <a:srgbClr val="272727"/>
+                </a:solidFill>
+                <a:latin typeface="Arial"/>
+              </a:defRPr>
+            </a:pPr>
+          </a:p>
+          <a:p>
+            <a:pPr>
+              <a:spcAft>
+                <a:spcPts val="400"/>
+              </a:spcAft>
+              <a:defRPr sz="1100">
+                <a:solidFill>
+                  <a:srgbClr val="272727"/>
+                </a:solidFill>
+                <a:latin typeface="Arial"/>
+              </a:defRPr>
+            </a:pPr>
+            <a:r>
+              <a:t>Snowflake (Final Integration):</a:t>
+            </a:r>
+          </a:p>
+          <a:p>
+            <a:pPr>
+              <a:spcAft>
+                <a:spcPts val="400"/>
+              </a:spcAft>
+              <a:defRPr sz="1100">
+                <a:solidFill>
+                  <a:srgbClr val="272727"/>
+                </a:solidFill>
+                <a:latin typeface="Arial"/>
+              </a:defRPr>
+            </a:pPr>
+            <a:r>
+              <a:t>  - Company already pays for compute</a:t>
+            </a:r>
+          </a:p>
+          <a:p>
+            <a:pPr>
+              <a:spcAft>
+                <a:spcPts val="400"/>
+              </a:spcAft>
+              <a:defRPr sz="1100">
+                <a:solidFill>
+                  <a:srgbClr val="272727"/>
+                </a:solidFill>
+                <a:latin typeface="Arial"/>
+              </a:defRPr>
+            </a:pPr>
+            <a:r>
+              <a:t>  - JOIN, dedup, standardize run as SQL</a:t>
+            </a:r>
+          </a:p>
+          <a:p>
+            <a:pPr>
+              <a:spcAft>
+                <a:spcPts val="400"/>
+              </a:spcAft>
+              <a:defRPr sz="1100">
+                <a:solidFill>
+                  <a:srgbClr val="272727"/>
+                </a:solidFill>
+                <a:latin typeface="Arial"/>
+              </a:defRPr>
+            </a:pPr>
+            <a:r>
+              <a:t>  - COPY INTO for bulk S3 loading</a:t>
+            </a:r>
+          </a:p>
+          <a:p>
+            <a:pPr>
+              <a:spcAft>
+                <a:spcPts val="400"/>
+              </a:spcAft>
+              <a:defRPr sz="1100">
+                <a:solidFill>
+                  <a:srgbClr val="272727"/>
+                </a:solidFill>
+                <a:latin typeface="Arial"/>
+              </a:defRPr>
+            </a:pPr>
+          </a:p>
+          <a:p>
+            <a:pPr>
+              <a:spcAft>
+                <a:spcPts val="400"/>
+              </a:spcAft>
+              <a:defRPr sz="1100">
+                <a:solidFill>
+                  <a:srgbClr val="272727"/>
+                </a:solidFill>
+                <a:latin typeface="Arial"/>
+              </a:defRPr>
+            </a:pPr>
+            <a:r>
+              <a:t>GCP equivalent: Cloud Dataflow / Dataproc</a:t>
+            </a:r>
+          </a:p>
+          <a:p>
+            <a:pPr>
+              <a:spcAft>
+                <a:spcPts val="400"/>
+              </a:spcAft>
+              <a:defRPr sz="1100">
+                <a:solidFill>
+                  <a:srgbClr val="272727"/>
+                </a:solidFill>
+                <a:latin typeface="Arial"/>
+              </a:defRPr>
+            </a:pPr>
+            <a:r>
+              <a:t>Alternative: Databricks (managed Spark)</a:t>
+            </a:r>
+          </a:p>
+        </p:txBody>
+      </p:sp>
+      <p:sp>
+        <p:nvSpPr>
+          <p:cNvPr id="10" name="Rounded Rectangle 9"/>
+          <p:cNvSpPr/>
+          <p:nvPr/>
+        </p:nvSpPr>
+        <p:spPr>
+          <a:xfrm>
+            <a:off x="6210147" y="1371600"/>
+            <a:ext cx="5615787" cy="5100000"/>
+          </a:xfrm>
+          <a:prstGeom prst="roundRect">
+            <a:avLst/>
+          </a:prstGeom>
+          <a:solidFill>
+            <a:srgbClr val="FAFAFA"/>
+          </a:solidFill>
+          <a:ln>
+            <a:solidFill>
+              <a:srgbClr val="DDDDDD"/>
+            </a:solidFill>
+          </a:ln>
+        </p:spPr>
+        <p:style>
+          <a:lnRef idx="1">
+            <a:schemeClr val="accent1"/>
+          </a:lnRef>
+          <a:fillRef idx="3">
+            <a:schemeClr val="accent1"/>
+          </a:fillRef>
+          <a:effectRef idx="2">
+            <a:schemeClr val="accent1"/>
+          </a:effectRef>
+          <a:fontRef idx="minor">
+            <a:schemeClr val="lt1"/>
+          </a:fontRef>
+        </p:style>
+        <p:txBody>
+          <a:bodyPr rtlCol="0" anchor="ctr"/>
+          <a:lstStyle/>
+          <a:p>
+            <a:pPr algn="ctr"/>
+          </a:p>
+        </p:txBody>
+      </p:sp>
+      <p:sp>
+        <p:nvSpPr>
+          <p:cNvPr id="11" name="Rectangle 10"/>
+          <p:cNvSpPr/>
+          <p:nvPr/>
+        </p:nvSpPr>
+        <p:spPr>
+          <a:xfrm>
+            <a:off x="6347307" y="1508760"/>
+            <a:ext cx="2400000" cy="320040"/>
+          </a:xfrm>
+          <a:prstGeom prst="rect">
+            <a:avLst/>
+          </a:prstGeom>
+          <a:solidFill>
+            <a:srgbClr val="1C2E5E"/>
+          </a:solidFill>
+          <a:ln>
+            <a:noFill/>
+          </a:ln>
+        </p:spPr>
+        <p:style>
+          <a:lnRef idx="1">
+            <a:schemeClr val="accent1"/>
+          </a:lnRef>
+          <a:fillRef idx="3">
+            <a:schemeClr val="accent1"/>
+          </a:fillRef>
+          <a:effectRef idx="2">
+            <a:schemeClr val="accent1"/>
+          </a:effectRef>
+          <a:fontRef idx="minor">
+            <a:schemeClr val="lt1"/>
+          </a:fontRef>
+        </p:style>
+        <p:txBody>
+          <a:bodyPr rtlCol="0" anchor="ctr"/>
+          <a:lstStyle/>
+          <a:p>
+            <a:pPr algn="ctr"/>
+          </a:p>
+        </p:txBody>
+      </p:sp>
+      <p:sp>
+        <p:nvSpPr>
+          <p:cNvPr id="12" name="TextBox 11"/>
+          <p:cNvSpPr txBox="1"/>
+          <p:nvPr/>
+        </p:nvSpPr>
+        <p:spPr>
+          <a:xfrm>
+            <a:off x="6393027" y="1508760"/>
+            <a:ext cx="2400000" cy="320040"/>
+          </a:xfrm>
+          <a:prstGeom prst="rect">
+            <a:avLst/>
+          </a:prstGeom>
+          <a:noFill/>
+        </p:spPr>
+        <p:txBody>
+          <a:bodyPr wrap="none" anchor="ctr">
+            <a:spAutoFit/>
+          </a:bodyPr>
+          <a:lstStyle/>
+          <a:p>
+            <a:pPr>
+              <a:defRPr sz="1100" b="1">
+                <a:solidFill>
+                  <a:srgbClr val="FFFFFF"/>
+                </a:solidFill>
+                <a:latin typeface="Arial"/>
+              </a:defRPr>
+            </a:pPr>
+            <a:r>
+              <a:t>WHY NOT ON-PREMISE?</a:t>
+            </a:r>
+          </a:p>
+        </p:txBody>
+      </p:sp>
+      <p:sp>
+        <p:nvSpPr>
+          <p:cNvPr id="13" name="TextBox 12"/>
+          <p:cNvSpPr txBox="1"/>
+          <p:nvPr/>
+        </p:nvSpPr>
+        <p:spPr>
+          <a:xfrm>
+            <a:off x="6438747" y="1920240"/>
+            <a:ext cx="5158587" cy="4400000"/>
+          </a:xfrm>
+          <a:prstGeom prst="rect">
+            <a:avLst/>
+          </a:prstGeom>
+          <a:noFill/>
+        </p:spPr>
+        <p:txBody>
+          <a:bodyPr wrap="square">
+            <a:spAutoFit/>
+          </a:bodyPr>
+          <a:lstStyle/>
+          <a:p>
+            <a:pPr>
+              <a:spcAft>
+                <a:spcPts val="400"/>
+              </a:spcAft>
+              <a:defRPr sz="1100">
+                <a:solidFill>
+                  <a:srgbClr val="272727"/>
+                </a:solidFill>
+                <a:latin typeface="Arial"/>
+              </a:defRPr>
+            </a:pPr>
+            <a:r>
+              <a:t>Procurement lead time (weeks/months)</a:t>
+            </a:r>
+          </a:p>
+          <a:p>
+            <a:pPr>
+              <a:spcAft>
+                <a:spcPts val="400"/>
+              </a:spcAft>
+              <a:defRPr sz="1100">
+                <a:solidFill>
+                  <a:srgbClr val="272727"/>
+                </a:solidFill>
+                <a:latin typeface="Arial"/>
+              </a:defRPr>
+            </a:pPr>
+            <a:r>
+              <a:t>Patching and maintenance burden</a:t>
+            </a:r>
+          </a:p>
+          <a:p>
+            <a:pPr>
+              <a:spcAft>
+                <a:spcPts val="400"/>
+              </a:spcAft>
+              <a:defRPr sz="1100">
+                <a:solidFill>
+                  <a:srgbClr val="272727"/>
+                </a:solidFill>
+                <a:latin typeface="Arial"/>
+              </a:defRPr>
+            </a:pPr>
+            <a:r>
+              <a:t>Cannot scale elastically for daily peak</a:t>
+            </a:r>
+          </a:p>
+          <a:p>
+            <a:pPr>
+              <a:spcAft>
+                <a:spcPts val="400"/>
+              </a:spcAft>
+              <a:defRPr sz="1100">
+                <a:solidFill>
+                  <a:srgbClr val="272727"/>
+                </a:solidFill>
+                <a:latin typeface="Arial"/>
+              </a:defRPr>
+            </a:pPr>
+            <a:r>
+              <a:t>24/7 on-call for hardware failures</a:t>
+            </a:r>
+          </a:p>
+          <a:p>
+            <a:pPr>
+              <a:spcAft>
+                <a:spcPts val="400"/>
+              </a:spcAft>
+              <a:defRPr sz="1100">
+                <a:solidFill>
+                  <a:srgbClr val="272727"/>
+                </a:solidFill>
+                <a:latin typeface="Arial"/>
+              </a:defRPr>
+            </a:pPr>
+            <a:r>
+              <a:t>Capital expense vs. operational expense</a:t>
+            </a:r>
+          </a:p>
+          <a:p>
+            <a:pPr>
+              <a:spcAft>
+                <a:spcPts val="400"/>
+              </a:spcAft>
+              <a:defRPr sz="1100">
+                <a:solidFill>
+                  <a:srgbClr val="272727"/>
+                </a:solidFill>
+                <a:latin typeface="Arial"/>
+              </a:defRPr>
+            </a:pPr>
+          </a:p>
+          <a:p>
+            <a:pPr>
+              <a:spcAft>
+                <a:spcPts val="400"/>
+              </a:spcAft>
+              <a:defRPr sz="1100">
+                <a:solidFill>
+                  <a:srgbClr val="272727"/>
+                </a:solidFill>
+                <a:latin typeface="Arial"/>
+              </a:defRPr>
+            </a:pPr>
+            <a:r>
+              <a:t>Why not pure Snowflake?</a:t>
+            </a:r>
+          </a:p>
+          <a:p>
+            <a:pPr>
+              <a:spcAft>
+                <a:spcPts val="400"/>
+              </a:spcAft>
+              <a:defRPr sz="1100">
+                <a:solidFill>
+                  <a:srgbClr val="272727"/>
+                </a:solidFill>
+                <a:latin typeface="Arial"/>
+              </a:defRPr>
+            </a:pPr>
+            <a:r>
+              <a:t>  - Spark (Glue) handles complex Python cleaning</a:t>
+            </a:r>
+          </a:p>
+          <a:p>
+            <a:pPr>
+              <a:spcAft>
+                <a:spcPts val="400"/>
+              </a:spcAft>
+              <a:defRPr sz="1100">
+                <a:solidFill>
+                  <a:srgbClr val="272727"/>
+                </a:solidFill>
+                <a:latin typeface="Arial"/>
+              </a:defRPr>
+            </a:pPr>
+            <a:r>
+              <a:t>    (regex, custom logic) that SQL does awkwardly</a:t>
+            </a:r>
+          </a:p>
+          <a:p>
+            <a:pPr>
+              <a:spcAft>
+                <a:spcPts val="400"/>
+              </a:spcAft>
+              <a:defRPr sz="1100">
+                <a:solidFill>
+                  <a:srgbClr val="272727"/>
+                </a:solidFill>
+                <a:latin typeface="Arial"/>
+              </a:defRPr>
+            </a:pPr>
+            <a:r>
+              <a:t>  - S3 staging is cheaper than Snowflake storage</a:t>
+            </a:r>
+          </a:p>
+          <a:p>
+            <a:pPr>
+              <a:spcAft>
+                <a:spcPts val="400"/>
+              </a:spcAft>
+              <a:defRPr sz="1100">
+                <a:solidFill>
+                  <a:srgbClr val="272727"/>
+                </a:solidFill>
+                <a:latin typeface="Arial"/>
+              </a:defRPr>
+            </a:pPr>
+            <a:r>
+              <a:t>  - Each tool where it is strongest</a:t>
+            </a:r>
+          </a:p>
+          <a:p>
+            <a:pPr>
+              <a:spcAft>
+                <a:spcPts val="400"/>
+              </a:spcAft>
+              <a:defRPr sz="1100">
+                <a:solidFill>
+                  <a:srgbClr val="272727"/>
+                </a:solidFill>
+                <a:latin typeface="Arial"/>
+              </a:defRPr>
+            </a:pPr>
+          </a:p>
+          <a:p>
+            <a:pPr>
+              <a:spcAft>
+                <a:spcPts val="400"/>
+              </a:spcAft>
+              <a:defRPr sz="1100">
+                <a:solidFill>
+                  <a:srgbClr val="272727"/>
+                </a:solidFill>
+                <a:latin typeface="Arial"/>
+              </a:defRPr>
+            </a:pPr>
+            <a:r>
+              <a:t>Why not Databricks over Glue?</a:t>
+            </a:r>
+          </a:p>
+          <a:p>
+            <a:pPr>
+              <a:spcAft>
+                <a:spcPts val="400"/>
+              </a:spcAft>
+              <a:defRPr sz="1100">
+                <a:solidFill>
+                  <a:srgbClr val="272727"/>
+                </a:solidFill>
+                <a:latin typeface="Arial"/>
+              </a:defRPr>
+            </a:pPr>
+            <a:r>
+              <a:t>  - Adds separate vendor relationship</a:t>
+            </a:r>
+          </a:p>
+          <a:p>
+            <a:pPr>
+              <a:spcAft>
+                <a:spcPts val="400"/>
+              </a:spcAft>
+              <a:defRPr sz="1100">
+                <a:solidFill>
+                  <a:srgbClr val="272727"/>
+                </a:solidFill>
+                <a:latin typeface="Arial"/>
+              </a:defRPr>
+            </a:pPr>
+            <a:r>
+              <a:t>  - Glue is native to AWS (S3 already there)</a:t>
+            </a:r>
+          </a:p>
+          <a:p>
+            <a:pPr>
+              <a:spcAft>
+                <a:spcPts val="400"/>
+              </a:spcAft>
+              <a:defRPr sz="1100">
+                <a:solidFill>
+                  <a:srgbClr val="272727"/>
+                </a:solidFill>
+                <a:latin typeface="Arial"/>
+              </a:defRPr>
+            </a:pPr>
+            <a:r>
+              <a:t>  - Managed Spark sufficient for CSV-to-Parquet</a:t>
             </a:r>
           </a:p>
         </p:txBody>
@@ -3865,19 +8150,77 @@
       <p:grpSpPr/>
       <p:sp>
         <p:nvSpPr>
-          <p:cNvPr id="2" name="Title 1"/>
-          <p:cNvSpPr>
-            <a:spLocks noGrp="1"/>
-          </p:cNvSpPr>
-          <p:nvPr>
-            <p:ph type="title"/>
-          </p:nvPr>
-        </p:nvSpPr>
-        <p:spPr/>
-        <p:txBody>
-          <a:bodyPr/>
-          <a:lstStyle/>
-          <a:p>
+          <p:cNvPr id="2" name="Rectangle 1"/>
+          <p:cNvSpPr/>
+          <p:nvPr/>
+        </p:nvSpPr>
+        <p:spPr>
+          <a:xfrm>
+            <a:off x="0" y="0"/>
+            <a:ext cx="12192000" cy="1143000"/>
+          </a:xfrm>
+          <a:prstGeom prst="rect">
+            <a:avLst/>
+          </a:prstGeom>
+          <a:solidFill>
+            <a:srgbClr val="1C2E5E"/>
+          </a:solidFill>
+          <a:ln>
+            <a:noFill/>
+          </a:ln>
+        </p:spPr>
+        <p:style>
+          <a:lnRef idx="1">
+            <a:schemeClr val="accent1"/>
+          </a:lnRef>
+          <a:fillRef idx="3">
+            <a:schemeClr val="accent1"/>
+          </a:fillRef>
+          <a:effectRef idx="2">
+            <a:schemeClr val="accent1"/>
+          </a:effectRef>
+          <a:fontRef idx="minor">
+            <a:schemeClr val="lt1"/>
+          </a:fontRef>
+        </p:style>
+        <p:txBody>
+          <a:bodyPr rtlCol="0" anchor="ctr"/>
+          <a:lstStyle/>
+          <a:p>
+            <a:pPr algn="ctr"/>
+          </a:p>
+        </p:txBody>
+      </p:sp>
+      <p:sp>
+        <p:nvSpPr>
+          <p:cNvPr id="3" name="TextBox 2"/>
+          <p:cNvSpPr txBox="1"/>
+          <p:nvPr/>
+        </p:nvSpPr>
+        <p:spPr>
+          <a:xfrm>
+            <a:off x="457200" y="137160"/>
+            <a:ext cx="11247120" cy="548640"/>
+          </a:xfrm>
+          <a:prstGeom prst="rect">
+            <a:avLst/>
+          </a:prstGeom>
+          <a:noFill/>
+        </p:spPr>
+        <p:txBody>
+          <a:bodyPr wrap="square">
+            <a:spAutoFit/>
+          </a:bodyPr>
+          <a:lstStyle/>
+          <a:p>
+            <a:pPr>
+              <a:defRPr sz="3000" b="1">
+                <a:solidFill>
+                  <a:srgbClr val="FFFFFF"/>
+                </a:solidFill>
+                <a:latin typeface="Georgia"/>
+              </a:defRPr>
+            </a:pPr>
             <a:r>
               <a:t>Challenge 3: When It Breaks at 3 AM</a:t>
             </a:r>
@@ -3886,96 +8229,880 @@
       </p:sp>
       <p:sp>
         <p:nvSpPr>
-          <p:cNvPr id="3" name="Content Placeholder 2"/>
-          <p:cNvSpPr>
-            <a:spLocks noGrp="1"/>
-          </p:cNvSpPr>
-          <p:nvPr>
-            <p:ph idx="1"/>
-          </p:nvPr>
-        </p:nvSpPr>
-        <p:spPr/>
-        <p:txBody>
-          <a:bodyPr/>
-          <a:lstStyle/>
-          <a:p>
-            <a:pPr>
-              <a:defRPr sz="1800"/>
-            </a:pPr>
-            <a:r>
-              <a:t>Medallion architecture with three layers:</a:t>
-            </a:r>
-          </a:p>
-          <a:p>
-            <a:pPr lvl="1">
-              <a:defRPr sz="1600"/>
-            </a:pPr>
-            <a:r>
-              <a:t>Bronze (S3): raw files as landed, immutable, the replayable source of truth</a:t>
-            </a:r>
-          </a:p>
-          <a:p>
-            <a:pPr lvl="1">
-              <a:defRPr sz="1600"/>
-            </a:pPr>
-            <a:r>
-              <a:t>Silver (S3/Snowflake): cleaned, typed, deduplicated, integrated across sources</a:t>
-            </a:r>
-          </a:p>
-          <a:p>
-            <a:pPr lvl="1">
-              <a:defRPr sz="1600"/>
-            </a:pPr>
-            <a:r>
-              <a:t>Gold (Snowflake): business-ready tables for the claims dashboard</a:t>
-            </a:r>
-          </a:p>
-          <a:p>
-            <a:pPr>
-              <a:defRPr sz="1800"/>
-            </a:pPr>
-            <a:r>
-              <a:t>Recovery scenario: corrupted partner files discovered 2 days late</a:t>
-            </a:r>
-          </a:p>
-          <a:p>
-            <a:pPr lvl="1">
-              <a:defRPr sz="1600"/>
-            </a:pPr>
-            <a:r>
-              <a:t>With layers: quarantine bad files, replay Bronze to Silver for affected dates only</a:t>
-            </a:r>
-          </a:p>
-          <a:p>
-            <a:pPr lvl="1">
-              <a:defRPr sz="1600"/>
-            </a:pPr>
-            <a:r>
-              <a:t>Without layers: rebuild everything from scratch (days of reprocessing)</a:t>
-            </a:r>
-          </a:p>
-          <a:p>
-            <a:pPr>
-              <a:defRPr sz="1800"/>
-            </a:pPr>
-            <a:r>
-              <a:t>Schema change absorption: Silver layer handles mapping; Bronze and Gold unaffected</a:t>
-            </a:r>
-          </a:p>
-          <a:p>
-            <a:pPr>
-              <a:defRPr sz="1800"/>
-            </a:pPr>
-            <a:r>
-              <a:t>Idempotency: Snowflake's COPY INTO tracks loaded files automatically</a:t>
-            </a:r>
-          </a:p>
-          <a:p>
-            <a:pPr lvl="1">
-              <a:defRPr sz="1600"/>
-            </a:pPr>
-            <a:r>
-              <a:t>Re-running the pipeline skips already-loaded files (no duplicates)</a:t>
+          <p:cNvPr id="4" name="TextBox 3"/>
+          <p:cNvSpPr txBox="1"/>
+          <p:nvPr/>
+        </p:nvSpPr>
+        <p:spPr>
+          <a:xfrm>
+            <a:off x="457200" y="640080"/>
+            <a:ext cx="11247120" cy="320040"/>
+          </a:xfrm>
+          <a:prstGeom prst="rect">
+            <a:avLst/>
+          </a:prstGeom>
+          <a:noFill/>
+        </p:spPr>
+        <p:txBody>
+          <a:bodyPr wrap="square">
+            <a:spAutoFit/>
+          </a:bodyPr>
+          <a:lstStyle/>
+          <a:p>
+            <a:pPr>
+              <a:defRPr sz="1400" b="0">
+                <a:solidFill>
+                  <a:srgbClr val="FE97C0"/>
+                </a:solidFill>
+                <a:latin typeface="Arial"/>
+              </a:defRPr>
+            </a:pPr>
+            <a:r>
+              <a:t>Medallion Layers and Recovery</a:t>
+            </a:r>
+          </a:p>
+        </p:txBody>
+      </p:sp>
+      <p:sp>
+        <p:nvSpPr>
+          <p:cNvPr id="5" name="Rectangle 4"/>
+          <p:cNvSpPr/>
+          <p:nvPr/>
+        </p:nvSpPr>
+        <p:spPr>
+          <a:xfrm>
+            <a:off x="0" y="6784848"/>
+            <a:ext cx="12192000" cy="73152"/>
+          </a:xfrm>
+          <a:prstGeom prst="rect">
+            <a:avLst/>
+          </a:prstGeom>
+          <a:solidFill>
+            <a:srgbClr val="1C2E5E"/>
+          </a:solidFill>
+          <a:ln>
+            <a:noFill/>
+          </a:ln>
+        </p:spPr>
+        <p:style>
+          <a:lnRef idx="1">
+            <a:schemeClr val="accent1"/>
+          </a:lnRef>
+          <a:fillRef idx="3">
+            <a:schemeClr val="accent1"/>
+          </a:fillRef>
+          <a:effectRef idx="2">
+            <a:schemeClr val="accent1"/>
+          </a:effectRef>
+          <a:fontRef idx="minor">
+            <a:schemeClr val="lt1"/>
+          </a:fontRef>
+        </p:style>
+        <p:txBody>
+          <a:bodyPr rtlCol="0" anchor="ctr"/>
+          <a:lstStyle/>
+          <a:p>
+            <a:pPr algn="ctr"/>
+          </a:p>
+        </p:txBody>
+      </p:sp>
+      <p:sp>
+        <p:nvSpPr>
+          <p:cNvPr id="6" name="Rounded Rectangle 5"/>
+          <p:cNvSpPr/>
+          <p:nvPr/>
+        </p:nvSpPr>
+        <p:spPr>
+          <a:xfrm>
+            <a:off x="365760" y="1371600"/>
+            <a:ext cx="5615787" cy="5100000"/>
+          </a:xfrm>
+          <a:prstGeom prst="roundRect">
+            <a:avLst/>
+          </a:prstGeom>
+          <a:solidFill>
+            <a:srgbClr val="FAFAFA"/>
+          </a:solidFill>
+          <a:ln>
+            <a:solidFill>
+              <a:srgbClr val="DDDDDD"/>
+            </a:solidFill>
+          </a:ln>
+        </p:spPr>
+        <p:style>
+          <a:lnRef idx="1">
+            <a:schemeClr val="accent1"/>
+          </a:lnRef>
+          <a:fillRef idx="3">
+            <a:schemeClr val="accent1"/>
+          </a:fillRef>
+          <a:effectRef idx="2">
+            <a:schemeClr val="accent1"/>
+          </a:effectRef>
+          <a:fontRef idx="minor">
+            <a:schemeClr val="lt1"/>
+          </a:fontRef>
+        </p:style>
+        <p:txBody>
+          <a:bodyPr rtlCol="0" anchor="ctr"/>
+          <a:lstStyle/>
+          <a:p>
+            <a:pPr algn="ctr"/>
+          </a:p>
+        </p:txBody>
+      </p:sp>
+      <p:sp>
+        <p:nvSpPr>
+          <p:cNvPr id="7" name="Rectangle 6"/>
+          <p:cNvSpPr/>
+          <p:nvPr/>
+        </p:nvSpPr>
+        <p:spPr>
+          <a:xfrm>
+            <a:off x="502920" y="1508760"/>
+            <a:ext cx="2400000" cy="320040"/>
+          </a:xfrm>
+          <a:prstGeom prst="rect">
+            <a:avLst/>
+          </a:prstGeom>
+          <a:solidFill>
+            <a:srgbClr val="1C2E5E"/>
+          </a:solidFill>
+          <a:ln>
+            <a:noFill/>
+          </a:ln>
+        </p:spPr>
+        <p:style>
+          <a:lnRef idx="1">
+            <a:schemeClr val="accent1"/>
+          </a:lnRef>
+          <a:fillRef idx="3">
+            <a:schemeClr val="accent1"/>
+          </a:fillRef>
+          <a:effectRef idx="2">
+            <a:schemeClr val="accent1"/>
+          </a:effectRef>
+          <a:fontRef idx="minor">
+            <a:schemeClr val="lt1"/>
+          </a:fontRef>
+        </p:style>
+        <p:txBody>
+          <a:bodyPr rtlCol="0" anchor="ctr"/>
+          <a:lstStyle/>
+          <a:p>
+            <a:pPr algn="ctr"/>
+          </a:p>
+        </p:txBody>
+      </p:sp>
+      <p:sp>
+        <p:nvSpPr>
+          <p:cNvPr id="8" name="TextBox 7"/>
+          <p:cNvSpPr txBox="1"/>
+          <p:nvPr/>
+        </p:nvSpPr>
+        <p:spPr>
+          <a:xfrm>
+            <a:off x="548640" y="1508760"/>
+            <a:ext cx="2400000" cy="320040"/>
+          </a:xfrm>
+          <a:prstGeom prst="rect">
+            <a:avLst/>
+          </a:prstGeom>
+          <a:noFill/>
+        </p:spPr>
+        <p:txBody>
+          <a:bodyPr wrap="none" anchor="ctr">
+            <a:spAutoFit/>
+          </a:bodyPr>
+          <a:lstStyle/>
+          <a:p>
+            <a:pPr>
+              <a:defRPr sz="1100" b="1">
+                <a:solidFill>
+                  <a:srgbClr val="FFFFFF"/>
+                </a:solidFill>
+                <a:latin typeface="Arial"/>
+              </a:defRPr>
+            </a:pPr>
+            <a:r>
+              <a:t>MEDALLION ARCHITECTURE</a:t>
+            </a:r>
+          </a:p>
+        </p:txBody>
+      </p:sp>
+      <p:sp>
+        <p:nvSpPr>
+          <p:cNvPr id="9" name="TextBox 8"/>
+          <p:cNvSpPr txBox="1"/>
+          <p:nvPr/>
+        </p:nvSpPr>
+        <p:spPr>
+          <a:xfrm>
+            <a:off x="594360" y="1920240"/>
+            <a:ext cx="5158587" cy="4400000"/>
+          </a:xfrm>
+          <a:prstGeom prst="rect">
+            <a:avLst/>
+          </a:prstGeom>
+          <a:noFill/>
+        </p:spPr>
+        <p:txBody>
+          <a:bodyPr wrap="square">
+            <a:spAutoFit/>
+          </a:bodyPr>
+          <a:lstStyle/>
+          <a:p>
+            <a:pPr>
+              <a:spcAft>
+                <a:spcPts val="400"/>
+              </a:spcAft>
+              <a:defRPr sz="1100">
+                <a:solidFill>
+                  <a:srgbClr val="272727"/>
+                </a:solidFill>
+                <a:latin typeface="Arial"/>
+              </a:defRPr>
+            </a:pPr>
+            <a:r>
+              <a:t>Bronze (S3):</a:t>
+            </a:r>
+          </a:p>
+          <a:p>
+            <a:pPr>
+              <a:spcAft>
+                <a:spcPts val="400"/>
+              </a:spcAft>
+              <a:defRPr sz="1100">
+                <a:solidFill>
+                  <a:srgbClr val="272727"/>
+                </a:solidFill>
+                <a:latin typeface="Arial"/>
+              </a:defRPr>
+            </a:pPr>
+            <a:r>
+              <a:t>  Raw files as landed, immutable</a:t>
+            </a:r>
+          </a:p>
+          <a:p>
+            <a:pPr>
+              <a:spcAft>
+                <a:spcPts val="400"/>
+              </a:spcAft>
+              <a:defRPr sz="1100">
+                <a:solidFill>
+                  <a:srgbClr val="272727"/>
+                </a:solidFill>
+                <a:latin typeface="Arial"/>
+              </a:defRPr>
+            </a:pPr>
+            <a:r>
+              <a:t>  The replayable source of truth</a:t>
+            </a:r>
+          </a:p>
+          <a:p>
+            <a:pPr>
+              <a:spcAft>
+                <a:spcPts val="400"/>
+              </a:spcAft>
+              <a:defRPr sz="1100">
+                <a:solidFill>
+                  <a:srgbClr val="272727"/>
+                </a:solidFill>
+                <a:latin typeface="Arial"/>
+              </a:defRPr>
+            </a:pPr>
+          </a:p>
+          <a:p>
+            <a:pPr>
+              <a:spcAft>
+                <a:spcPts val="400"/>
+              </a:spcAft>
+              <a:defRPr sz="1100">
+                <a:solidFill>
+                  <a:srgbClr val="272727"/>
+                </a:solidFill>
+                <a:latin typeface="Arial"/>
+              </a:defRPr>
+            </a:pPr>
+            <a:r>
+              <a:t>Silver (S3, Parquet):</a:t>
+            </a:r>
+          </a:p>
+          <a:p>
+            <a:pPr>
+              <a:spcAft>
+                <a:spcPts val="400"/>
+              </a:spcAft>
+              <a:defRPr sz="1100">
+                <a:solidFill>
+                  <a:srgbClr val="272727"/>
+                </a:solidFill>
+                <a:latin typeface="Arial"/>
+              </a:defRPr>
+            </a:pPr>
+            <a:r>
+              <a:t>  Cleaned, typed, deduplicated</a:t>
+            </a:r>
+          </a:p>
+          <a:p>
+            <a:pPr>
+              <a:spcAft>
+                <a:spcPts val="400"/>
+              </a:spcAft>
+              <a:defRPr sz="1100">
+                <a:solidFill>
+                  <a:srgbClr val="272727"/>
+                </a:solidFill>
+                <a:latin typeface="Arial"/>
+              </a:defRPr>
+            </a:pPr>
+            <a:r>
+              <a:t>  Standardized across all three sources</a:t>
+            </a:r>
+          </a:p>
+          <a:p>
+            <a:pPr>
+              <a:spcAft>
+                <a:spcPts val="400"/>
+              </a:spcAft>
+              <a:defRPr sz="1100">
+                <a:solidFill>
+                  <a:srgbClr val="272727"/>
+                </a:solidFill>
+                <a:latin typeface="Arial"/>
+              </a:defRPr>
+            </a:pPr>
+            <a:r>
+              <a:t>  Absorbs schema changes from sources</a:t>
+            </a:r>
+          </a:p>
+          <a:p>
+            <a:pPr>
+              <a:spcAft>
+                <a:spcPts val="400"/>
+              </a:spcAft>
+              <a:defRPr sz="1100">
+                <a:solidFill>
+                  <a:srgbClr val="272727"/>
+                </a:solidFill>
+                <a:latin typeface="Arial"/>
+              </a:defRPr>
+            </a:pPr>
+          </a:p>
+          <a:p>
+            <a:pPr>
+              <a:spcAft>
+                <a:spcPts val="400"/>
+              </a:spcAft>
+              <a:defRPr sz="1100">
+                <a:solidFill>
+                  <a:srgbClr val="272727"/>
+                </a:solidFill>
+                <a:latin typeface="Arial"/>
+              </a:defRPr>
+            </a:pPr>
+            <a:r>
+              <a:t>Gold (Snowflake):</a:t>
+            </a:r>
+          </a:p>
+          <a:p>
+            <a:pPr>
+              <a:spcAft>
+                <a:spcPts val="400"/>
+              </a:spcAft>
+              <a:defRPr sz="1100">
+                <a:solidFill>
+                  <a:srgbClr val="272727"/>
+                </a:solidFill>
+                <a:latin typeface="Arial"/>
+              </a:defRPr>
+            </a:pPr>
+            <a:r>
+              <a:t>  Business-ready integrated tables</a:t>
+            </a:r>
+          </a:p>
+          <a:p>
+            <a:pPr>
+              <a:spcAft>
+                <a:spcPts val="400"/>
+              </a:spcAft>
+              <a:defRPr sz="1100">
+                <a:solidFill>
+                  <a:srgbClr val="272727"/>
+                </a:solidFill>
+                <a:latin typeface="Arial"/>
+              </a:defRPr>
+            </a:pPr>
+            <a:r>
+              <a:t>  Serves the claims dashboard directly</a:t>
+            </a:r>
+          </a:p>
+          <a:p>
+            <a:pPr>
+              <a:spcAft>
+                <a:spcPts val="400"/>
+              </a:spcAft>
+              <a:defRPr sz="1100">
+                <a:solidFill>
+                  <a:srgbClr val="272727"/>
+                </a:solidFill>
+                <a:latin typeface="Arial"/>
+              </a:defRPr>
+            </a:pPr>
+          </a:p>
+          <a:p>
+            <a:pPr>
+              <a:spcAft>
+                <a:spcPts val="400"/>
+              </a:spcAft>
+              <a:defRPr sz="1100">
+                <a:solidFill>
+                  <a:srgbClr val="272727"/>
+                </a:solidFill>
+                <a:latin typeface="Arial"/>
+              </a:defRPr>
+            </a:pPr>
+            <a:r>
+              <a:t>Schema change: Silver mapping updates;</a:t>
+            </a:r>
+          </a:p>
+          <a:p>
+            <a:pPr>
+              <a:spcAft>
+                <a:spcPts val="400"/>
+              </a:spcAft>
+              <a:defRPr sz="1100">
+                <a:solidFill>
+                  <a:srgbClr val="272727"/>
+                </a:solidFill>
+                <a:latin typeface="Arial"/>
+              </a:defRPr>
+            </a:pPr>
+            <a:r>
+              <a:t>  Bronze and Gold unaffected</a:t>
+            </a:r>
+          </a:p>
+        </p:txBody>
+      </p:sp>
+      <p:sp>
+        <p:nvSpPr>
+          <p:cNvPr id="10" name="Rounded Rectangle 9"/>
+          <p:cNvSpPr/>
+          <p:nvPr/>
+        </p:nvSpPr>
+        <p:spPr>
+          <a:xfrm>
+            <a:off x="6210147" y="1371600"/>
+            <a:ext cx="5615787" cy="5100000"/>
+          </a:xfrm>
+          <a:prstGeom prst="roundRect">
+            <a:avLst/>
+          </a:prstGeom>
+          <a:solidFill>
+            <a:srgbClr val="FAFAFA"/>
+          </a:solidFill>
+          <a:ln>
+            <a:solidFill>
+              <a:srgbClr val="DDDDDD"/>
+            </a:solidFill>
+          </a:ln>
+        </p:spPr>
+        <p:style>
+          <a:lnRef idx="1">
+            <a:schemeClr val="accent1"/>
+          </a:lnRef>
+          <a:fillRef idx="3">
+            <a:schemeClr val="accent1"/>
+          </a:fillRef>
+          <a:effectRef idx="2">
+            <a:schemeClr val="accent1"/>
+          </a:effectRef>
+          <a:fontRef idx="minor">
+            <a:schemeClr val="lt1"/>
+          </a:fontRef>
+        </p:style>
+        <p:txBody>
+          <a:bodyPr rtlCol="0" anchor="ctr"/>
+          <a:lstStyle/>
+          <a:p>
+            <a:pPr algn="ctr"/>
+          </a:p>
+        </p:txBody>
+      </p:sp>
+      <p:sp>
+        <p:nvSpPr>
+          <p:cNvPr id="11" name="Rectangle 10"/>
+          <p:cNvSpPr/>
+          <p:nvPr/>
+        </p:nvSpPr>
+        <p:spPr>
+          <a:xfrm>
+            <a:off x="6347307" y="1508760"/>
+            <a:ext cx="2800000" cy="320040"/>
+          </a:xfrm>
+          <a:prstGeom prst="rect">
+            <a:avLst/>
+          </a:prstGeom>
+          <a:solidFill>
+            <a:srgbClr val="1C2E5E"/>
+          </a:solidFill>
+          <a:ln>
+            <a:noFill/>
+          </a:ln>
+        </p:spPr>
+        <p:style>
+          <a:lnRef idx="1">
+            <a:schemeClr val="accent1"/>
+          </a:lnRef>
+          <a:fillRef idx="3">
+            <a:schemeClr val="accent1"/>
+          </a:fillRef>
+          <a:effectRef idx="2">
+            <a:schemeClr val="accent1"/>
+          </a:effectRef>
+          <a:fontRef idx="minor">
+            <a:schemeClr val="lt1"/>
+          </a:fontRef>
+        </p:style>
+        <p:txBody>
+          <a:bodyPr rtlCol="0" anchor="ctr"/>
+          <a:lstStyle/>
+          <a:p>
+            <a:pPr algn="ctr"/>
+          </a:p>
+        </p:txBody>
+      </p:sp>
+      <p:sp>
+        <p:nvSpPr>
+          <p:cNvPr id="12" name="TextBox 11"/>
+          <p:cNvSpPr txBox="1"/>
+          <p:nvPr/>
+        </p:nvSpPr>
+        <p:spPr>
+          <a:xfrm>
+            <a:off x="6393027" y="1508760"/>
+            <a:ext cx="2800000" cy="320040"/>
+          </a:xfrm>
+          <a:prstGeom prst="rect">
+            <a:avLst/>
+          </a:prstGeom>
+          <a:noFill/>
+        </p:spPr>
+        <p:txBody>
+          <a:bodyPr wrap="none" anchor="ctr">
+            <a:spAutoFit/>
+          </a:bodyPr>
+          <a:lstStyle/>
+          <a:p>
+            <a:pPr>
+              <a:defRPr sz="1100" b="1">
+                <a:solidFill>
+                  <a:srgbClr val="FFFFFF"/>
+                </a:solidFill>
+                <a:latin typeface="Arial"/>
+              </a:defRPr>
+            </a:pPr>
+            <a:r>
+              <a:t>RECOVERY + IDEMPOTENCY</a:t>
+            </a:r>
+          </a:p>
+        </p:txBody>
+      </p:sp>
+      <p:sp>
+        <p:nvSpPr>
+          <p:cNvPr id="13" name="TextBox 12"/>
+          <p:cNvSpPr txBox="1"/>
+          <p:nvPr/>
+        </p:nvSpPr>
+        <p:spPr>
+          <a:xfrm>
+            <a:off x="6438747" y="1920240"/>
+            <a:ext cx="5158587" cy="4400000"/>
+          </a:xfrm>
+          <a:prstGeom prst="rect">
+            <a:avLst/>
+          </a:prstGeom>
+          <a:noFill/>
+        </p:spPr>
+        <p:txBody>
+          <a:bodyPr wrap="square">
+            <a:spAutoFit/>
+          </a:bodyPr>
+          <a:lstStyle/>
+          <a:p>
+            <a:pPr>
+              <a:spcAft>
+                <a:spcPts val="400"/>
+              </a:spcAft>
+              <a:defRPr sz="1100">
+                <a:solidFill>
+                  <a:srgbClr val="272727"/>
+                </a:solidFill>
+                <a:latin typeface="Arial"/>
+              </a:defRPr>
+            </a:pPr>
+            <a:r>
+              <a:t>Corrupted partner files (Tue, found Thu):</a:t>
+            </a:r>
+          </a:p>
+          <a:p>
+            <a:pPr>
+              <a:spcAft>
+                <a:spcPts val="400"/>
+              </a:spcAft>
+              <a:defRPr sz="1100">
+                <a:solidFill>
+                  <a:srgbClr val="272727"/>
+                </a:solidFill>
+                <a:latin typeface="Arial"/>
+              </a:defRPr>
+            </a:pPr>
+          </a:p>
+          <a:p>
+            <a:pPr>
+              <a:spcAft>
+                <a:spcPts val="400"/>
+              </a:spcAft>
+              <a:defRPr sz="1100">
+                <a:solidFill>
+                  <a:srgbClr val="272727"/>
+                </a:solidFill>
+                <a:latin typeface="Arial"/>
+              </a:defRPr>
+            </a:pPr>
+            <a:r>
+              <a:t>  WITH layers:</a:t>
+            </a:r>
+          </a:p>
+          <a:p>
+            <a:pPr>
+              <a:spcAft>
+                <a:spcPts val="400"/>
+              </a:spcAft>
+              <a:defRPr sz="1100">
+                <a:solidFill>
+                  <a:srgbClr val="272727"/>
+                </a:solidFill>
+                <a:latin typeface="Arial"/>
+              </a:defRPr>
+            </a:pPr>
+            <a:r>
+              <a:t>    Quarantine bad files</a:t>
+            </a:r>
+          </a:p>
+          <a:p>
+            <a:pPr>
+              <a:spcAft>
+                <a:spcPts val="400"/>
+              </a:spcAft>
+              <a:defRPr sz="1100">
+                <a:solidFill>
+                  <a:srgbClr val="272727"/>
+                </a:solidFill>
+                <a:latin typeface="Arial"/>
+              </a:defRPr>
+            </a:pPr>
+            <a:r>
+              <a:t>    Replay Bronze -&gt; Silver for those dates only</a:t>
+            </a:r>
+          </a:p>
+          <a:p>
+            <a:pPr>
+              <a:spcAft>
+                <a:spcPts val="400"/>
+              </a:spcAft>
+              <a:defRPr sz="1100">
+                <a:solidFill>
+                  <a:srgbClr val="272727"/>
+                </a:solidFill>
+                <a:latin typeface="Arial"/>
+              </a:defRPr>
+            </a:pPr>
+            <a:r>
+              <a:t>    Reload affected Gold tables</a:t>
+            </a:r>
+          </a:p>
+          <a:p>
+            <a:pPr>
+              <a:spcAft>
+                <a:spcPts val="400"/>
+              </a:spcAft>
+              <a:defRPr sz="1100">
+                <a:solidFill>
+                  <a:srgbClr val="272727"/>
+                </a:solidFill>
+                <a:latin typeface="Arial"/>
+              </a:defRPr>
+            </a:pPr>
+          </a:p>
+          <a:p>
+            <a:pPr>
+              <a:spcAft>
+                <a:spcPts val="400"/>
+              </a:spcAft>
+              <a:defRPr sz="1100">
+                <a:solidFill>
+                  <a:srgbClr val="272727"/>
+                </a:solidFill>
+                <a:latin typeface="Arial"/>
+              </a:defRPr>
+            </a:pPr>
+            <a:r>
+              <a:t>  WITHOUT layers:</a:t>
+            </a:r>
+          </a:p>
+          <a:p>
+            <a:pPr>
+              <a:spcAft>
+                <a:spcPts val="400"/>
+              </a:spcAft>
+              <a:defRPr sz="1100">
+                <a:solidFill>
+                  <a:srgbClr val="272727"/>
+                </a:solidFill>
+                <a:latin typeface="Arial"/>
+              </a:defRPr>
+            </a:pPr>
+            <a:r>
+              <a:t>    Rebuild everything from original source</a:t>
+            </a:r>
+          </a:p>
+          <a:p>
+            <a:pPr>
+              <a:spcAft>
+                <a:spcPts val="400"/>
+              </a:spcAft>
+              <a:defRPr sz="1100">
+                <a:solidFill>
+                  <a:srgbClr val="272727"/>
+                </a:solidFill>
+                <a:latin typeface="Arial"/>
+              </a:defRPr>
+            </a:pPr>
+            <a:r>
+              <a:t>    Days of reprocessing, no isolation</a:t>
+            </a:r>
+          </a:p>
+          <a:p>
+            <a:pPr>
+              <a:spcAft>
+                <a:spcPts val="400"/>
+              </a:spcAft>
+              <a:defRPr sz="1100">
+                <a:solidFill>
+                  <a:srgbClr val="272727"/>
+                </a:solidFill>
+                <a:latin typeface="Arial"/>
+              </a:defRPr>
+            </a:pPr>
+          </a:p>
+          <a:p>
+            <a:pPr>
+              <a:spcAft>
+                <a:spcPts val="400"/>
+              </a:spcAft>
+              <a:defRPr sz="1100">
+                <a:solidFill>
+                  <a:srgbClr val="272727"/>
+                </a:solidFill>
+                <a:latin typeface="Arial"/>
+              </a:defRPr>
+            </a:pPr>
+            <a:r>
+              <a:t>Idempotency (run again = no damage):</a:t>
+            </a:r>
+          </a:p>
+          <a:p>
+            <a:pPr>
+              <a:spcAft>
+                <a:spcPts val="400"/>
+              </a:spcAft>
+              <a:defRPr sz="1100">
+                <a:solidFill>
+                  <a:srgbClr val="272727"/>
+                </a:solidFill>
+                <a:latin typeface="Arial"/>
+              </a:defRPr>
+            </a:pPr>
+            <a:r>
+              <a:t>  Snowflake COPY INTO tracks loaded files</a:t>
+            </a:r>
+          </a:p>
+          <a:p>
+            <a:pPr>
+              <a:spcAft>
+                <a:spcPts val="400"/>
+              </a:spcAft>
+              <a:defRPr sz="1100">
+                <a:solidFill>
+                  <a:srgbClr val="272727"/>
+                </a:solidFill>
+                <a:latin typeface="Arial"/>
+              </a:defRPr>
+            </a:pPr>
+            <a:r>
+              <a:t>  Re-running skips already-loaded files</a:t>
+            </a:r>
+          </a:p>
+          <a:p>
+            <a:pPr>
+              <a:spcAft>
+                <a:spcPts val="400"/>
+              </a:spcAft>
+              <a:defRPr sz="1100">
+                <a:solidFill>
+                  <a:srgbClr val="272727"/>
+                </a:solidFill>
+                <a:latin typeface="Arial"/>
+              </a:defRPr>
+            </a:pPr>
+            <a:r>
+              <a:t>  No duplicates, no manual ledger needed</a:t>
+            </a:r>
+          </a:p>
+          <a:p>
+            <a:pPr>
+              <a:spcAft>
+                <a:spcPts val="400"/>
+              </a:spcAft>
+              <a:defRPr sz="1100">
+                <a:solidFill>
+                  <a:srgbClr val="272727"/>
+                </a:solidFill>
+                <a:latin typeface="Arial"/>
+              </a:defRPr>
+            </a:pPr>
+          </a:p>
+          <a:p>
+            <a:pPr>
+              <a:spcAft>
+                <a:spcPts val="400"/>
+              </a:spcAft>
+              <a:defRPr sz="1100">
+                <a:solidFill>
+                  <a:srgbClr val="272727"/>
+                </a:solidFill>
+                <a:latin typeface="Arial"/>
+              </a:defRPr>
+            </a:pPr>
+            <a:r>
+              <a:t>Data contract gate between Bronze and Silver</a:t>
+            </a:r>
+          </a:p>
+          <a:p>
+            <a:pPr>
+              <a:spcAft>
+                <a:spcPts val="400"/>
+              </a:spcAft>
+              <a:defRPr sz="1100">
+                <a:solidFill>
+                  <a:srgbClr val="272727"/>
+                </a:solidFill>
+                <a:latin typeface="Arial"/>
+              </a:defRPr>
+            </a:pPr>
+            <a:r>
+              <a:t>  catches bad data before it reaches Gold</a:t>
             </a:r>
           </a:p>
         </p:txBody>
@@ -4000,19 +9127,77 @@
       <p:grpSpPr/>
       <p:sp>
         <p:nvSpPr>
-          <p:cNvPr id="2" name="Title 1"/>
-          <p:cNvSpPr>
-            <a:spLocks noGrp="1"/>
-          </p:cNvSpPr>
-          <p:nvPr>
-            <p:ph type="title"/>
-          </p:nvPr>
-        </p:nvSpPr>
-        <p:spPr/>
-        <p:txBody>
-          <a:bodyPr/>
-          <a:lstStyle/>
-          <a:p>
+          <p:cNvPr id="2" name="Rectangle 1"/>
+          <p:cNvSpPr/>
+          <p:nvPr/>
+        </p:nvSpPr>
+        <p:spPr>
+          <a:xfrm>
+            <a:off x="0" y="0"/>
+            <a:ext cx="12192000" cy="1143000"/>
+          </a:xfrm>
+          <a:prstGeom prst="rect">
+            <a:avLst/>
+          </a:prstGeom>
+          <a:solidFill>
+            <a:srgbClr val="1C2E5E"/>
+          </a:solidFill>
+          <a:ln>
+            <a:noFill/>
+          </a:ln>
+        </p:spPr>
+        <p:style>
+          <a:lnRef idx="1">
+            <a:schemeClr val="accent1"/>
+          </a:lnRef>
+          <a:fillRef idx="3">
+            <a:schemeClr val="accent1"/>
+          </a:fillRef>
+          <a:effectRef idx="2">
+            <a:schemeClr val="accent1"/>
+          </a:effectRef>
+          <a:fontRef idx="minor">
+            <a:schemeClr val="lt1"/>
+          </a:fontRef>
+        </p:style>
+        <p:txBody>
+          <a:bodyPr rtlCol="0" anchor="ctr"/>
+          <a:lstStyle/>
+          <a:p>
+            <a:pPr algn="ctr"/>
+          </a:p>
+        </p:txBody>
+      </p:sp>
+      <p:sp>
+        <p:nvSpPr>
+          <p:cNvPr id="3" name="TextBox 2"/>
+          <p:cNvSpPr txBox="1"/>
+          <p:nvPr/>
+        </p:nvSpPr>
+        <p:spPr>
+          <a:xfrm>
+            <a:off x="457200" y="137160"/>
+            <a:ext cx="11247120" cy="548640"/>
+          </a:xfrm>
+          <a:prstGeom prst="rect">
+            <a:avLst/>
+          </a:prstGeom>
+          <a:noFill/>
+        </p:spPr>
+        <p:txBody>
+          <a:bodyPr wrap="square">
+            <a:spAutoFit/>
+          </a:bodyPr>
+          <a:lstStyle/>
+          <a:p>
+            <a:pPr>
+              <a:defRPr sz="3000" b="1">
+                <a:solidFill>
+                  <a:srgbClr val="FFFFFF"/>
+                </a:solidFill>
+                <a:latin typeface="Georgia"/>
+              </a:defRPr>
+            </a:pPr>
             <a:r>
               <a:t>Challenge 4: Where Do the Layers Live?</a:t>
             </a:r>
@@ -4021,88 +9206,724 @@
       </p:sp>
       <p:sp>
         <p:nvSpPr>
-          <p:cNvPr id="3" name="Content Placeholder 2"/>
-          <p:cNvSpPr>
-            <a:spLocks noGrp="1"/>
-          </p:cNvSpPr>
-          <p:nvPr>
-            <p:ph idx="1"/>
-          </p:nvPr>
-        </p:nvSpPr>
-        <p:spPr/>
-        <p:txBody>
-          <a:bodyPr/>
-          <a:lstStyle/>
-          <a:p>
-            <a:pPr>
-              <a:defRPr sz="1800"/>
+          <p:cNvPr id="4" name="TextBox 3"/>
+          <p:cNvSpPr txBox="1"/>
+          <p:nvPr/>
+        </p:nvSpPr>
+        <p:spPr>
+          <a:xfrm>
+            <a:off x="457200" y="640080"/>
+            <a:ext cx="11247120" cy="320040"/>
+          </a:xfrm>
+          <a:prstGeom prst="rect">
+            <a:avLst/>
+          </a:prstGeom>
+          <a:noFill/>
+        </p:spPr>
+        <p:txBody>
+          <a:bodyPr wrap="square">
+            <a:spAutoFit/>
+          </a:bodyPr>
+          <a:lstStyle/>
+          <a:p>
+            <a:pPr>
+              <a:defRPr sz="1400" b="0">
+                <a:solidFill>
+                  <a:srgbClr val="FE97C0"/>
+                </a:solidFill>
+                <a:latin typeface="Arial"/>
+              </a:defRPr>
+            </a:pPr>
+            <a:r>
+              <a:t>Storage Placement Decisions</a:t>
+            </a:r>
+          </a:p>
+        </p:txBody>
+      </p:sp>
+      <p:sp>
+        <p:nvSpPr>
+          <p:cNvPr id="5" name="Rectangle 4"/>
+          <p:cNvSpPr/>
+          <p:nvPr/>
+        </p:nvSpPr>
+        <p:spPr>
+          <a:xfrm>
+            <a:off x="0" y="6784848"/>
+            <a:ext cx="12192000" cy="73152"/>
+          </a:xfrm>
+          <a:prstGeom prst="rect">
+            <a:avLst/>
+          </a:prstGeom>
+          <a:solidFill>
+            <a:srgbClr val="1C2E5E"/>
+          </a:solidFill>
+          <a:ln>
+            <a:noFill/>
+          </a:ln>
+        </p:spPr>
+        <p:style>
+          <a:lnRef idx="1">
+            <a:schemeClr val="accent1"/>
+          </a:lnRef>
+          <a:fillRef idx="3">
+            <a:schemeClr val="accent1"/>
+          </a:fillRef>
+          <a:effectRef idx="2">
+            <a:schemeClr val="accent1"/>
+          </a:effectRef>
+          <a:fontRef idx="minor">
+            <a:schemeClr val="lt1"/>
+          </a:fontRef>
+        </p:style>
+        <p:txBody>
+          <a:bodyPr rtlCol="0" anchor="ctr"/>
+          <a:lstStyle/>
+          <a:p>
+            <a:pPr algn="ctr"/>
+          </a:p>
+        </p:txBody>
+      </p:sp>
+      <p:sp>
+        <p:nvSpPr>
+          <p:cNvPr id="6" name="Rounded Rectangle 5"/>
+          <p:cNvSpPr/>
+          <p:nvPr/>
+        </p:nvSpPr>
+        <p:spPr>
+          <a:xfrm>
+            <a:off x="365760" y="1371600"/>
+            <a:ext cx="11460174" cy="5100000"/>
+          </a:xfrm>
+          <a:prstGeom prst="roundRect">
+            <a:avLst/>
+          </a:prstGeom>
+          <a:solidFill>
+            <a:srgbClr val="FAFAFA"/>
+          </a:solidFill>
+          <a:ln>
+            <a:solidFill>
+              <a:srgbClr val="DDDDDD"/>
+            </a:solidFill>
+          </a:ln>
+        </p:spPr>
+        <p:style>
+          <a:lnRef idx="1">
+            <a:schemeClr val="accent1"/>
+          </a:lnRef>
+          <a:fillRef idx="3">
+            <a:schemeClr val="accent1"/>
+          </a:fillRef>
+          <a:effectRef idx="2">
+            <a:schemeClr val="accent1"/>
+          </a:effectRef>
+          <a:fontRef idx="minor">
+            <a:schemeClr val="lt1"/>
+          </a:fontRef>
+        </p:style>
+        <p:txBody>
+          <a:bodyPr rtlCol="0" anchor="ctr"/>
+          <a:lstStyle/>
+          <a:p>
+            <a:pPr algn="ctr"/>
+          </a:p>
+        </p:txBody>
+      </p:sp>
+      <p:sp>
+        <p:nvSpPr>
+          <p:cNvPr id="7" name="Rectangle 6"/>
+          <p:cNvSpPr/>
+          <p:nvPr/>
+        </p:nvSpPr>
+        <p:spPr>
+          <a:xfrm>
+            <a:off x="502920" y="1508760"/>
+            <a:ext cx="2400000" cy="320040"/>
+          </a:xfrm>
+          <a:prstGeom prst="rect">
+            <a:avLst/>
+          </a:prstGeom>
+          <a:solidFill>
+            <a:srgbClr val="1C2E5E"/>
+          </a:solidFill>
+          <a:ln>
+            <a:noFill/>
+          </a:ln>
+        </p:spPr>
+        <p:style>
+          <a:lnRef idx="1">
+            <a:schemeClr val="accent1"/>
+          </a:lnRef>
+          <a:fillRef idx="3">
+            <a:schemeClr val="accent1"/>
+          </a:fillRef>
+          <a:effectRef idx="2">
+            <a:schemeClr val="accent1"/>
+          </a:effectRef>
+          <a:fontRef idx="minor">
+            <a:schemeClr val="lt1"/>
+          </a:fontRef>
+        </p:style>
+        <p:txBody>
+          <a:bodyPr rtlCol="0" anchor="ctr"/>
+          <a:lstStyle/>
+          <a:p>
+            <a:pPr algn="ctr"/>
+          </a:p>
+        </p:txBody>
+      </p:sp>
+      <p:sp>
+        <p:nvSpPr>
+          <p:cNvPr id="8" name="TextBox 7"/>
+          <p:cNvSpPr txBox="1"/>
+          <p:nvPr/>
+        </p:nvSpPr>
+        <p:spPr>
+          <a:xfrm>
+            <a:off x="548640" y="1508760"/>
+            <a:ext cx="2400000" cy="320040"/>
+          </a:xfrm>
+          <a:prstGeom prst="rect">
+            <a:avLst/>
+          </a:prstGeom>
+          <a:noFill/>
+        </p:spPr>
+        <p:txBody>
+          <a:bodyPr wrap="none" anchor="ctr">
+            <a:spAutoFit/>
+          </a:bodyPr>
+          <a:lstStyle/>
+          <a:p>
+            <a:pPr>
+              <a:defRPr sz="1100" b="1">
+                <a:solidFill>
+                  <a:srgbClr val="FFFFFF"/>
+                </a:solidFill>
+                <a:latin typeface="Arial"/>
+              </a:defRPr>
+            </a:pPr>
+            <a:r>
+              <a:t>LAYER-BY-LAYER DECISION</a:t>
+            </a:r>
+          </a:p>
+        </p:txBody>
+      </p:sp>
+      <p:sp>
+        <p:nvSpPr>
+          <p:cNvPr id="9" name="TextBox 8"/>
+          <p:cNvSpPr txBox="1"/>
+          <p:nvPr/>
+        </p:nvSpPr>
+        <p:spPr>
+          <a:xfrm>
+            <a:off x="594360" y="1920240"/>
+            <a:ext cx="5158587" cy="4400000"/>
+          </a:xfrm>
+          <a:prstGeom prst="rect">
+            <a:avLst/>
+          </a:prstGeom>
+          <a:noFill/>
+        </p:spPr>
+        <p:txBody>
+          <a:bodyPr wrap="square">
+            <a:spAutoFit/>
+          </a:bodyPr>
+          <a:lstStyle/>
+          <a:p>
+            <a:pPr>
+              <a:spcAft>
+                <a:spcPts val="400"/>
+              </a:spcAft>
+              <a:defRPr sz="1100">
+                <a:solidFill>
+                  <a:srgbClr val="272727"/>
+                </a:solidFill>
+                <a:latin typeface="Arial"/>
+              </a:defRPr>
             </a:pPr>
             <a:r>
               <a:t>Bronze: S3 (object storage)</a:t>
             </a:r>
           </a:p>
           <a:p>
-            <a:pPr lvl="1">
-              <a:defRPr sz="1600"/>
-            </a:pPr>
-            <a:r>
-              <a:t>Hundreds of TB at ~$0.023/GB/month vs. Snowflake storage at ~$0.040/GB/month</a:t>
-            </a:r>
-          </a:p>
-          <a:p>
-            <a:pPr lvl="1">
-              <a:defRPr sz="1600"/>
-            </a:pPr>
-            <a:r>
-              <a:t>Immutable archive; no query engine needed on raw files</a:t>
-            </a:r>
-          </a:p>
-          <a:p>
-            <a:pPr>
-              <a:defRPr sz="1800"/>
-            </a:pPr>
-            <a:r>
-              <a:t>Silver: S3 (Parquet) with Snowflake external tables for query access</a:t>
-            </a:r>
-          </a:p>
-          <a:p>
-            <a:pPr lvl="1">
-              <a:defRPr sz="1600"/>
-            </a:pPr>
-            <a:r>
-              <a:t>Glue writes cleaned Parquet; Snowflake reads via stage for final integration</a:t>
-            </a:r>
-          </a:p>
-          <a:p>
-            <a:pPr>
-              <a:defRPr sz="1800"/>
-            </a:pPr>
-            <a:r>
-              <a:t>Gold: Snowflake permanent tables (clustered by date)</a:t>
-            </a:r>
-          </a:p>
-          <a:p>
-            <a:pPr lvl="1">
-              <a:defRPr sz="1600"/>
-            </a:pPr>
-            <a:r>
-              <a:t>Dashboard queries hit Snowflake directly for sub-second response</a:t>
-            </a:r>
-          </a:p>
-          <a:p>
-            <a:pPr lvl="1">
-              <a:defRPr sz="1600"/>
-            </a:pPr>
-            <a:r>
-              <a:t>Permanent tables for full Time Travel + Fail-safe recovery</a:t>
-            </a:r>
-          </a:p>
-          <a:p>
-            <a:pPr>
-              <a:defRPr sz="1800"/>
-            </a:pPr>
-            <a:r>
-              <a:t>Boundary: COPY INTO / external stage is the bridge from S3 into Snowflake</a:t>
+            <a:pPr>
+              <a:spcAft>
+                <a:spcPts val="400"/>
+              </a:spcAft>
+              <a:defRPr sz="1100">
+                <a:solidFill>
+                  <a:srgbClr val="272727"/>
+                </a:solidFill>
+                <a:latin typeface="Arial"/>
+              </a:defRPr>
+            </a:pPr>
+            <a:r>
+              <a:t>  ~$0.023/GB/month for hundreds of TB</a:t>
+            </a:r>
+          </a:p>
+          <a:p>
+            <a:pPr>
+              <a:spcAft>
+                <a:spcPts val="400"/>
+              </a:spcAft>
+              <a:defRPr sz="1100">
+                <a:solidFill>
+                  <a:srgbClr val="272727"/>
+                </a:solidFill>
+                <a:latin typeface="Arial"/>
+              </a:defRPr>
+            </a:pPr>
+            <a:r>
+              <a:t>  Immutable archive, no query engine needed</a:t>
+            </a:r>
+          </a:p>
+          <a:p>
+            <a:pPr>
+              <a:spcAft>
+                <a:spcPts val="400"/>
+              </a:spcAft>
+              <a:defRPr sz="1100">
+                <a:solidFill>
+                  <a:srgbClr val="272727"/>
+                </a:solidFill>
+                <a:latin typeface="Arial"/>
+              </a:defRPr>
+            </a:pPr>
+            <a:r>
+              <a:t>  Lifecycle policy: move to Glacier after 90 days</a:t>
+            </a:r>
+          </a:p>
+          <a:p>
+            <a:pPr>
+              <a:spcAft>
+                <a:spcPts val="400"/>
+              </a:spcAft>
+              <a:defRPr sz="1100">
+                <a:solidFill>
+                  <a:srgbClr val="272727"/>
+                </a:solidFill>
+                <a:latin typeface="Arial"/>
+              </a:defRPr>
+            </a:pPr>
+          </a:p>
+          <a:p>
+            <a:pPr>
+              <a:spcAft>
+                <a:spcPts val="400"/>
+              </a:spcAft>
+              <a:defRPr sz="1100">
+                <a:solidFill>
+                  <a:srgbClr val="272727"/>
+                </a:solidFill>
+                <a:latin typeface="Arial"/>
+              </a:defRPr>
+            </a:pPr>
+            <a:r>
+              <a:t>Silver: S3 (Snappy Parquet)</a:t>
+            </a:r>
+          </a:p>
+          <a:p>
+            <a:pPr>
+              <a:spcAft>
+                <a:spcPts val="400"/>
+              </a:spcAft>
+              <a:defRPr sz="1100">
+                <a:solidFill>
+                  <a:srgbClr val="272727"/>
+                </a:solidFill>
+                <a:latin typeface="Arial"/>
+              </a:defRPr>
+            </a:pPr>
+            <a:r>
+              <a:t>  Glue writes clean Parquet here</a:t>
+            </a:r>
+          </a:p>
+          <a:p>
+            <a:pPr>
+              <a:spcAft>
+                <a:spcPts val="400"/>
+              </a:spcAft>
+              <a:defRPr sz="1100">
+                <a:solidFill>
+                  <a:srgbClr val="272727"/>
+                </a:solidFill>
+                <a:latin typeface="Arial"/>
+              </a:defRPr>
+            </a:pPr>
+            <a:r>
+              <a:t>  Snowflake reads via external stage</a:t>
+            </a:r>
+          </a:p>
+          <a:p>
+            <a:pPr>
+              <a:spcAft>
+                <a:spcPts val="400"/>
+              </a:spcAft>
+              <a:defRPr sz="1100">
+                <a:solidFill>
+                  <a:srgbClr val="272727"/>
+                </a:solidFill>
+                <a:latin typeface="Arial"/>
+              </a:defRPr>
+            </a:pPr>
+            <a:r>
+              <a:t>  Cheaper bulk storage for intermediate data</a:t>
+            </a:r>
+          </a:p>
+          <a:p>
+            <a:pPr>
+              <a:spcAft>
+                <a:spcPts val="400"/>
+              </a:spcAft>
+              <a:defRPr sz="1100">
+                <a:solidFill>
+                  <a:srgbClr val="272727"/>
+                </a:solidFill>
+                <a:latin typeface="Arial"/>
+              </a:defRPr>
+            </a:pPr>
+          </a:p>
+          <a:p>
+            <a:pPr>
+              <a:spcAft>
+                <a:spcPts val="400"/>
+              </a:spcAft>
+              <a:defRPr sz="1100">
+                <a:solidFill>
+                  <a:srgbClr val="272727"/>
+                </a:solidFill>
+                <a:latin typeface="Arial"/>
+              </a:defRPr>
+            </a:pPr>
+            <a:r>
+              <a:t>Gold: Snowflake permanent tables</a:t>
+            </a:r>
+          </a:p>
+          <a:p>
+            <a:pPr>
+              <a:spcAft>
+                <a:spcPts val="400"/>
+              </a:spcAft>
+              <a:defRPr sz="1100">
+                <a:solidFill>
+                  <a:srgbClr val="272727"/>
+                </a:solidFill>
+                <a:latin typeface="Arial"/>
+              </a:defRPr>
+            </a:pPr>
+            <a:r>
+              <a:t>  Sub-second dashboard response</a:t>
+            </a:r>
+          </a:p>
+          <a:p>
+            <a:pPr>
+              <a:spcAft>
+                <a:spcPts val="400"/>
+              </a:spcAft>
+              <a:defRPr sz="1100">
+                <a:solidFill>
+                  <a:srgbClr val="272727"/>
+                </a:solidFill>
+                <a:latin typeface="Arial"/>
+              </a:defRPr>
+            </a:pPr>
+            <a:r>
+              <a:t>  Full Time Travel + Fail-safe recovery</a:t>
+            </a:r>
+          </a:p>
+          <a:p>
+            <a:pPr>
+              <a:spcAft>
+                <a:spcPts val="400"/>
+              </a:spcAft>
+              <a:defRPr sz="1100">
+                <a:solidFill>
+                  <a:srgbClr val="272727"/>
+                </a:solidFill>
+                <a:latin typeface="Arial"/>
+              </a:defRPr>
+            </a:pPr>
+            <a:r>
+              <a:t>  Clustered by claim_date for pruning</a:t>
+            </a:r>
+          </a:p>
+        </p:txBody>
+      </p:sp>
+      <p:sp>
+        <p:nvSpPr>
+          <p:cNvPr id="10" name="TextBox 9"/>
+          <p:cNvSpPr txBox="1"/>
+          <p:nvPr/>
+        </p:nvSpPr>
+        <p:spPr>
+          <a:xfrm>
+            <a:off x="6438747" y="1920240"/>
+            <a:ext cx="5158587" cy="4400000"/>
+          </a:xfrm>
+          <a:prstGeom prst="rect">
+            <a:avLst/>
+          </a:prstGeom>
+          <a:noFill/>
+        </p:spPr>
+        <p:txBody>
+          <a:bodyPr wrap="square">
+            <a:spAutoFit/>
+          </a:bodyPr>
+          <a:lstStyle/>
+          <a:p>
+            <a:pPr>
+              <a:spcAft>
+                <a:spcPts val="400"/>
+              </a:spcAft>
+              <a:defRPr sz="1100">
+                <a:solidFill>
+                  <a:srgbClr val="272727"/>
+                </a:solidFill>
+                <a:latin typeface="Arial"/>
+              </a:defRPr>
+            </a:pPr>
+            <a:r>
+              <a:t>Table types (from Week 4 Lesson 3):</a:t>
+            </a:r>
+          </a:p>
+          <a:p>
+            <a:pPr>
+              <a:spcAft>
+                <a:spcPts val="400"/>
+              </a:spcAft>
+              <a:defRPr sz="1100">
+                <a:solidFill>
+                  <a:srgbClr val="272727"/>
+                </a:solidFill>
+                <a:latin typeface="Arial"/>
+              </a:defRPr>
+            </a:pPr>
+          </a:p>
+          <a:p>
+            <a:pPr>
+              <a:spcAft>
+                <a:spcPts val="400"/>
+              </a:spcAft>
+              <a:defRPr sz="1100">
+                <a:solidFill>
+                  <a:srgbClr val="272727"/>
+                </a:solidFill>
+                <a:latin typeface="Arial"/>
+              </a:defRPr>
+            </a:pPr>
+            <a:r>
+              <a:t>  Bronze: N/A (S3 objects, not tables)</a:t>
+            </a:r>
+          </a:p>
+          <a:p>
+            <a:pPr>
+              <a:spcAft>
+                <a:spcPts val="400"/>
+              </a:spcAft>
+              <a:defRPr sz="1100">
+                <a:solidFill>
+                  <a:srgbClr val="272727"/>
+                </a:solidFill>
+                <a:latin typeface="Arial"/>
+              </a:defRPr>
+            </a:pPr>
+          </a:p>
+          <a:p>
+            <a:pPr>
+              <a:spcAft>
+                <a:spcPts val="400"/>
+              </a:spcAft>
+              <a:defRPr sz="1100">
+                <a:solidFill>
+                  <a:srgbClr val="272727"/>
+                </a:solidFill>
+                <a:latin typeface="Arial"/>
+              </a:defRPr>
+            </a:pPr>
+            <a:r>
+              <a:t>  Silver: Transient tables (if staged in SF)</a:t>
+            </a:r>
+          </a:p>
+          <a:p>
+            <a:pPr>
+              <a:spcAft>
+                <a:spcPts val="400"/>
+              </a:spcAft>
+              <a:defRPr sz="1100">
+                <a:solidFill>
+                  <a:srgbClr val="272727"/>
+                </a:solidFill>
+                <a:latin typeface="Arial"/>
+              </a:defRPr>
+            </a:pPr>
+            <a:r>
+              <a:t>    No Fail-safe cost, rebuildable from Bronze</a:t>
+            </a:r>
+          </a:p>
+          <a:p>
+            <a:pPr>
+              <a:spcAft>
+                <a:spcPts val="400"/>
+              </a:spcAft>
+              <a:defRPr sz="1100">
+                <a:solidFill>
+                  <a:srgbClr val="272727"/>
+                </a:solidFill>
+                <a:latin typeface="Arial"/>
+              </a:defRPr>
+            </a:pPr>
+          </a:p>
+          <a:p>
+            <a:pPr>
+              <a:spcAft>
+                <a:spcPts val="400"/>
+              </a:spcAft>
+              <a:defRPr sz="1100">
+                <a:solidFill>
+                  <a:srgbClr val="272727"/>
+                </a:solidFill>
+                <a:latin typeface="Arial"/>
+              </a:defRPr>
+            </a:pPr>
+            <a:r>
+              <a:t>  Gold: Permanent tables</a:t>
+            </a:r>
+          </a:p>
+          <a:p>
+            <a:pPr>
+              <a:spcAft>
+                <a:spcPts val="400"/>
+              </a:spcAft>
+              <a:defRPr sz="1100">
+                <a:solidFill>
+                  <a:srgbClr val="272727"/>
+                </a:solidFill>
+                <a:latin typeface="Arial"/>
+              </a:defRPr>
+            </a:pPr>
+            <a:r>
+              <a:t>    Business depends on this data</a:t>
+            </a:r>
+          </a:p>
+          <a:p>
+            <a:pPr>
+              <a:spcAft>
+                <a:spcPts val="400"/>
+              </a:spcAft>
+              <a:defRPr sz="1100">
+                <a:solidFill>
+                  <a:srgbClr val="272727"/>
+                </a:solidFill>
+                <a:latin typeface="Arial"/>
+              </a:defRPr>
+            </a:pPr>
+            <a:r>
+              <a:t>    Time Travel (recover mistakes)</a:t>
+            </a:r>
+          </a:p>
+          <a:p>
+            <a:pPr>
+              <a:spcAft>
+                <a:spcPts val="400"/>
+              </a:spcAft>
+              <a:defRPr sz="1100">
+                <a:solidFill>
+                  <a:srgbClr val="272727"/>
+                </a:solidFill>
+                <a:latin typeface="Arial"/>
+              </a:defRPr>
+            </a:pPr>
+            <a:r>
+              <a:t>    Fail-safe (7-day Snowflake safety net)</a:t>
+            </a:r>
+          </a:p>
+          <a:p>
+            <a:pPr>
+              <a:spcAft>
+                <a:spcPts val="400"/>
+              </a:spcAft>
+              <a:defRPr sz="1100">
+                <a:solidFill>
+                  <a:srgbClr val="272727"/>
+                </a:solidFill>
+                <a:latin typeface="Arial"/>
+              </a:defRPr>
+            </a:pPr>
+          </a:p>
+          <a:p>
+            <a:pPr>
+              <a:spcAft>
+                <a:spcPts val="400"/>
+              </a:spcAft>
+              <a:defRPr sz="1100">
+                <a:solidFill>
+                  <a:srgbClr val="272727"/>
+                </a:solidFill>
+                <a:latin typeface="Arial"/>
+              </a:defRPr>
+            </a:pPr>
+            <a:r>
+              <a:t>  CLAIMS_TODAY: Transient table</a:t>
+            </a:r>
+          </a:p>
+          <a:p>
+            <a:pPr>
+              <a:spcAft>
+                <a:spcPts val="400"/>
+              </a:spcAft>
+              <a:defRPr sz="1100">
+                <a:solidFill>
+                  <a:srgbClr val="272727"/>
+                </a:solidFill>
+                <a:latin typeface="Arial"/>
+              </a:defRPr>
+            </a:pPr>
+            <a:r>
+              <a:t>    Rebuilt daily, cheap, no recovery needed</a:t>
+            </a:r>
+          </a:p>
+          <a:p>
+            <a:pPr>
+              <a:spcAft>
+                <a:spcPts val="400"/>
+              </a:spcAft>
+              <a:defRPr sz="1100">
+                <a:solidFill>
+                  <a:srgbClr val="272727"/>
+                </a:solidFill>
+                <a:latin typeface="Arial"/>
+              </a:defRPr>
+            </a:pPr>
+          </a:p>
+          <a:p>
+            <a:pPr>
+              <a:spcAft>
+                <a:spcPts val="400"/>
+              </a:spcAft>
+              <a:defRPr sz="1100">
+                <a:solidFill>
+                  <a:srgbClr val="272727"/>
+                </a:solidFill>
+                <a:latin typeface="Arial"/>
+              </a:defRPr>
+            </a:pPr>
+            <a:r>
+              <a:t>Boundary: External stage + COPY INTO</a:t>
+            </a:r>
+          </a:p>
+          <a:p>
+            <a:pPr>
+              <a:spcAft>
+                <a:spcPts val="400"/>
+              </a:spcAft>
+              <a:defRPr sz="1100">
+                <a:solidFill>
+                  <a:srgbClr val="272727"/>
+                </a:solidFill>
+                <a:latin typeface="Arial"/>
+              </a:defRPr>
+            </a:pPr>
+            <a:r>
+              <a:t>  bridges S3 into Snowflake</a:t>
             </a:r>
           </a:p>
         </p:txBody>
@@ -4127,19 +9948,77 @@
       <p:grpSpPr/>
       <p:sp>
         <p:nvSpPr>
-          <p:cNvPr id="2" name="Title 1"/>
-          <p:cNvSpPr>
-            <a:spLocks noGrp="1"/>
-          </p:cNvSpPr>
-          <p:nvPr>
-            <p:ph type="title"/>
-          </p:nvPr>
-        </p:nvSpPr>
-        <p:spPr/>
-        <p:txBody>
-          <a:bodyPr/>
-          <a:lstStyle/>
-          <a:p>
+          <p:cNvPr id="2" name="Rectangle 1"/>
+          <p:cNvSpPr/>
+          <p:nvPr/>
+        </p:nvSpPr>
+        <p:spPr>
+          <a:xfrm>
+            <a:off x="0" y="0"/>
+            <a:ext cx="12192000" cy="1143000"/>
+          </a:xfrm>
+          <a:prstGeom prst="rect">
+            <a:avLst/>
+          </a:prstGeom>
+          <a:solidFill>
+            <a:srgbClr val="1C2E5E"/>
+          </a:solidFill>
+          <a:ln>
+            <a:noFill/>
+          </a:ln>
+        </p:spPr>
+        <p:style>
+          <a:lnRef idx="1">
+            <a:schemeClr val="accent1"/>
+          </a:lnRef>
+          <a:fillRef idx="3">
+            <a:schemeClr val="accent1"/>
+          </a:fillRef>
+          <a:effectRef idx="2">
+            <a:schemeClr val="accent1"/>
+          </a:effectRef>
+          <a:fontRef idx="minor">
+            <a:schemeClr val="lt1"/>
+          </a:fontRef>
+        </p:style>
+        <p:txBody>
+          <a:bodyPr rtlCol="0" anchor="ctr"/>
+          <a:lstStyle/>
+          <a:p>
+            <a:pPr algn="ctr"/>
+          </a:p>
+        </p:txBody>
+      </p:sp>
+      <p:sp>
+        <p:nvSpPr>
+          <p:cNvPr id="3" name="TextBox 2"/>
+          <p:cNvSpPr txBox="1"/>
+          <p:nvPr/>
+        </p:nvSpPr>
+        <p:spPr>
+          <a:xfrm>
+            <a:off x="457200" y="137160"/>
+            <a:ext cx="11247120" cy="548640"/>
+          </a:xfrm>
+          <a:prstGeom prst="rect">
+            <a:avLst/>
+          </a:prstGeom>
+          <a:noFill/>
+        </p:spPr>
+        <p:txBody>
+          <a:bodyPr wrap="square">
+            <a:spAutoFit/>
+          </a:bodyPr>
+          <a:lstStyle/>
+          <a:p>
+            <a:pPr>
+              <a:defRPr sz="3000" b="1">
+                <a:solidFill>
+                  <a:srgbClr val="FFFFFF"/>
+                </a:solidFill>
+                <a:latin typeface="Georgia"/>
+              </a:defRPr>
+            </a:pPr>
             <a:r>
               <a:t>Challenge 5: "I Only Want Today"</a:t>
             </a:r>
@@ -4148,96 +10027,841 @@
       </p:sp>
       <p:sp>
         <p:nvSpPr>
-          <p:cNvPr id="3" name="Content Placeholder 2"/>
-          <p:cNvSpPr>
-            <a:spLocks noGrp="1"/>
-          </p:cNvSpPr>
-          <p:nvPr>
-            <p:ph idx="1"/>
-          </p:nvPr>
-        </p:nvSpPr>
-        <p:spPr/>
-        <p:txBody>
-          <a:bodyPr/>
-          <a:lstStyle/>
-          <a:p>
-            <a:pPr>
-              <a:defRPr sz="1800"/>
-            </a:pPr>
-            <a:r>
-              <a:t>A plain VIEW does not reduce scan cost; it re-executes the full query each time</a:t>
-            </a:r>
-          </a:p>
-          <a:p>
-            <a:pPr>
-              <a:defRPr sz="1800"/>
-            </a:pPr>
-            <a:r>
-              <a:t>Our solution: a small Gold table rebuilt each morning by the pipeline</a:t>
-            </a:r>
-          </a:p>
-          <a:p>
-            <a:pPr lvl="1">
-              <a:defRPr sz="1600"/>
-            </a:pPr>
-            <a:r>
-              <a:t>CLAIMS_TODAY: transient table, truncated and reloaded daily by the pipeline</a:t>
-            </a:r>
-          </a:p>
-          <a:p>
-            <a:pPr lvl="1">
-              <a:defRPr sz="1600"/>
-            </a:pPr>
-            <a:r>
-              <a:t>Fast (scans only one day's data), cheap (transient = no Fail-safe cost)</a:t>
-            </a:r>
-          </a:p>
-          <a:p>
-            <a:pPr>
-              <a:defRPr sz="1800"/>
-            </a:pPr>
-            <a:r>
-              <a:t>Physical design for the historical table:</a:t>
-            </a:r>
-          </a:p>
-          <a:p>
-            <a:pPr lvl="1">
-              <a:defRPr sz="1600"/>
-            </a:pPr>
-            <a:r>
-              <a:t>Snowflake clustering key on claim_date enables micro-partition pruning</a:t>
-            </a:r>
-          </a:p>
-          <a:p>
-            <a:pPr lvl="1">
-              <a:defRPr sz="1600"/>
-            </a:pPr>
-            <a:r>
-              <a:t>Date-filtered queries skip irrelevant partitions entirely</a:t>
-            </a:r>
-          </a:p>
-          <a:p>
-            <a:pPr>
-              <a:defRPr sz="1800"/>
-            </a:pPr>
-            <a:r>
-              <a:t>Why not a materialized view:</a:t>
-            </a:r>
-          </a:p>
-          <a:p>
-            <a:pPr lvl="1">
-              <a:defRPr sz="1600"/>
-            </a:pPr>
-            <a:r>
-              <a:t>MV restrictions (single table, no joins) conflict with our integrated Gold model</a:t>
-            </a:r>
-          </a:p>
-          <a:p>
-            <a:pPr>
-              <a:defRPr sz="1800"/>
-            </a:pPr>
-            <a:r>
-              <a:t>200 opens/day by 40 users: Snowflake result caching covers repeated identical queries</a:t>
+          <p:cNvPr id="4" name="TextBox 3"/>
+          <p:cNvSpPr txBox="1"/>
+          <p:nvPr/>
+        </p:nvSpPr>
+        <p:spPr>
+          <a:xfrm>
+            <a:off x="457200" y="640080"/>
+            <a:ext cx="11247120" cy="320040"/>
+          </a:xfrm>
+          <a:prstGeom prst="rect">
+            <a:avLst/>
+          </a:prstGeom>
+          <a:noFill/>
+        </p:spPr>
+        <p:txBody>
+          <a:bodyPr wrap="square">
+            <a:spAutoFit/>
+          </a:bodyPr>
+          <a:lstStyle/>
+          <a:p>
+            <a:pPr>
+              <a:defRPr sz="1400" b="0">
+                <a:solidFill>
+                  <a:srgbClr val="FE97C0"/>
+                </a:solidFill>
+                <a:latin typeface="Arial"/>
+              </a:defRPr>
+            </a:pPr>
+            <a:r>
+              <a:t>Dashboard Performance Design</a:t>
+            </a:r>
+          </a:p>
+        </p:txBody>
+      </p:sp>
+      <p:sp>
+        <p:nvSpPr>
+          <p:cNvPr id="5" name="Rectangle 4"/>
+          <p:cNvSpPr/>
+          <p:nvPr/>
+        </p:nvSpPr>
+        <p:spPr>
+          <a:xfrm>
+            <a:off x="0" y="6784848"/>
+            <a:ext cx="12192000" cy="73152"/>
+          </a:xfrm>
+          <a:prstGeom prst="rect">
+            <a:avLst/>
+          </a:prstGeom>
+          <a:solidFill>
+            <a:srgbClr val="1C2E5E"/>
+          </a:solidFill>
+          <a:ln>
+            <a:noFill/>
+          </a:ln>
+        </p:spPr>
+        <p:style>
+          <a:lnRef idx="1">
+            <a:schemeClr val="accent1"/>
+          </a:lnRef>
+          <a:fillRef idx="3">
+            <a:schemeClr val="accent1"/>
+          </a:fillRef>
+          <a:effectRef idx="2">
+            <a:schemeClr val="accent1"/>
+          </a:effectRef>
+          <a:fontRef idx="minor">
+            <a:schemeClr val="lt1"/>
+          </a:fontRef>
+        </p:style>
+        <p:txBody>
+          <a:bodyPr rtlCol="0" anchor="ctr"/>
+          <a:lstStyle/>
+          <a:p>
+            <a:pPr algn="ctr"/>
+          </a:p>
+        </p:txBody>
+      </p:sp>
+      <p:sp>
+        <p:nvSpPr>
+          <p:cNvPr id="6" name="Rounded Rectangle 5"/>
+          <p:cNvSpPr/>
+          <p:nvPr/>
+        </p:nvSpPr>
+        <p:spPr>
+          <a:xfrm>
+            <a:off x="365760" y="1371600"/>
+            <a:ext cx="5615787" cy="5100000"/>
+          </a:xfrm>
+          <a:prstGeom prst="roundRect">
+            <a:avLst/>
+          </a:prstGeom>
+          <a:solidFill>
+            <a:srgbClr val="FAFAFA"/>
+          </a:solidFill>
+          <a:ln>
+            <a:solidFill>
+              <a:srgbClr val="DDDDDD"/>
+            </a:solidFill>
+          </a:ln>
+        </p:spPr>
+        <p:style>
+          <a:lnRef idx="1">
+            <a:schemeClr val="accent1"/>
+          </a:lnRef>
+          <a:fillRef idx="3">
+            <a:schemeClr val="accent1"/>
+          </a:fillRef>
+          <a:effectRef idx="2">
+            <a:schemeClr val="accent1"/>
+          </a:effectRef>
+          <a:fontRef idx="minor">
+            <a:schemeClr val="lt1"/>
+          </a:fontRef>
+        </p:style>
+        <p:txBody>
+          <a:bodyPr rtlCol="0" anchor="ctr"/>
+          <a:lstStyle/>
+          <a:p>
+            <a:pPr algn="ctr"/>
+          </a:p>
+        </p:txBody>
+      </p:sp>
+      <p:sp>
+        <p:nvSpPr>
+          <p:cNvPr id="7" name="Rectangle 6"/>
+          <p:cNvSpPr/>
+          <p:nvPr/>
+        </p:nvSpPr>
+        <p:spPr>
+          <a:xfrm>
+            <a:off x="502920" y="1508760"/>
+            <a:ext cx="2800000" cy="320040"/>
+          </a:xfrm>
+          <a:prstGeom prst="rect">
+            <a:avLst/>
+          </a:prstGeom>
+          <a:solidFill>
+            <a:srgbClr val="1C2E5E"/>
+          </a:solidFill>
+          <a:ln>
+            <a:noFill/>
+          </a:ln>
+        </p:spPr>
+        <p:style>
+          <a:lnRef idx="1">
+            <a:schemeClr val="accent1"/>
+          </a:lnRef>
+          <a:fillRef idx="3">
+            <a:schemeClr val="accent1"/>
+          </a:fillRef>
+          <a:effectRef idx="2">
+            <a:schemeClr val="accent1"/>
+          </a:effectRef>
+          <a:fontRef idx="minor">
+            <a:schemeClr val="lt1"/>
+          </a:fontRef>
+        </p:style>
+        <p:txBody>
+          <a:bodyPr rtlCol="0" anchor="ctr"/>
+          <a:lstStyle/>
+          <a:p>
+            <a:pPr algn="ctr"/>
+          </a:p>
+        </p:txBody>
+      </p:sp>
+      <p:sp>
+        <p:nvSpPr>
+          <p:cNvPr id="8" name="TextBox 7"/>
+          <p:cNvSpPr txBox="1"/>
+          <p:nvPr/>
+        </p:nvSpPr>
+        <p:spPr>
+          <a:xfrm>
+            <a:off x="548640" y="1508760"/>
+            <a:ext cx="2800000" cy="320040"/>
+          </a:xfrm>
+          <a:prstGeom prst="rect">
+            <a:avLst/>
+          </a:prstGeom>
+          <a:noFill/>
+        </p:spPr>
+        <p:txBody>
+          <a:bodyPr wrap="none" anchor="ctr">
+            <a:spAutoFit/>
+          </a:bodyPr>
+          <a:lstStyle/>
+          <a:p>
+            <a:pPr>
+              <a:defRPr sz="1100" b="1">
+                <a:solidFill>
+                  <a:srgbClr val="FFFFFF"/>
+                </a:solidFill>
+                <a:latin typeface="Arial"/>
+              </a:defRPr>
+            </a:pPr>
+            <a:r>
+              <a:t>OPTIONS CONSIDERED</a:t>
+            </a:r>
+          </a:p>
+        </p:txBody>
+      </p:sp>
+      <p:sp>
+        <p:nvSpPr>
+          <p:cNvPr id="9" name="TextBox 8"/>
+          <p:cNvSpPr txBox="1"/>
+          <p:nvPr/>
+        </p:nvSpPr>
+        <p:spPr>
+          <a:xfrm>
+            <a:off x="594360" y="1920240"/>
+            <a:ext cx="5158587" cy="4400000"/>
+          </a:xfrm>
+          <a:prstGeom prst="rect">
+            <a:avLst/>
+          </a:prstGeom>
+          <a:noFill/>
+        </p:spPr>
+        <p:txBody>
+          <a:bodyPr wrap="square">
+            <a:spAutoFit/>
+          </a:bodyPr>
+          <a:lstStyle/>
+          <a:p>
+            <a:pPr>
+              <a:spcAft>
+                <a:spcPts val="400"/>
+              </a:spcAft>
+              <a:defRPr sz="1100">
+                <a:solidFill>
+                  <a:srgbClr val="272727"/>
+                </a:solidFill>
+                <a:latin typeface="Arial"/>
+              </a:defRPr>
+            </a:pPr>
+            <a:r>
+              <a:t>Option A: Plain VIEW</a:t>
+            </a:r>
+          </a:p>
+          <a:p>
+            <a:pPr>
+              <a:spcAft>
+                <a:spcPts val="400"/>
+              </a:spcAft>
+              <a:defRPr sz="1100">
+                <a:solidFill>
+                  <a:srgbClr val="272727"/>
+                </a:solidFill>
+                <a:latin typeface="Arial"/>
+              </a:defRPr>
+            </a:pPr>
+            <a:r>
+              <a:t>  CREATE VIEW today AS SELECT ... WHERE date = CURRENT_DATE()</a:t>
+            </a:r>
+          </a:p>
+          <a:p>
+            <a:pPr>
+              <a:spcAft>
+                <a:spcPts val="400"/>
+              </a:spcAft>
+              <a:defRPr sz="1100">
+                <a:solidFill>
+                  <a:srgbClr val="272727"/>
+                </a:solidFill>
+                <a:latin typeface="Arial"/>
+              </a:defRPr>
+            </a:pPr>
+            <a:r>
+              <a:t>  Problem: re-runs full scan every read</a:t>
+            </a:r>
+          </a:p>
+          <a:p>
+            <a:pPr>
+              <a:spcAft>
+                <a:spcPts val="400"/>
+              </a:spcAft>
+              <a:defRPr sz="1100">
+                <a:solidFill>
+                  <a:srgbClr val="272727"/>
+                </a:solidFill>
+                <a:latin typeface="Arial"/>
+              </a:defRPr>
+            </a:pPr>
+            <a:r>
+              <a:t>  200 opens/day = 200 full table scans</a:t>
+            </a:r>
+          </a:p>
+          <a:p>
+            <a:pPr>
+              <a:spcAft>
+                <a:spcPts val="400"/>
+              </a:spcAft>
+              <a:defRPr sz="1100">
+                <a:solidFill>
+                  <a:srgbClr val="272727"/>
+                </a:solidFill>
+                <a:latin typeface="Arial"/>
+              </a:defRPr>
+            </a:pPr>
+          </a:p>
+          <a:p>
+            <a:pPr>
+              <a:spcAft>
+                <a:spcPts val="400"/>
+              </a:spcAft>
+              <a:defRPr sz="1100">
+                <a:solidFill>
+                  <a:srgbClr val="272727"/>
+                </a:solidFill>
+                <a:latin typeface="Arial"/>
+              </a:defRPr>
+            </a:pPr>
+            <a:r>
+              <a:t>Option B: Materialized View</a:t>
+            </a:r>
+          </a:p>
+          <a:p>
+            <a:pPr>
+              <a:spcAft>
+                <a:spcPts val="400"/>
+              </a:spcAft>
+              <a:defRPr sz="1100">
+                <a:solidFill>
+                  <a:srgbClr val="272727"/>
+                </a:solidFill>
+                <a:latin typeface="Arial"/>
+              </a:defRPr>
+            </a:pPr>
+            <a:r>
+              <a:t>  Auto-refreshed precomputed results</a:t>
+            </a:r>
+          </a:p>
+          <a:p>
+            <a:pPr>
+              <a:spcAft>
+                <a:spcPts val="400"/>
+              </a:spcAft>
+              <a:defRPr sz="1100">
+                <a:solidFill>
+                  <a:srgbClr val="272727"/>
+                </a:solidFill>
+                <a:latin typeface="Arial"/>
+              </a:defRPr>
+            </a:pPr>
+            <a:r>
+              <a:t>  Problem: restricted (single table, no joins)</a:t>
+            </a:r>
+          </a:p>
+          <a:p>
+            <a:pPr>
+              <a:spcAft>
+                <a:spcPts val="400"/>
+              </a:spcAft>
+              <a:defRPr sz="1100">
+                <a:solidFill>
+                  <a:srgbClr val="272727"/>
+                </a:solidFill>
+                <a:latin typeface="Arial"/>
+              </a:defRPr>
+            </a:pPr>
+            <a:r>
+              <a:t>  Our Gold model requires joins = disqualified</a:t>
+            </a:r>
+          </a:p>
+          <a:p>
+            <a:pPr>
+              <a:spcAft>
+                <a:spcPts val="400"/>
+              </a:spcAft>
+              <a:defRPr sz="1100">
+                <a:solidFill>
+                  <a:srgbClr val="272727"/>
+                </a:solidFill>
+                <a:latin typeface="Arial"/>
+              </a:defRPr>
+            </a:pPr>
+          </a:p>
+          <a:p>
+            <a:pPr>
+              <a:spcAft>
+                <a:spcPts val="400"/>
+              </a:spcAft>
+              <a:defRPr sz="1100">
+                <a:solidFill>
+                  <a:srgbClr val="272727"/>
+                </a:solidFill>
+                <a:latin typeface="Arial"/>
+              </a:defRPr>
+            </a:pPr>
+            <a:r>
+              <a:t>Option C: Daily-rebuilt transient table (CHOSEN)</a:t>
+            </a:r>
+          </a:p>
+          <a:p>
+            <a:pPr>
+              <a:spcAft>
+                <a:spcPts val="400"/>
+              </a:spcAft>
+              <a:defRPr sz="1100">
+                <a:solidFill>
+                  <a:srgbClr val="272727"/>
+                </a:solidFill>
+                <a:latin typeface="Arial"/>
+              </a:defRPr>
+            </a:pPr>
+            <a:r>
+              <a:t>  Pipeline truncates and reloads each morning</a:t>
+            </a:r>
+          </a:p>
+          <a:p>
+            <a:pPr>
+              <a:spcAft>
+                <a:spcPts val="400"/>
+              </a:spcAft>
+              <a:defRPr sz="1100">
+                <a:solidFill>
+                  <a:srgbClr val="272727"/>
+                </a:solidFill>
+                <a:latin typeface="Arial"/>
+              </a:defRPr>
+            </a:pPr>
+            <a:r>
+              <a:t>  Scans only one day's data at build time</a:t>
+            </a:r>
+          </a:p>
+          <a:p>
+            <a:pPr>
+              <a:spcAft>
+                <a:spcPts val="400"/>
+              </a:spcAft>
+              <a:defRPr sz="1100">
+                <a:solidFill>
+                  <a:srgbClr val="272727"/>
+                </a:solidFill>
+                <a:latin typeface="Arial"/>
+              </a:defRPr>
+            </a:pPr>
+            <a:r>
+              <a:t>  Reads hit result cache (zero compute)</a:t>
+            </a:r>
+          </a:p>
+          <a:p>
+            <a:pPr>
+              <a:spcAft>
+                <a:spcPts val="400"/>
+              </a:spcAft>
+              <a:defRPr sz="1100">
+                <a:solidFill>
+                  <a:srgbClr val="272727"/>
+                </a:solidFill>
+                <a:latin typeface="Arial"/>
+              </a:defRPr>
+            </a:pPr>
+            <a:r>
+              <a:t>  Transient = no Fail-safe cost</a:t>
+            </a:r>
+          </a:p>
+        </p:txBody>
+      </p:sp>
+      <p:sp>
+        <p:nvSpPr>
+          <p:cNvPr id="10" name="Rounded Rectangle 9"/>
+          <p:cNvSpPr/>
+          <p:nvPr/>
+        </p:nvSpPr>
+        <p:spPr>
+          <a:xfrm>
+            <a:off x="6210147" y="1371600"/>
+            <a:ext cx="5615787" cy="5100000"/>
+          </a:xfrm>
+          <a:prstGeom prst="roundRect">
+            <a:avLst/>
+          </a:prstGeom>
+          <a:solidFill>
+            <a:srgbClr val="FAFAFA"/>
+          </a:solidFill>
+          <a:ln>
+            <a:solidFill>
+              <a:srgbClr val="DDDDDD"/>
+            </a:solidFill>
+          </a:ln>
+        </p:spPr>
+        <p:style>
+          <a:lnRef idx="1">
+            <a:schemeClr val="accent1"/>
+          </a:lnRef>
+          <a:fillRef idx="3">
+            <a:schemeClr val="accent1"/>
+          </a:fillRef>
+          <a:effectRef idx="2">
+            <a:schemeClr val="accent1"/>
+          </a:effectRef>
+          <a:fontRef idx="minor">
+            <a:schemeClr val="lt1"/>
+          </a:fontRef>
+        </p:style>
+        <p:txBody>
+          <a:bodyPr rtlCol="0" anchor="ctr"/>
+          <a:lstStyle/>
+          <a:p>
+            <a:pPr algn="ctr"/>
+          </a:p>
+        </p:txBody>
+      </p:sp>
+      <p:sp>
+        <p:nvSpPr>
+          <p:cNvPr id="11" name="Rectangle 10"/>
+          <p:cNvSpPr/>
+          <p:nvPr/>
+        </p:nvSpPr>
+        <p:spPr>
+          <a:xfrm>
+            <a:off x="6347307" y="1508760"/>
+            <a:ext cx="2800000" cy="320040"/>
+          </a:xfrm>
+          <a:prstGeom prst="rect">
+            <a:avLst/>
+          </a:prstGeom>
+          <a:solidFill>
+            <a:srgbClr val="1C2E5E"/>
+          </a:solidFill>
+          <a:ln>
+            <a:noFill/>
+          </a:ln>
+        </p:spPr>
+        <p:style>
+          <a:lnRef idx="1">
+            <a:schemeClr val="accent1"/>
+          </a:lnRef>
+          <a:fillRef idx="3">
+            <a:schemeClr val="accent1"/>
+          </a:fillRef>
+          <a:effectRef idx="2">
+            <a:schemeClr val="accent1"/>
+          </a:effectRef>
+          <a:fontRef idx="minor">
+            <a:schemeClr val="lt1"/>
+          </a:fontRef>
+        </p:style>
+        <p:txBody>
+          <a:bodyPr rtlCol="0" anchor="ctr"/>
+          <a:lstStyle/>
+          <a:p>
+            <a:pPr algn="ctr"/>
+          </a:p>
+        </p:txBody>
+      </p:sp>
+      <p:sp>
+        <p:nvSpPr>
+          <p:cNvPr id="12" name="TextBox 11"/>
+          <p:cNvSpPr txBox="1"/>
+          <p:nvPr/>
+        </p:nvSpPr>
+        <p:spPr>
+          <a:xfrm>
+            <a:off x="6393027" y="1508760"/>
+            <a:ext cx="2800000" cy="320040"/>
+          </a:xfrm>
+          <a:prstGeom prst="rect">
+            <a:avLst/>
+          </a:prstGeom>
+          <a:noFill/>
+        </p:spPr>
+        <p:txBody>
+          <a:bodyPr wrap="none" anchor="ctr">
+            <a:spAutoFit/>
+          </a:bodyPr>
+          <a:lstStyle/>
+          <a:p>
+            <a:pPr>
+              <a:defRPr sz="1100" b="1">
+                <a:solidFill>
+                  <a:srgbClr val="FFFFFF"/>
+                </a:solidFill>
+                <a:latin typeface="Arial"/>
+              </a:defRPr>
+            </a:pPr>
+            <a:r>
+              <a:t>PHYSICAL DESIGN</a:t>
+            </a:r>
+          </a:p>
+        </p:txBody>
+      </p:sp>
+      <p:sp>
+        <p:nvSpPr>
+          <p:cNvPr id="13" name="TextBox 12"/>
+          <p:cNvSpPr txBox="1"/>
+          <p:nvPr/>
+        </p:nvSpPr>
+        <p:spPr>
+          <a:xfrm>
+            <a:off x="6438747" y="1920240"/>
+            <a:ext cx="5158587" cy="4400000"/>
+          </a:xfrm>
+          <a:prstGeom prst="rect">
+            <a:avLst/>
+          </a:prstGeom>
+          <a:noFill/>
+        </p:spPr>
+        <p:txBody>
+          <a:bodyPr wrap="square">
+            <a:spAutoFit/>
+          </a:bodyPr>
+          <a:lstStyle/>
+          <a:p>
+            <a:pPr>
+              <a:spcAft>
+                <a:spcPts val="400"/>
+              </a:spcAft>
+              <a:defRPr sz="1100">
+                <a:solidFill>
+                  <a:srgbClr val="272727"/>
+                </a:solidFill>
+                <a:latin typeface="Arial"/>
+              </a:defRPr>
+            </a:pPr>
+            <a:r>
+              <a:t>Historical table (CLAIMS_HISTORY):</a:t>
+            </a:r>
+          </a:p>
+          <a:p>
+            <a:pPr>
+              <a:spcAft>
+                <a:spcPts val="400"/>
+              </a:spcAft>
+              <a:defRPr sz="1100">
+                <a:solidFill>
+                  <a:srgbClr val="272727"/>
+                </a:solidFill>
+                <a:latin typeface="Arial"/>
+              </a:defRPr>
+            </a:pPr>
+            <a:r>
+              <a:t>  Clustering key on claim_date</a:t>
+            </a:r>
+          </a:p>
+          <a:p>
+            <a:pPr>
+              <a:spcAft>
+                <a:spcPts val="400"/>
+              </a:spcAft>
+              <a:defRPr sz="1100">
+                <a:solidFill>
+                  <a:srgbClr val="272727"/>
+                </a:solidFill>
+                <a:latin typeface="Arial"/>
+              </a:defRPr>
+            </a:pPr>
+            <a:r>
+              <a:t>  Micro-partition pruning skips irrelevant data</a:t>
+            </a:r>
+          </a:p>
+          <a:p>
+            <a:pPr>
+              <a:spcAft>
+                <a:spcPts val="400"/>
+              </a:spcAft>
+              <a:defRPr sz="1100">
+                <a:solidFill>
+                  <a:srgbClr val="272727"/>
+                </a:solidFill>
+                <a:latin typeface="Arial"/>
+              </a:defRPr>
+            </a:pPr>
+            <a:r>
+              <a:t>  Same concept as BigQuery partitioning (Week 4)</a:t>
+            </a:r>
+          </a:p>
+          <a:p>
+            <a:pPr>
+              <a:spcAft>
+                <a:spcPts val="400"/>
+              </a:spcAft>
+              <a:defRPr sz="1100">
+                <a:solidFill>
+                  <a:srgbClr val="272727"/>
+                </a:solidFill>
+                <a:latin typeface="Arial"/>
+              </a:defRPr>
+            </a:pPr>
+          </a:p>
+          <a:p>
+            <a:pPr>
+              <a:spcAft>
+                <a:spcPts val="400"/>
+              </a:spcAft>
+              <a:defRPr sz="1100">
+                <a:solidFill>
+                  <a:srgbClr val="272727"/>
+                </a:solidFill>
+                <a:latin typeface="Arial"/>
+              </a:defRPr>
+            </a:pPr>
+            <a:r>
+              <a:t>Dashboard usage pattern:</a:t>
+            </a:r>
+          </a:p>
+          <a:p>
+            <a:pPr>
+              <a:spcAft>
+                <a:spcPts val="400"/>
+              </a:spcAft>
+              <a:defRPr sz="1100">
+                <a:solidFill>
+                  <a:srgbClr val="272727"/>
+                </a:solidFill>
+                <a:latin typeface="Arial"/>
+              </a:defRPr>
+            </a:pPr>
+            <a:r>
+              <a:t>  200 opens/day by 40 people</a:t>
+            </a:r>
+          </a:p>
+          <a:p>
+            <a:pPr>
+              <a:spcAft>
+                <a:spcPts val="400"/>
+              </a:spcAft>
+              <a:defRPr sz="1100">
+                <a:solidFill>
+                  <a:srgbClr val="272727"/>
+                </a:solidFill>
+                <a:latin typeface="Arial"/>
+              </a:defRPr>
+            </a:pPr>
+            <a:r>
+              <a:t>  Snowflake result caching:</a:t>
+            </a:r>
+          </a:p>
+          <a:p>
+            <a:pPr>
+              <a:spcAft>
+                <a:spcPts val="400"/>
+              </a:spcAft>
+              <a:defRPr sz="1100">
+                <a:solidFill>
+                  <a:srgbClr val="272727"/>
+                </a:solidFill>
+                <a:latin typeface="Arial"/>
+              </a:defRPr>
+            </a:pPr>
+            <a:r>
+              <a:t>    Identical queries return cached results</a:t>
+            </a:r>
+          </a:p>
+          <a:p>
+            <a:pPr>
+              <a:spcAft>
+                <a:spcPts val="400"/>
+              </a:spcAft>
+              <a:defRPr sz="1100">
+                <a:solidFill>
+                  <a:srgbClr val="272727"/>
+                </a:solidFill>
+                <a:latin typeface="Arial"/>
+              </a:defRPr>
+            </a:pPr>
+            <a:r>
+              <a:t>    Zero additional compute cost</a:t>
+            </a:r>
+          </a:p>
+          <a:p>
+            <a:pPr>
+              <a:spcAft>
+                <a:spcPts val="400"/>
+              </a:spcAft>
+              <a:defRPr sz="1100">
+                <a:solidFill>
+                  <a:srgbClr val="272727"/>
+                </a:solidFill>
+                <a:latin typeface="Arial"/>
+              </a:defRPr>
+            </a:pPr>
+          </a:p>
+          <a:p>
+            <a:pPr>
+              <a:spcAft>
+                <a:spcPts val="400"/>
+              </a:spcAft>
+              <a:defRPr sz="1100">
+                <a:solidFill>
+                  <a:srgbClr val="272727"/>
+                </a:solidFill>
+                <a:latin typeface="Arial"/>
+              </a:defRPr>
+            </a:pPr>
+            <a:r>
+              <a:t>Freshness:</a:t>
+            </a:r>
+          </a:p>
+          <a:p>
+            <a:pPr>
+              <a:spcAft>
+                <a:spcPts val="400"/>
+              </a:spcAft>
+              <a:defRPr sz="1100">
+                <a:solidFill>
+                  <a:srgbClr val="272727"/>
+                </a:solidFill>
+                <a:latin typeface="Arial"/>
+              </a:defRPr>
+            </a:pPr>
+            <a:r>
+              <a:t>  CLAIMS_TODAY rebuilt at 05:00 UTC</a:t>
+            </a:r>
+          </a:p>
+          <a:p>
+            <a:pPr>
+              <a:spcAft>
+                <a:spcPts val="400"/>
+              </a:spcAft>
+              <a:defRPr sz="1100">
+                <a:solidFill>
+                  <a:srgbClr val="272727"/>
+                </a:solidFill>
+                <a:latin typeface="Arial"/>
+              </a:defRPr>
+            </a:pPr>
+            <a:r>
+              <a:t>  Dashboard always shows complete prior day</a:t>
+            </a:r>
+          </a:p>
+          <a:p>
+            <a:pPr>
+              <a:spcAft>
+                <a:spcPts val="400"/>
+              </a:spcAft>
+              <a:defRPr sz="1100">
+                <a:solidFill>
+                  <a:srgbClr val="272727"/>
+                </a:solidFill>
+                <a:latin typeface="Arial"/>
+              </a:defRPr>
+            </a:pPr>
+            <a:r>
+              <a:t>  Acceptable for claims leadership use case</a:t>
             </a:r>
           </a:p>
         </p:txBody>
@@ -4262,129 +10886,697 @@
       <p:grpSpPr/>
       <p:sp>
         <p:nvSpPr>
-          <p:cNvPr id="2" name="Title 1"/>
-          <p:cNvSpPr>
-            <a:spLocks noGrp="1"/>
-          </p:cNvSpPr>
-          <p:nvPr>
-            <p:ph type="title"/>
-          </p:nvPr>
-        </p:nvSpPr>
-        <p:spPr/>
-        <p:txBody>
-          <a:bodyPr/>
-          <a:lstStyle/>
-          <a:p>
-            <a:r>
-              <a:t>Sizing and Estimates</a:t>
-            </a:r>
-          </a:p>
-        </p:txBody>
-      </p:sp>
-      <p:sp>
-        <p:nvSpPr>
-          <p:cNvPr id="3" name="Content Placeholder 2"/>
-          <p:cNvSpPr>
-            <a:spLocks noGrp="1"/>
-          </p:cNvSpPr>
-          <p:nvPr>
-            <p:ph idx="1"/>
-          </p:nvPr>
-        </p:nvSpPr>
-        <p:spPr/>
-        <p:txBody>
-          <a:bodyPr/>
-          <a:lstStyle/>
-          <a:p>
-            <a:pPr>
-              <a:defRPr sz="1800"/>
-            </a:pPr>
-            <a:r>
-              <a:t>Tools: S3 (storage), AWS Glue (Spark ETL), Snowflake (warehouse + serving)</a:t>
-            </a:r>
-          </a:p>
-          <a:p>
-            <a:pPr>
-              <a:defRPr sz="1800"/>
-            </a:pPr>
-            <a:r>
-              <a:t>Build effort:</a:t>
-            </a:r>
-          </a:p>
-          <a:p>
-            <a:pPr lvl="1">
-              <a:defRPr sz="1600"/>
-            </a:pPr>
-            <a:r>
-              <a:t>Weeks 1-2: Harden PoC, build Glue pipeline for daily ingest</a:t>
-            </a:r>
-          </a:p>
-          <a:p>
-            <a:pPr lvl="1">
-              <a:defRPr sz="1600"/>
-            </a:pPr>
-            <a:r>
-              <a:t>Weeks 3-4: Integration logic (joins, dedup, standardization) in Snowflake</a:t>
-            </a:r>
-          </a:p>
-          <a:p>
-            <a:pPr lvl="1">
-              <a:defRPr sz="1600"/>
-            </a:pPr>
-            <a:r>
-              <a:t>Weeks 5-6: Historical backfill (hundreds of TB at ~2 TB/hour with 10 Glue workers)</a:t>
-            </a:r>
-          </a:p>
-          <a:p>
-            <a:pPr lvl="1">
-              <a:defRPr sz="1600"/>
-            </a:pPr>
-            <a:r>
-              <a:t>Week 7: Cutover, monitoring, dashboard validation</a:t>
-            </a:r>
-          </a:p>
-          <a:p>
-            <a:pPr>
-              <a:defRPr sz="1800"/>
-            </a:pPr>
-            <a:r>
-              <a:t>Team: 2 data engineers, 1 platform/DevOps, 1 analyst liaison (smallest viable: 2 DEs)</a:t>
-            </a:r>
-          </a:p>
-          <a:p>
-            <a:pPr>
-              <a:defRPr sz="1800"/>
-            </a:pPr>
-            <a:r>
-              <a:t>Monthly cost drivers:</a:t>
-            </a:r>
-          </a:p>
-          <a:p>
-            <a:pPr lvl="1">
-              <a:defRPr sz="1600"/>
-            </a:pPr>
-            <a:r>
-              <a:t>S3 storage: ~$5,000/month for 200 TB (largest line item, controlled by lifecycle policies)</a:t>
-            </a:r>
-          </a:p>
-          <a:p>
-            <a:pPr lvl="1">
-              <a:defRPr sz="1600"/>
-            </a:pPr>
-            <a:r>
-              <a:t>Glue compute: ~$1,200/month (2,400 files/day, 2 DPU-hours, controlled by worker count)</a:t>
-            </a:r>
-          </a:p>
-          <a:p>
-            <a:pPr lvl="1">
-              <a:defRPr sz="1600"/>
-            </a:pPr>
-            <a:r>
-              <a:t>Snowflake compute: ~$2,000/month (COMPUTE_WH, auto-suspend controls idle cost)</a:t>
-            </a:r>
-          </a:p>
-        </p:txBody>
-      </p:sp>
+          <p:cNvPr id="2" name="Rectangle 1"/>
+          <p:cNvSpPr/>
+          <p:nvPr/>
+        </p:nvSpPr>
+        <p:spPr>
+          <a:xfrm>
+            <a:off x="0" y="0"/>
+            <a:ext cx="12192000" cy="1143000"/>
+          </a:xfrm>
+          <a:prstGeom prst="rect">
+            <a:avLst/>
+          </a:prstGeom>
+          <a:solidFill>
+            <a:srgbClr val="1C2E5E"/>
+          </a:solidFill>
+          <a:ln>
+            <a:noFill/>
+          </a:ln>
+        </p:spPr>
+        <p:style>
+          <a:lnRef idx="1">
+            <a:schemeClr val="accent1"/>
+          </a:lnRef>
+          <a:fillRef idx="3">
+            <a:schemeClr val="accent1"/>
+          </a:fillRef>
+          <a:effectRef idx="2">
+            <a:schemeClr val="accent1"/>
+          </a:effectRef>
+          <a:fontRef idx="minor">
+            <a:schemeClr val="lt1"/>
+          </a:fontRef>
+        </p:style>
+        <p:txBody>
+          <a:bodyPr rtlCol="0" anchor="ctr"/>
+          <a:lstStyle/>
+          <a:p>
+            <a:pPr algn="ctr"/>
+          </a:p>
+        </p:txBody>
+      </p:sp>
+      <p:sp>
+        <p:nvSpPr>
+          <p:cNvPr id="3" name="TextBox 2"/>
+          <p:cNvSpPr txBox="1"/>
+          <p:nvPr/>
+        </p:nvSpPr>
+        <p:spPr>
+          <a:xfrm>
+            <a:off x="457200" y="137160"/>
+            <a:ext cx="11247120" cy="548640"/>
+          </a:xfrm>
+          <a:prstGeom prst="rect">
+            <a:avLst/>
+          </a:prstGeom>
+          <a:noFill/>
+        </p:spPr>
+        <p:txBody>
+          <a:bodyPr wrap="square">
+            <a:spAutoFit/>
+          </a:bodyPr>
+          <a:lstStyle/>
+          <a:p>
+            <a:pPr>
+              <a:defRPr sz="3000" b="1">
+                <a:solidFill>
+                  <a:srgbClr val="FFFFFF"/>
+                </a:solidFill>
+                <a:latin typeface="Georgia"/>
+              </a:defRPr>
+            </a:pPr>
+            <a:r>
+              <a:t>Decision Table</a:t>
+            </a:r>
+          </a:p>
+        </p:txBody>
+      </p:sp>
+      <p:sp>
+        <p:nvSpPr>
+          <p:cNvPr id="4" name="TextBox 3"/>
+          <p:cNvSpPr txBox="1"/>
+          <p:nvPr/>
+        </p:nvSpPr>
+        <p:spPr>
+          <a:xfrm>
+            <a:off x="457200" y="640080"/>
+            <a:ext cx="11247120" cy="320040"/>
+          </a:xfrm>
+          <a:prstGeom prst="rect">
+            <a:avLst/>
+          </a:prstGeom>
+          <a:noFill/>
+        </p:spPr>
+        <p:txBody>
+          <a:bodyPr wrap="square">
+            <a:spAutoFit/>
+          </a:bodyPr>
+          <a:lstStyle/>
+          <a:p>
+            <a:pPr>
+              <a:defRPr sz="1400" b="0">
+                <a:solidFill>
+                  <a:srgbClr val="FE97C0"/>
+                </a:solidFill>
+                <a:latin typeface="Arial"/>
+              </a:defRPr>
+            </a:pPr>
+            <a:r>
+              <a:t>Five Challenges, Five Decisions  |  Required Deliverable #2</a:t>
+            </a:r>
+          </a:p>
+        </p:txBody>
+      </p:sp>
+      <p:sp>
+        <p:nvSpPr>
+          <p:cNvPr id="5" name="Rectangle 4"/>
+          <p:cNvSpPr/>
+          <p:nvPr/>
+        </p:nvSpPr>
+        <p:spPr>
+          <a:xfrm>
+            <a:off x="0" y="6784848"/>
+            <a:ext cx="12192000" cy="73152"/>
+          </a:xfrm>
+          <a:prstGeom prst="rect">
+            <a:avLst/>
+          </a:prstGeom>
+          <a:solidFill>
+            <a:srgbClr val="1C2E5E"/>
+          </a:solidFill>
+          <a:ln>
+            <a:noFill/>
+          </a:ln>
+        </p:spPr>
+        <p:style>
+          <a:lnRef idx="1">
+            <a:schemeClr val="accent1"/>
+          </a:lnRef>
+          <a:fillRef idx="3">
+            <a:schemeClr val="accent1"/>
+          </a:fillRef>
+          <a:effectRef idx="2">
+            <a:schemeClr val="accent1"/>
+          </a:effectRef>
+          <a:fontRef idx="minor">
+            <a:schemeClr val="lt1"/>
+          </a:fontRef>
+        </p:style>
+        <p:txBody>
+          <a:bodyPr rtlCol="0" anchor="ctr"/>
+          <a:lstStyle/>
+          <a:p>
+            <a:pPr algn="ctr"/>
+          </a:p>
+        </p:txBody>
+      </p:sp>
+      <p:sp>
+        <p:nvSpPr>
+          <p:cNvPr id="6" name="Rounded Rectangle 5"/>
+          <p:cNvSpPr/>
+          <p:nvPr/>
+        </p:nvSpPr>
+        <p:spPr>
+          <a:xfrm>
+            <a:off x="365760" y="1371600"/>
+            <a:ext cx="11460174" cy="5100000"/>
+          </a:xfrm>
+          <a:prstGeom prst="roundRect">
+            <a:avLst/>
+          </a:prstGeom>
+          <a:solidFill>
+            <a:srgbClr val="FAFAFA"/>
+          </a:solidFill>
+          <a:ln>
+            <a:solidFill>
+              <a:srgbClr val="DDDDDD"/>
+            </a:solidFill>
+          </a:ln>
+        </p:spPr>
+        <p:style>
+          <a:lnRef idx="1">
+            <a:schemeClr val="accent1"/>
+          </a:lnRef>
+          <a:fillRef idx="3">
+            <a:schemeClr val="accent1"/>
+          </a:fillRef>
+          <a:effectRef idx="2">
+            <a:schemeClr val="accent1"/>
+          </a:effectRef>
+          <a:fontRef idx="minor">
+            <a:schemeClr val="lt1"/>
+          </a:fontRef>
+        </p:style>
+        <p:txBody>
+          <a:bodyPr rtlCol="0" anchor="ctr"/>
+          <a:lstStyle/>
+          <a:p>
+            <a:pPr algn="ctr"/>
+          </a:p>
+        </p:txBody>
+      </p:sp>
+      <p:sp>
+        <p:nvSpPr>
+          <p:cNvPr id="7" name="Rectangle 6"/>
+          <p:cNvSpPr/>
+          <p:nvPr/>
+        </p:nvSpPr>
+        <p:spPr>
+          <a:xfrm>
+            <a:off x="502920" y="1508760"/>
+            <a:ext cx="2800000" cy="320040"/>
+          </a:xfrm>
+          <a:prstGeom prst="rect">
+            <a:avLst/>
+          </a:prstGeom>
+          <a:solidFill>
+            <a:srgbClr val="1C2E5E"/>
+          </a:solidFill>
+          <a:ln>
+            <a:noFill/>
+          </a:ln>
+        </p:spPr>
+        <p:style>
+          <a:lnRef idx="1">
+            <a:schemeClr val="accent1"/>
+          </a:lnRef>
+          <a:fillRef idx="3">
+            <a:schemeClr val="accent1"/>
+          </a:fillRef>
+          <a:effectRef idx="2">
+            <a:schemeClr val="accent1"/>
+          </a:effectRef>
+          <a:fontRef idx="minor">
+            <a:schemeClr val="lt1"/>
+          </a:fontRef>
+        </p:style>
+        <p:txBody>
+          <a:bodyPr rtlCol="0" anchor="ctr"/>
+          <a:lstStyle/>
+          <a:p>
+            <a:pPr algn="ctr"/>
+          </a:p>
+        </p:txBody>
+      </p:sp>
+      <p:sp>
+        <p:nvSpPr>
+          <p:cNvPr id="8" name="TextBox 7"/>
+          <p:cNvSpPr txBox="1"/>
+          <p:nvPr/>
+        </p:nvSpPr>
+        <p:spPr>
+          <a:xfrm>
+            <a:off x="548640" y="1508760"/>
+            <a:ext cx="2800000" cy="320040"/>
+          </a:xfrm>
+          <a:prstGeom prst="rect">
+            <a:avLst/>
+          </a:prstGeom>
+          <a:noFill/>
+        </p:spPr>
+        <p:txBody>
+          <a:bodyPr wrap="none" anchor="ctr">
+            <a:spAutoFit/>
+          </a:bodyPr>
+          <a:lstStyle/>
+          <a:p>
+            <a:pPr>
+              <a:defRPr sz="1100" b="1">
+                <a:solidFill>
+                  <a:srgbClr val="FFFFFF"/>
+                </a:solidFill>
+                <a:latin typeface="Arial"/>
+              </a:defRPr>
+            </a:pPr>
+            <a:r>
+              <a:t>FIVE DECISIONS</a:t>
+            </a:r>
+          </a:p>
+        </p:txBody>
+      </p:sp>
+      <p:graphicFrame>
+        <p:nvGraphicFramePr>
+          <p:cNvPr id="9" name="Table 8"/>
+          <p:cNvGraphicFramePr>
+            <a:graphicFrameLocks noGrp="1"/>
+          </p:cNvGraphicFramePr>
+          <p:nvPr/>
+        </p:nvGraphicFramePr>
+        <p:xfrm>
+          <a:off x="502920" y="1980000"/>
+          <a:ext cx="11100000" cy="3800000"/>
+        </p:xfrm>
+        <a:graphic>
+          <a:graphicData uri="http://schemas.openxmlformats.org/drawingml/2006/table">
+            <a:tbl>
+              <a:tblPr firstRow="1" bandRow="1">
+                <a:tableStyleId>{5C22544A-7EE6-4342-B048-85BDC9FD1C3A}</a:tableStyleId>
+              </a:tblPr>
+              <a:tblGrid>
+                <a:gridCol w="2400000"/>
+                <a:gridCol w="3800000"/>
+                <a:gridCol w="4900000"/>
+              </a:tblGrid>
+              <a:tr h="633333">
+                <a:tc>
+                  <a:txBody>
+                    <a:bodyPr/>
+                    <a:lstStyle/>
+                    <a:p>
+                      <a:pPr>
+                        <a:defRPr sz="1100" b="1">
+                          <a:solidFill>
+                            <a:srgbClr val="FFFFFF"/>
+                          </a:solidFill>
+                          <a:latin typeface="Arial"/>
+                        </a:defRPr>
+                      </a:pPr>
+                      <a:r>
+                        <a:t>Challenge</a:t>
+                      </a:r>
+                    </a:p>
+                  </a:txBody>
+                  <a:tcPr>
+                    <a:solidFill>
+                      <a:srgbClr val="1C2E5E"/>
+                    </a:solidFill>
+                  </a:tcPr>
+                </a:tc>
+                <a:tc>
+                  <a:txBody>
+                    <a:bodyPr/>
+                    <a:lstStyle/>
+                    <a:p>
+                      <a:pPr>
+                        <a:defRPr sz="1100" b="1">
+                          <a:solidFill>
+                            <a:srgbClr val="FFFFFF"/>
+                          </a:solidFill>
+                          <a:latin typeface="Arial"/>
+                        </a:defRPr>
+                      </a:pPr>
+                      <a:r>
+                        <a:t>Decision</a:t>
+                      </a:r>
+                    </a:p>
+                  </a:txBody>
+                  <a:tcPr>
+                    <a:solidFill>
+                      <a:srgbClr val="1C2E5E"/>
+                    </a:solidFill>
+                  </a:tcPr>
+                </a:tc>
+                <a:tc>
+                  <a:txBody>
+                    <a:bodyPr/>
+                    <a:lstStyle/>
+                    <a:p>
+                      <a:pPr>
+                        <a:defRPr sz="1100" b="1">
+                          <a:solidFill>
+                            <a:srgbClr val="FFFFFF"/>
+                          </a:solidFill>
+                          <a:latin typeface="Arial"/>
+                        </a:defRPr>
+                      </a:pPr>
+                      <a:r>
+                        <a:t>Justification</a:t>
+                      </a:r>
+                    </a:p>
+                  </a:txBody>
+                  <a:tcPr>
+                    <a:solidFill>
+                      <a:srgbClr val="1C2E5E"/>
+                    </a:solidFill>
+                  </a:tcPr>
+                </a:tc>
+              </a:tr>
+              <a:tr h="633333">
+                <a:tc>
+                  <a:txBody>
+                    <a:bodyPr/>
+                    <a:lstStyle/>
+                    <a:p>
+                      <a:pPr>
+                        <a:defRPr sz="1000">
+                          <a:solidFill>
+                            <a:srgbClr val="272727"/>
+                          </a:solidFill>
+                          <a:latin typeface="Arial"/>
+                        </a:defRPr>
+                      </a:pPr>
+                      <a:r>
+                        <a:t>1. Pandas ceiling</a:t>
+                      </a:r>
+                    </a:p>
+                  </a:txBody>
+                  <a:tcPr/>
+                </a:tc>
+                <a:tc>
+                  <a:txBody>
+                    <a:bodyPr/>
+                    <a:lstStyle/>
+                    <a:p>
+                      <a:pPr>
+                        <a:defRPr sz="1000">
+                          <a:solidFill>
+                            <a:srgbClr val="272727"/>
+                          </a:solidFill>
+                          <a:latin typeface="Arial"/>
+                        </a:defRPr>
+                      </a:pPr>
+                      <a:r>
+                        <a:t>Distributed Spark via AWS Glue</a:t>
+                      </a:r>
+                    </a:p>
+                  </a:txBody>
+                  <a:tcPr/>
+                </a:tc>
+                <a:tc>
+                  <a:txBody>
+                    <a:bodyPr/>
+                    <a:lstStyle/>
+                    <a:p>
+                      <a:pPr>
+                        <a:defRPr sz="1000">
+                          <a:solidFill>
+                            <a:srgbClr val="272727"/>
+                          </a:solidFill>
+                          <a:latin typeface="Arial"/>
+                        </a:defRPr>
+                      </a:pPr>
+                      <a:r>
+                        <a:t>80 hrs serial on one machine vs. parallel across a cluster with built-in retry</a:t>
+                      </a:r>
+                    </a:p>
+                  </a:txBody>
+                  <a:tcPr/>
+                </a:tc>
+              </a:tr>
+              <a:tr h="633333">
+                <a:tc>
+                  <a:txBody>
+                    <a:bodyPr/>
+                    <a:lstStyle/>
+                    <a:p>
+                      <a:pPr>
+                        <a:defRPr sz="1000">
+                          <a:solidFill>
+                            <a:srgbClr val="272727"/>
+                          </a:solidFill>
+                          <a:latin typeface="Arial"/>
+                        </a:defRPr>
+                      </a:pPr>
+                      <a:r>
+                        <a:t>2. Processing location</a:t>
+                      </a:r>
+                    </a:p>
+                  </a:txBody>
+                  <a:tcPr/>
+                </a:tc>
+                <a:tc>
+                  <a:txBody>
+                    <a:bodyPr/>
+                    <a:lstStyle/>
+                    <a:p>
+                      <a:pPr>
+                        <a:defRPr sz="1000">
+                          <a:solidFill>
+                            <a:srgbClr val="272727"/>
+                          </a:solidFill>
+                          <a:latin typeface="Arial"/>
+                        </a:defRPr>
+                      </a:pPr>
+                      <a:r>
+                        <a:t>AWS Glue (ingest/clean) + Snowflake (integrate/serve)</a:t>
+                      </a:r>
+                    </a:p>
+                  </a:txBody>
+                  <a:tcPr/>
+                </a:tc>
+                <a:tc>
+                  <a:txBody>
+                    <a:bodyPr/>
+                    <a:lstStyle/>
+                    <a:p>
+                      <a:pPr>
+                        <a:defRPr sz="1000">
+                          <a:solidFill>
+                            <a:srgbClr val="272727"/>
+                          </a:solidFill>
+                          <a:latin typeface="Arial"/>
+                        </a:defRPr>
+                      </a:pPr>
+                      <a:r>
+                        <a:t>Serverless Spark for Python cleaning; Snowflake SQL for joins/dedup on existing license</a:t>
+                      </a:r>
+                    </a:p>
+                  </a:txBody>
+                  <a:tcPr/>
+                </a:tc>
+              </a:tr>
+              <a:tr h="633333">
+                <a:tc>
+                  <a:txBody>
+                    <a:bodyPr/>
+                    <a:lstStyle/>
+                    <a:p>
+                      <a:pPr>
+                        <a:defRPr sz="1000">
+                          <a:solidFill>
+                            <a:srgbClr val="272727"/>
+                          </a:solidFill>
+                          <a:latin typeface="Arial"/>
+                        </a:defRPr>
+                      </a:pPr>
+                      <a:r>
+                        <a:t>3. Failure recovery</a:t>
+                      </a:r>
+                    </a:p>
+                  </a:txBody>
+                  <a:tcPr/>
+                </a:tc>
+                <a:tc>
+                  <a:txBody>
+                    <a:bodyPr/>
+                    <a:lstStyle/>
+                    <a:p>
+                      <a:pPr>
+                        <a:defRPr sz="1000">
+                          <a:solidFill>
+                            <a:srgbClr val="272727"/>
+                          </a:solidFill>
+                          <a:latin typeface="Arial"/>
+                        </a:defRPr>
+                      </a:pPr>
+                      <a:r>
+                        <a:t>Medallion layers + COPY INTO idempotency</a:t>
+                      </a:r>
+                    </a:p>
+                  </a:txBody>
+                  <a:tcPr/>
+                </a:tc>
+                <a:tc>
+                  <a:txBody>
+                    <a:bodyPr/>
+                    <a:lstStyle/>
+                    <a:p>
+                      <a:pPr>
+                        <a:defRPr sz="1000">
+                          <a:solidFill>
+                            <a:srgbClr val="272727"/>
+                          </a:solidFill>
+                          <a:latin typeface="Arial"/>
+                        </a:defRPr>
+                      </a:pPr>
+                      <a:r>
+                        <a:t>Layers isolate failures to affected dates; COPY INTO prevents duplicates on re-run</a:t>
+                      </a:r>
+                    </a:p>
+                  </a:txBody>
+                  <a:tcPr/>
+                </a:tc>
+              </a:tr>
+              <a:tr h="633333">
+                <a:tc>
+                  <a:txBody>
+                    <a:bodyPr/>
+                    <a:lstStyle/>
+                    <a:p>
+                      <a:pPr>
+                        <a:defRPr sz="1000">
+                          <a:solidFill>
+                            <a:srgbClr val="272727"/>
+                          </a:solidFill>
+                          <a:latin typeface="Arial"/>
+                        </a:defRPr>
+                      </a:pPr>
+                      <a:r>
+                        <a:t>4. Layer placement</a:t>
+                      </a:r>
+                    </a:p>
+                  </a:txBody>
+                  <a:tcPr/>
+                </a:tc>
+                <a:tc>
+                  <a:txBody>
+                    <a:bodyPr/>
+                    <a:lstStyle/>
+                    <a:p>
+                      <a:pPr>
+                        <a:defRPr sz="1000">
+                          <a:solidFill>
+                            <a:srgbClr val="272727"/>
+                          </a:solidFill>
+                          <a:latin typeface="Arial"/>
+                        </a:defRPr>
+                      </a:pPr>
+                      <a:r>
+                        <a:t>S3 for Bronze/Silver, Snowflake for Gold</a:t>
+                      </a:r>
+                    </a:p>
+                  </a:txBody>
+                  <a:tcPr/>
+                </a:tc>
+                <a:tc>
+                  <a:txBody>
+                    <a:bodyPr/>
+                    <a:lstStyle/>
+                    <a:p>
+                      <a:pPr>
+                        <a:defRPr sz="1000">
+                          <a:solidFill>
+                            <a:srgbClr val="272727"/>
+                          </a:solidFill>
+                          <a:latin typeface="Arial"/>
+                        </a:defRPr>
+                      </a:pPr>
+                      <a:r>
+                        <a:t>S3 at $0.023/GB for bulk; Snowflake permanent tables for dashboard speed + recovery</a:t>
+                      </a:r>
+                    </a:p>
+                  </a:txBody>
+                  <a:tcPr/>
+                </a:tc>
+              </a:tr>
+              <a:tr h="633335">
+                <a:tc>
+                  <a:txBody>
+                    <a:bodyPr/>
+                    <a:lstStyle/>
+                    <a:p>
+                      <a:pPr>
+                        <a:defRPr sz="1000">
+                          <a:solidFill>
+                            <a:srgbClr val="272727"/>
+                          </a:solidFill>
+                          <a:latin typeface="Arial"/>
+                        </a:defRPr>
+                      </a:pPr>
+                      <a:r>
+                        <a:t>5. Today's data</a:t>
+                      </a:r>
+                    </a:p>
+                  </a:txBody>
+                  <a:tcPr/>
+                </a:tc>
+                <a:tc>
+                  <a:txBody>
+                    <a:bodyPr/>
+                    <a:lstStyle/>
+                    <a:p>
+                      <a:pPr>
+                        <a:defRPr sz="1000">
+                          <a:solidFill>
+                            <a:srgbClr val="272727"/>
+                          </a:solidFill>
+                          <a:latin typeface="Arial"/>
+                        </a:defRPr>
+                      </a:pPr>
+                      <a:r>
+                        <a:t>Daily-rebuilt transient table + clustering</a:t>
+                      </a:r>
+                    </a:p>
+                  </a:txBody>
+                  <a:tcPr/>
+                </a:tc>
+                <a:tc>
+                  <a:txBody>
+                    <a:bodyPr/>
+                    <a:lstStyle/>
+                    <a:p>
+                      <a:pPr>
+                        <a:defRPr sz="1000">
+                          <a:solidFill>
+                            <a:srgbClr val="272727"/>
+                          </a:solidFill>
+                          <a:latin typeface="Arial"/>
+                        </a:defRPr>
+                      </a:pPr>
+                      <a:r>
+                        <a:t>Pre-built table avoids repeated scans; clustering enables fast historical ad-hoc queries</a:t>
+                      </a:r>
+                    </a:p>
+                  </a:txBody>
+                  <a:tcPr/>
+                </a:tc>
+              </a:tr>
+            </a:tbl>
+          </a:graphicData>
+        </a:graphic>
+      </p:graphicFrame>
     </p:spTree>
   </p:cSld>
   <p:clrMapOvr>
@@ -4405,123 +11597,493 @@
       <p:grpSpPr/>
       <p:sp>
         <p:nvSpPr>
-          <p:cNvPr id="2" name="Title 1"/>
-          <p:cNvSpPr>
-            <a:spLocks noGrp="1"/>
-          </p:cNvSpPr>
-          <p:nvPr>
-            <p:ph type="title"/>
-          </p:nvPr>
-        </p:nvSpPr>
-        <p:spPr/>
-        <p:txBody>
-          <a:bodyPr/>
-          <a:lstStyle/>
-          <a:p>
-            <a:r>
-              <a:t>Top Three Risks</a:t>
-            </a:r>
-          </a:p>
-        </p:txBody>
-      </p:sp>
-      <p:sp>
-        <p:nvSpPr>
-          <p:cNvPr id="3" name="Content Placeholder 2"/>
-          <p:cNvSpPr>
-            <a:spLocks noGrp="1"/>
-          </p:cNvSpPr>
-          <p:nvPr>
-            <p:ph idx="1"/>
-          </p:nvPr>
-        </p:nvSpPr>
-        <p:spPr/>
-        <p:txBody>
-          <a:bodyPr/>
-          <a:lstStyle/>
-          <a:p>
-            <a:pPr>
-              <a:defRPr sz="1800"/>
-            </a:pPr>
-            <a:r>
-              <a:t>1. Partner file quality degrades silently</a:t>
-            </a:r>
-          </a:p>
-          <a:p>
-            <a:pPr lvl="1">
-              <a:defRPr sz="1600"/>
-            </a:pPr>
-            <a:r>
-              <a:t>Mitigation: data contract gate between Bronze and Silver</a:t>
-            </a:r>
-          </a:p>
-          <a:p>
-            <a:pPr lvl="1">
-              <a:defRPr sz="1600"/>
-            </a:pPr>
-            <a:r>
-              <a:t>Schema checks, row-count thresholds, freshness alerts; quarantine on failure</a:t>
-            </a:r>
-          </a:p>
-          <a:p>
-            <a:pPr>
-              <a:defRPr sz="1800"/>
-            </a:pPr>
-          </a:p>
-          <a:p>
-            <a:pPr>
-              <a:defRPr sz="1800"/>
-            </a:pPr>
-            <a:r>
-              <a:t>2. Backfill takes longer than estimated, blocks cutover</a:t>
-            </a:r>
-          </a:p>
-          <a:p>
-            <a:pPr lvl="1">
-              <a:defRPr sz="1600"/>
-            </a:pPr>
-            <a:r>
-              <a:t>Mitigation: run backfill on a separate Glue job with higher parallelism</a:t>
-            </a:r>
-          </a:p>
-          <a:p>
-            <a:pPr lvl="1">
-              <a:defRPr sz="1600"/>
-            </a:pPr>
-            <a:r>
-              <a:t>Process in date-range chunks; validate incrementally rather than all-or-nothing</a:t>
-            </a:r>
-          </a:p>
-          <a:p>
-            <a:pPr>
-              <a:defRPr sz="1800"/>
-            </a:pPr>
-          </a:p>
-          <a:p>
-            <a:pPr>
-              <a:defRPr sz="1800"/>
-            </a:pPr>
-            <a:r>
-              <a:t>3. Snowflake costs spike unexpectedly during peak analyst usage</a:t>
-            </a:r>
-          </a:p>
-          <a:p>
-            <a:pPr lvl="1">
-              <a:defRPr sz="1600"/>
-            </a:pPr>
-            <a:r>
-              <a:t>Mitigation: auto-suspend warehouse after 60s idle, resource monitors with alerts</a:t>
-            </a:r>
-          </a:p>
-          <a:p>
-            <a:pPr lvl="1">
-              <a:defRPr sz="1600"/>
-            </a:pPr>
-            <a:r>
-              <a:t>Separate warehouse for dashboard reads vs. ETL loads</a:t>
-            </a:r>
-          </a:p>
-        </p:txBody>
-      </p:sp>
+          <p:cNvPr id="2" name="Rectangle 1"/>
+          <p:cNvSpPr/>
+          <p:nvPr/>
+        </p:nvSpPr>
+        <p:spPr>
+          <a:xfrm>
+            <a:off x="0" y="0"/>
+            <a:ext cx="12192000" cy="1143000"/>
+          </a:xfrm>
+          <a:prstGeom prst="rect">
+            <a:avLst/>
+          </a:prstGeom>
+          <a:solidFill>
+            <a:srgbClr val="1C2E5E"/>
+          </a:solidFill>
+          <a:ln>
+            <a:noFill/>
+          </a:ln>
+        </p:spPr>
+        <p:style>
+          <a:lnRef idx="1">
+            <a:schemeClr val="accent1"/>
+          </a:lnRef>
+          <a:fillRef idx="3">
+            <a:schemeClr val="accent1"/>
+          </a:fillRef>
+          <a:effectRef idx="2">
+            <a:schemeClr val="accent1"/>
+          </a:effectRef>
+          <a:fontRef idx="minor">
+            <a:schemeClr val="lt1"/>
+          </a:fontRef>
+        </p:style>
+        <p:txBody>
+          <a:bodyPr rtlCol="0" anchor="ctr"/>
+          <a:lstStyle/>
+          <a:p>
+            <a:pPr algn="ctr"/>
+          </a:p>
+        </p:txBody>
+      </p:sp>
+      <p:sp>
+        <p:nvSpPr>
+          <p:cNvPr id="3" name="TextBox 2"/>
+          <p:cNvSpPr txBox="1"/>
+          <p:nvPr/>
+        </p:nvSpPr>
+        <p:spPr>
+          <a:xfrm>
+            <a:off x="457200" y="137160"/>
+            <a:ext cx="11247120" cy="548640"/>
+          </a:xfrm>
+          <a:prstGeom prst="rect">
+            <a:avLst/>
+          </a:prstGeom>
+          <a:noFill/>
+        </p:spPr>
+        <p:txBody>
+          <a:bodyPr wrap="square">
+            <a:spAutoFit/>
+          </a:bodyPr>
+          <a:lstStyle/>
+          <a:p>
+            <a:pPr>
+              <a:defRPr sz="3000" b="1">
+                <a:solidFill>
+                  <a:srgbClr val="FFFFFF"/>
+                </a:solidFill>
+                <a:latin typeface="Georgia"/>
+              </a:defRPr>
+            </a:pPr>
+            <a:r>
+              <a:t>Sizing Table</a:t>
+            </a:r>
+          </a:p>
+        </p:txBody>
+      </p:sp>
+      <p:sp>
+        <p:nvSpPr>
+          <p:cNvPr id="4" name="TextBox 3"/>
+          <p:cNvSpPr txBox="1"/>
+          <p:nvPr/>
+        </p:nvSpPr>
+        <p:spPr>
+          <a:xfrm>
+            <a:off x="457200" y="640080"/>
+            <a:ext cx="11247120" cy="320040"/>
+          </a:xfrm>
+          <a:prstGeom prst="rect">
+            <a:avLst/>
+          </a:prstGeom>
+          <a:noFill/>
+        </p:spPr>
+        <p:txBody>
+          <a:bodyPr wrap="square">
+            <a:spAutoFit/>
+          </a:bodyPr>
+          <a:lstStyle/>
+          <a:p>
+            <a:pPr>
+              <a:defRPr sz="1400" b="0">
+                <a:solidFill>
+                  <a:srgbClr val="FE97C0"/>
+                </a:solidFill>
+                <a:latin typeface="Arial"/>
+              </a:defRPr>
+            </a:pPr>
+            <a:r>
+              <a:t>Estimates and Assumptions  |  Required Deliverable #3</a:t>
+            </a:r>
+          </a:p>
+        </p:txBody>
+      </p:sp>
+      <p:sp>
+        <p:nvSpPr>
+          <p:cNvPr id="5" name="Rectangle 4"/>
+          <p:cNvSpPr/>
+          <p:nvPr/>
+        </p:nvSpPr>
+        <p:spPr>
+          <a:xfrm>
+            <a:off x="0" y="6784848"/>
+            <a:ext cx="12192000" cy="73152"/>
+          </a:xfrm>
+          <a:prstGeom prst="rect">
+            <a:avLst/>
+          </a:prstGeom>
+          <a:solidFill>
+            <a:srgbClr val="1C2E5E"/>
+          </a:solidFill>
+          <a:ln>
+            <a:noFill/>
+          </a:ln>
+        </p:spPr>
+        <p:style>
+          <a:lnRef idx="1">
+            <a:schemeClr val="accent1"/>
+          </a:lnRef>
+          <a:fillRef idx="3">
+            <a:schemeClr val="accent1"/>
+          </a:fillRef>
+          <a:effectRef idx="2">
+            <a:schemeClr val="accent1"/>
+          </a:effectRef>
+          <a:fontRef idx="minor">
+            <a:schemeClr val="lt1"/>
+          </a:fontRef>
+        </p:style>
+        <p:txBody>
+          <a:bodyPr rtlCol="0" anchor="ctr"/>
+          <a:lstStyle/>
+          <a:p>
+            <a:pPr algn="ctr"/>
+          </a:p>
+        </p:txBody>
+      </p:sp>
+      <p:sp>
+        <p:nvSpPr>
+          <p:cNvPr id="6" name="Rounded Rectangle 5"/>
+          <p:cNvSpPr/>
+          <p:nvPr/>
+        </p:nvSpPr>
+        <p:spPr>
+          <a:xfrm>
+            <a:off x="365760" y="1371600"/>
+            <a:ext cx="11460174" cy="5100000"/>
+          </a:xfrm>
+          <a:prstGeom prst="roundRect">
+            <a:avLst/>
+          </a:prstGeom>
+          <a:solidFill>
+            <a:srgbClr val="FAFAFA"/>
+          </a:solidFill>
+          <a:ln>
+            <a:solidFill>
+              <a:srgbClr val="DDDDDD"/>
+            </a:solidFill>
+          </a:ln>
+        </p:spPr>
+        <p:style>
+          <a:lnRef idx="1">
+            <a:schemeClr val="accent1"/>
+          </a:lnRef>
+          <a:fillRef idx="3">
+            <a:schemeClr val="accent1"/>
+          </a:fillRef>
+          <a:effectRef idx="2">
+            <a:schemeClr val="accent1"/>
+          </a:effectRef>
+          <a:fontRef idx="minor">
+            <a:schemeClr val="lt1"/>
+          </a:fontRef>
+        </p:style>
+        <p:txBody>
+          <a:bodyPr rtlCol="0" anchor="ctr"/>
+          <a:lstStyle/>
+          <a:p>
+            <a:pPr algn="ctr"/>
+          </a:p>
+        </p:txBody>
+      </p:sp>
+      <p:graphicFrame>
+        <p:nvGraphicFramePr>
+          <p:cNvPr id="7" name="Table 6"/>
+          <p:cNvGraphicFramePr>
+            <a:graphicFrameLocks noGrp="1"/>
+          </p:cNvGraphicFramePr>
+          <p:nvPr/>
+        </p:nvGraphicFramePr>
+        <p:xfrm>
+          <a:off x="502920" y="1600000"/>
+          <a:ext cx="11100000" cy="4600000"/>
+        </p:xfrm>
+        <a:graphic>
+          <a:graphicData uri="http://schemas.openxmlformats.org/drawingml/2006/table">
+            <a:tbl>
+              <a:tblPr firstRow="1" bandRow="1">
+                <a:tableStyleId>{5C22544A-7EE6-4342-B048-85BDC9FD1C3A}</a:tableStyleId>
+              </a:tblPr>
+              <a:tblGrid>
+                <a:gridCol w="2200000"/>
+                <a:gridCol w="8900000"/>
+              </a:tblGrid>
+              <a:tr h="766666">
+                <a:tc>
+                  <a:txBody>
+                    <a:bodyPr/>
+                    <a:lstStyle/>
+                    <a:p>
+                      <a:pPr>
+                        <a:defRPr sz="1100" b="1">
+                          <a:solidFill>
+                            <a:srgbClr val="FFFFFF"/>
+                          </a:solidFill>
+                          <a:latin typeface="Arial"/>
+                        </a:defRPr>
+                      </a:pPr>
+                      <a:r>
+                        <a:t>Question</a:t>
+                      </a:r>
+                    </a:p>
+                  </a:txBody>
+                  <a:tcPr>
+                    <a:solidFill>
+                      <a:srgbClr val="1C2E5E"/>
+                    </a:solidFill>
+                  </a:tcPr>
+                </a:tc>
+                <a:tc>
+                  <a:txBody>
+                    <a:bodyPr/>
+                    <a:lstStyle/>
+                    <a:p>
+                      <a:pPr>
+                        <a:defRPr sz="1100" b="1">
+                          <a:solidFill>
+                            <a:srgbClr val="FFFFFF"/>
+                          </a:solidFill>
+                          <a:latin typeface="Arial"/>
+                        </a:defRPr>
+                      </a:pPr>
+                      <a:r>
+                        <a:t>Answer</a:t>
+                      </a:r>
+                    </a:p>
+                  </a:txBody>
+                  <a:tcPr>
+                    <a:solidFill>
+                      <a:srgbClr val="1C2E5E"/>
+                    </a:solidFill>
+                  </a:tcPr>
+                </a:tc>
+              </a:tr>
+              <a:tr h="766666">
+                <a:tc>
+                  <a:txBody>
+                    <a:bodyPr/>
+                    <a:lstStyle/>
+                    <a:p>
+                      <a:pPr>
+                        <a:defRPr sz="1000" b="1">
+                          <a:solidFill>
+                            <a:srgbClr val="272727"/>
+                          </a:solidFill>
+                          <a:latin typeface="Arial"/>
+                        </a:defRPr>
+                      </a:pPr>
+                      <a:r>
+                        <a:t>Tools</a:t>
+                      </a:r>
+                    </a:p>
+                  </a:txBody>
+                  <a:tcPr/>
+                </a:tc>
+                <a:tc>
+                  <a:txBody>
+                    <a:bodyPr/>
+                    <a:lstStyle/>
+                    <a:p>
+                      <a:pPr>
+                        <a:defRPr sz="1000">
+                          <a:solidFill>
+                            <a:srgbClr val="272727"/>
+                          </a:solidFill>
+                          <a:latin typeface="Arial"/>
+                        </a:defRPr>
+                      </a:pPr>
+                      <a:r>
+                        <a:t>S3 (raw/clean storage), AWS Glue (Spark ETL), Snowflake (warehouse + serving), Glue Workflows (orchestration)</a:t>
+                      </a:r>
+                    </a:p>
+                  </a:txBody>
+                  <a:tcPr/>
+                </a:tc>
+              </a:tr>
+              <a:tr h="766666">
+                <a:tc>
+                  <a:txBody>
+                    <a:bodyPr/>
+                    <a:lstStyle/>
+                    <a:p>
+                      <a:pPr>
+                        <a:defRPr sz="1000" b="1">
+                          <a:solidFill>
+                            <a:srgbClr val="272727"/>
+                          </a:solidFill>
+                          <a:latin typeface="Arial"/>
+                        </a:defRPr>
+                      </a:pPr>
+                      <a:r>
+                        <a:t>Build effort</a:t>
+                      </a:r>
+                    </a:p>
+                  </a:txBody>
+                  <a:tcPr/>
+                </a:tc>
+                <a:tc>
+                  <a:txBody>
+                    <a:bodyPr/>
+                    <a:lstStyle/>
+                    <a:p>
+                      <a:pPr>
+                        <a:defRPr sz="1000">
+                          <a:solidFill>
+                            <a:srgbClr val="272727"/>
+                          </a:solidFill>
+                          <a:latin typeface="Arial"/>
+                        </a:defRPr>
+                      </a:pPr>
+                      <a:r>
+                        <a:t>Wk 1-2: Harden PoC + Glue pipeline | Wk 3-4: Integration SQL (joins, dedup) | Wk 5-6: Backfill historical TB | Wk 7: Cutover + monitoring</a:t>
+                      </a:r>
+                    </a:p>
+                  </a:txBody>
+                  <a:tcPr/>
+                </a:tc>
+              </a:tr>
+              <a:tr h="766666">
+                <a:tc>
+                  <a:txBody>
+                    <a:bodyPr/>
+                    <a:lstStyle/>
+                    <a:p>
+                      <a:pPr>
+                        <a:defRPr sz="1000" b="1">
+                          <a:solidFill>
+                            <a:srgbClr val="272727"/>
+                          </a:solidFill>
+                          <a:latin typeface="Arial"/>
+                        </a:defRPr>
+                      </a:pPr>
+                      <a:r>
+                        <a:t>The backfill</a:t>
+                      </a:r>
+                    </a:p>
+                  </a:txBody>
+                  <a:tcPr/>
+                </a:tc>
+                <a:tc>
+                  <a:txBody>
+                    <a:bodyPr/>
+                    <a:lstStyle/>
+                    <a:p>
+                      <a:pPr>
+                        <a:defRPr sz="1000">
+                          <a:solidFill>
+                            <a:srgbClr val="272727"/>
+                          </a:solidFill>
+                          <a:latin typeface="Arial"/>
+                        </a:defRPr>
+                      </a:pPr>
+                      <a:r>
+                        <a:t>~100 hrs for 200 TB at ~2 TB/hr (10 Glue workers, G.2X). Same pipeline logic, higher parallelism. Process in date-range chunks.</a:t>
+                      </a:r>
+                    </a:p>
+                  </a:txBody>
+                  <a:tcPr/>
+                </a:tc>
+              </a:tr>
+              <a:tr h="766666">
+                <a:tc>
+                  <a:txBody>
+                    <a:bodyPr/>
+                    <a:lstStyle/>
+                    <a:p>
+                      <a:pPr>
+                        <a:defRPr sz="1000" b="1">
+                          <a:solidFill>
+                            <a:srgbClr val="272727"/>
+                          </a:solidFill>
+                          <a:latin typeface="Arial"/>
+                        </a:defRPr>
+                      </a:pPr>
+                      <a:r>
+                        <a:t>Team</a:t>
+                      </a:r>
+                    </a:p>
+                  </a:txBody>
+                  <a:tcPr/>
+                </a:tc>
+                <a:tc>
+                  <a:txBody>
+                    <a:bodyPr/>
+                    <a:lstStyle/>
+                    <a:p>
+                      <a:pPr>
+                        <a:defRPr sz="1000">
+                          <a:solidFill>
+                            <a:srgbClr val="272727"/>
+                          </a:solidFill>
+                          <a:latin typeface="Arial"/>
+                        </a:defRPr>
+                      </a:pPr>
+                      <a:r>
+                        <a:t>2 data engineers (pipeline + SQL), 1 platform/DevOps (infra + monitoring), 1 analyst liaison (validation). Smallest viable: 2 DEs.</a:t>
+                      </a:r>
+                    </a:p>
+                  </a:txBody>
+                  <a:tcPr/>
+                </a:tc>
+              </a:tr>
+              <a:tr h="766670">
+                <a:tc>
+                  <a:txBody>
+                    <a:bodyPr/>
+                    <a:lstStyle/>
+                    <a:p>
+                      <a:pPr>
+                        <a:defRPr sz="1000" b="1">
+                          <a:solidFill>
+                            <a:srgbClr val="272727"/>
+                          </a:solidFill>
+                          <a:latin typeface="Arial"/>
+                        </a:defRPr>
+                      </a:pPr>
+                      <a:r>
+                        <a:t>Run cost drivers</a:t>
+                      </a:r>
+                    </a:p>
+                  </a:txBody>
+                  <a:tcPr/>
+                </a:tc>
+                <a:tc>
+                  <a:txBody>
+                    <a:bodyPr/>
+                    <a:lstStyle/>
+                    <a:p>
+                      <a:pPr>
+                        <a:defRPr sz="1000">
+                          <a:solidFill>
+                            <a:srgbClr val="272727"/>
+                          </a:solidFill>
+                          <a:latin typeface="Arial"/>
+                        </a:defRPr>
+                      </a:pPr>
+                      <a:r>
+                        <a:t>S3: ~$5K/mo (200 TB, knob: lifecycle to Glacier) | Glue: ~$1.2K/mo (2,400 files, knob: worker count) | Snowflake: ~$2K/mo (knob: auto-suspend + WH size)</a:t>
+                      </a:r>
+                    </a:p>
+                  </a:txBody>
+                  <a:tcPr/>
+                </a:tc>
+              </a:tr>
+            </a:tbl>
+          </a:graphicData>
+        </a:graphic>
+      </p:graphicFrame>
     </p:spTree>
   </p:cSld>
   <p:clrMapOvr>
